--- a/ppt/Sleep_Health_Cluster_Computing_Presentation.pptx
+++ b/ppt/Sleep_Health_Cluster_Computing_Presentation.pptx
@@ -519,13 +519,7 @@
           </a:p>
           <a:p>
             <a:r>
-              <a:t>Good morning/afternoon, respected faculty guide Dr. Pardeep Kumar and members of the evaluation committee. I am Vecha Laxmi Swaraj Babu, registration number 12307477, roll number 45. Today, I am presenting my CA1 Project for INT315 Cluster Computing: 'Sleep Health Analysis and Disorder Risk Prediction Using Apache PySpark'.</a:t>
-            </a:r>
-          </a:p>
-          <a:p/>
-          <a:p>
-            <a:r>
-              <a:t>In this project, we designed and implemented a distributed, multi-class machine learning workflow on Apache Spark. We ingested a cohort of 100,000 patients across 32 clinical and behavioral attributes, applied distributed data engineering and feature pipelines, and trained an ensemble Random Forest classifier that achieved 82.43% test accuracy on 20,000 unseen patients. All code, dataset, and documentation are live on GitHub under Swarajbabu/SLEEP-HEALTH-ANALYSIS.</a:t>
+              <a:t>Good morning, respected faculty supervisor Dr. Pardeep Kumar and evaluation committee members. I am Vecha Laxmi Swaraj Babu, registration number 12307477, roll number 45. Today I present my INT315 Cluster Computing project: 'Sleep Health Analysis and Disorder Risk Prediction Using Apache PySpark'. We developed a scalable, leakage-free distributed machine learning pipeline for 100,000 patient observations, achieving 82.43% test accuracy on 20,000 unseen patients. All code, dataset, and documentation are hosted on GitHub under Swarajbabu/SLEEP-HEALTH-ANALYSIS.</a:t>
             </a:r>
           </a:p>
         </p:txBody>
@@ -600,39 +594,7 @@
           </a:p>
           <a:p>
             <a:r>
-              <a:t>Now, let's examine the primary quantitative results of our project.</a:t>
-            </a:r>
-          </a:p>
-          <a:p/>
-          <a:p>
-            <a:r>
-              <a:t>Evaluated on 20,000 completely unseen patients via PySpark's MulticlassClassificationEvaluator:</a:t>
-            </a:r>
-          </a:p>
-          <a:p>
-            <a:r>
-              <a:t>Our overall classification accuracy reached 82.43%.</a:t>
-            </a:r>
-          </a:p>
-          <a:p>
-            <a:r>
-              <a:t>Our weighted F1-score reached 81.32%.</a:t>
-            </a:r>
-          </a:p>
-          <a:p>
-            <a:r>
-              <a:t>Our weighted precision is 80.35%, and weighted recall is 82.43%.</a:t>
-            </a:r>
-          </a:p>
-          <a:p/>
-          <a:p>
-            <a:r>
-              <a:t>Why is this impressive? First, remember our naive majority baseline: guessing 'Healthy' every time gives 54.16%. Our model outperforms the baseline by more than 28 percentage points.</a:t>
-            </a:r>
-          </a:p>
-          <a:p>
-            <a:r>
-              <a:t>Second, the close parity between precision (80.35%) and recall (82.43%) demonstrates that the Random Forest model is clinically balanced: it minimizes false-positive alarms while maintaining high sensitivity to prevent dangerous false negatives in patients with severe apnea.</a:t>
+              <a:t>Here are our empirical results on 20,000 unseen patients. Overall Accuracy reached 82.43%, Weighted F1 reached 81.32%, Precision reached 80.35%, and Recall reached 82.43%. This outperforms the naive majority baseline of 54.16% by more than 28 percentage points. The balance between precision and recall ensures that we minimize false alarms while preventing missed diagnoses in high-risk patients.</a:t>
             </a:r>
           </a:p>
         </p:txBody>
@@ -707,28 +669,7 @@
           </a:p>
           <a:p>
             <a:r>
-              <a:t>Because this is an evaluation for INT315 Cluster Computing, Slide 11 breaks down the three core distributed computing advantages of Apache Spark over single-node systems:</a:t>
-            </a:r>
-          </a:p>
-          <a:p/>
-          <a:p>
-            <a:r>
-              <a:t>First: Catalyst Query Optimization and Lazy DAG Execution. Spark does not compute intermediate steps immediately. It optimizes the physical execution plan by combining column projections and pushing down predicates before touching memory.</a:t>
-            </a:r>
-          </a:p>
-          <a:p>
-            <a:r>
-              <a:t>Second: In-Memory Caching. In our code, we explicitly invoked predictions.cache(). Because we ran four separate evaluations—Accuracy, F1, Precision, and Recall—without caching, Spark would have re-evaluated the entire feature indexer, encoder, and random forest inference four separate times! Caching saved substantial runtime.</a:t>
-            </a:r>
-          </a:p>
-          <a:p>
-            <a:r>
-              <a:t>Third: Parallel tree induction across CPU worker threads.</a:t>
-            </a:r>
-          </a:p>
-          <a:p>
-            <a:r>
-              <a:t>Fourth: Enterprise scalability. This code is written with standard PySpark APIs. It can be moved directly from Google Colab to an AWS EMR cluster or on-premise Hadoop YARN cluster without changing the pipeline logic.</a:t>
+              <a:t>Because this is an INT315 Cluster Computing evaluation, Slide 11 breaks down the three architectural advantages of Apache Spark over single-node systems: Catalyst query optimization, in-memory caching via .cache(), and multi-threaded parallel tree induction. Furthermore, this pipeline is 100% portable to enterprise AWS EMR or Hadoop YARN clusters without changing application code.</a:t>
             </a:r>
           </a:p>
         </p:txBody>
@@ -803,34 +744,7 @@
           </a:p>
           <a:p>
             <a:r>
-              <a:t>An experienced engineer always evaluates the trade-offs and limitations of their work.</a:t>
-            </a:r>
-          </a:p>
-          <a:p/>
-          <a:p>
-            <a:r>
-              <a:t>On the left, we acknowledge three limitations: first, the dataset is calibrated against CDC NHIS data but is synthetically generated; second, our cluster was simulated in local[*] mode on Google Colab rather than a physical multi-server rack; and third, hyperparameters were fixed manually.</a:t>
-            </a:r>
-          </a:p>
-          <a:p/>
-          <a:p>
-            <a:r>
-              <a:t>On the right, we outline our roadmap for future enhancements:</a:t>
-            </a:r>
-          </a:p>
-          <a:p>
-            <a:r>
-              <a:t>First, distributed hyperparameter tuning using ParamGridBuilder and CrossValidator.</a:t>
-            </a:r>
-          </a:p>
-          <a:p>
-            <a:r>
-              <a:t>Second, class-weighted rebalancing to increase sensitivity on the rare 4% severe group.</a:t>
-            </a:r>
-          </a:p>
-          <a:p>
-            <a:r>
-              <a:t>Third, extending the architecture to Spark Structured Streaming and Apache Kafka to process real-time wearable streams as patients sleep.</a:t>
+              <a:t>A mature engineering presentation acknowledges limitations and outlines a roadmap. We note our synthetic data calibration and single-node cluster simulation. For future work, we propose distributed hyperparameter tuning, class-weighted rebalancing, and Spark Structured Streaming for real-time smartwatch streams.</a:t>
             </a:r>
           </a:p>
         </p:txBody>
@@ -905,19 +819,7 @@
           </a:p>
           <a:p>
             <a:r>
-              <a:t>In conclusion, we have demonstrated that Apache PySpark provides the ideal distributed cluster computing infrastructure for large-scale clinical sleep risk triage. We achieved 82.43% accuracy on 20,000 unseen patients while eliminating single-node memory failure and preventing target leakage.</a:t>
-            </a:r>
-          </a:p>
-          <a:p/>
-          <a:p>
-            <a:r>
-              <a:t>All project artifacts—the 16-page report, executable notebook, dataset, visual screenshots, and comprehensive README—are live and verified in our GitHub repository.</a:t>
-            </a:r>
-          </a:p>
-          <a:p/>
-          <a:p>
-            <a:r>
-              <a:t>Thank you, Dr. Pardeep Kumar and respected panel members. I am now ready for your questions and defense.</a:t>
+              <a:t>In conclusion, we have demonstrated that Apache PySpark provides the ideal distributed cluster computing infrastructure for large-scale clinical sleep risk triage. We achieved 82.43% accuracy on 20,000 unseen patients while eliminating single-node memory failure and preventing target leakage. All project artifacts are live on GitHub. Thank you, Dr. Pardeep Kumar and respected panel members. I am ready for your questions.</a:t>
             </a:r>
           </a:p>
         </p:txBody>
@@ -987,30 +889,12 @@
           <a:lstStyle/>
           <a:p>
             <a:r>
-              <a:t>SPEAKER SCRIPT (TIME: 60 SECONDS)</a:t>
-            </a:r>
-          </a:p>
-          <a:p>
-            <a:r>
-              <a:t>Let's look at why this project matters. We face two distinct crises in sleep medicine today: a clinical dilemma and a computational memory wall.</a:t>
-            </a:r>
-          </a:p>
-          <a:p/>
-          <a:p>
-            <a:r>
-              <a:t>Clinically, sleep disorders like sleep apnea and insomnia affect over 30% of adults. However, the only gold-standard diagnostic tool we have is Polysomnography—an overnight sleep lab test with dozens of wired sensors attached to the patient. It's expensive, invasive, and has months of waiting time. We cannot use PSG for mass screening.</a:t>
-            </a:r>
-          </a:p>
-          <a:p/>
-          <a:p>
-            <a:r>
-              <a:t>Computationally, while consumer wearables and clinical registries capture daily step counts, nocturnal heart rate, and sleep stages, analyzing 100,000 patient records across 32 clinical features crashes standard single-node tools. If you try to run one-hot encoding, vector assembly, and random forest fitting in Pandas or Scikit-Learn on a standard machine, memory swapping causes severe lag and out-of-memory errors.</a:t>
-            </a:r>
-          </a:p>
-          <a:p/>
-          <a:p>
-            <a:r>
-              <a:t>This project solves both problems: we use distributed cluster computing with Apache Spark to analyze wearable-derived metrics and predict risk categories in seconds.</a:t>
+              <a:t>SPEAKER SCRIPT (TIME: 50 SECONDS)</a:t>
+            </a:r>
+          </a:p>
+          <a:p>
+            <a:r>
+              <a:t>This project addresses two fundamental bottlenecks in healthcare informatics. Clinically, sleep disorders affect 30% of adults, yet diagnosing them requires Polysomnography—an expensive, hospital-based test with long waitlists that cannot scale for population triage. Computationally, analyzing wearable sensor telemetry for 100,000 patients crashes standard single-node Python tools like Pandas. Apache PySpark solves both problems by distributing computation across cores.</a:t>
             </a:r>
           </a:p>
         </p:txBody>
@@ -1085,27 +969,7 @@
           </a:p>
           <a:p>
             <a:r>
-              <a:t>To accomplish this, we structured the project into four clear, sequential objectives:</a:t>
-            </a:r>
-          </a:p>
-          <a:p>
-            <a:r>
-              <a:t>First, distributed ingestion of 100,000 records using PySpark's resilient DataFrame API in local[*] multi-threading mode.</a:t>
-            </a:r>
-          </a:p>
-          <a:p>
-            <a:r>
-              <a:t>Second, data quality auditing where we run parallel aggregation expressions across all 32 columns at once to confirm zero nulls, followed by exploratory analysis.</a:t>
-            </a:r>
-          </a:p>
-          <a:p>
-            <a:r>
-              <a:t>Third, target leakage elimination. This is a critical engineering decision: we explicitly drop post-sleep recovery variables like felt_rested and cognitive_score, because in real prospective screening, you only have pre-sleep and overnight vitals. We then bundle feature transformations into a Spark MLlib Pipeline.</a:t>
-            </a:r>
-          </a:p>
-          <a:p>
-            <a:r>
-              <a:t>Fourth, distributed ensemble model fitting using Random Forest with 50 trees, caching inference DataFrames in executor memory, and calculating weighted multiclass metrics.</a:t>
+              <a:t>Our work follows four distinct milestones: first, distributed data ingestion of 100,000 records; second, parallel data auditing verifying zero nulls across 32 features; third, eliminating retrospective target leakage to ensure clinical validity; and fourth, distributed ensemble training using PySpark MLlib with in-memory inference caching.</a:t>
             </a:r>
           </a:p>
         </p:txBody>
@@ -1180,19 +1044,7 @@
           </a:p>
           <a:p>
             <a:r>
-              <a:t>Let's look at the dataset architecture. We analyzed the Sleep Health and Daily Performance Dataset, which contains 100,000 patient observations and 32 attributes, calibrated against CDC NHIS benchmarks.</a:t>
-            </a:r>
-          </a:p>
-          <a:p/>
-          <a:p>
-            <a:r>
-              <a:t>The feature space spans five distinct clinical categories: Demographics, Sleep Architecture, Cardiovascular Vitals, Lifestyle and Environmental Factors, and Circadian Dynamics. Notice the bottom section: we explicitly identify three columns for exclusion—person_id and the two retrospective outcome columns, felt_rested and cognitive_performance_score.</a:t>
-            </a:r>
-          </a:p>
-          <a:p/>
-          <a:p>
-            <a:r>
-              <a:t>On the right, examine the target variable distribution. It is stratified into four classes: Healthy at 54.16%, Mild at 33.48%, Moderate at 8.30%, and Severe at 4.07%. This class imbalance is crucial. Healthy and Mild make up over 87% of all patients. If a model simply guessed 'Healthy' every single time, it would appear 54% accurate on paper while being completely useless as a diagnostic tool. Our Spark model will achieve 82.43% precision-recall balanced accuracy.</a:t>
+              <a:t>The dataset encompasses 100,000 patients across 32 clinical features, calibrated against CDC survey data. Notice the class distribution: Healthy is 54%, Mild is 33%, Moderate is 8.3%, and Severe is 4.07%. Because 87% of patients are in the top two categories, a naive model that always predicts Healthy would score 54% on paper. Our model achieves 82.43% balanced precision and recall.</a:t>
             </a:r>
           </a:p>
         </p:txBody>
@@ -1262,43 +1114,12 @@
           <a:lstStyle/>
           <a:p>
             <a:r>
-              <a:t>SPEAKER SCRIPT (TIME: 60 SECONDS)</a:t>
-            </a:r>
-          </a:p>
-          <a:p>
-            <a:r>
-              <a:t>Here is the high-level system architecture of our distributed pipeline. It consists of five orchestrated stages:</a:t>
-            </a:r>
-          </a:p>
-          <a:p>
-            <a:r>
-              <a:t>Stage 1 is lazy distributed ingestion. Spark reads the 100,000 rows without immediately loading all data into JVM heap memory.</a:t>
-            </a:r>
-          </a:p>
-          <a:p>
-            <a:r>
-              <a:t>Stage 2 is parallel quality auditing, verifying 0 missing values across all 32 attributes.</a:t>
-            </a:r>
-          </a:p>
-          <a:p>
-            <a:r>
-              <a:t>Stage 3 is leakage sanitization, splitting data 80/20 using seed 42.</a:t>
-            </a:r>
-          </a:p>
-          <a:p>
-            <a:r>
-              <a:t>Stage 4 is the PySpark MLlib Pipeline, where StringIndexers, OneHotEncoders, VectorAssembler, and RandomForestClassifier are bundled into a single atomic workflow.</a:t>
-            </a:r>
-          </a:p>
-          <a:p>
-            <a:r>
-              <a:t>Stage 5 is cached distributed evaluation.</a:t>
-            </a:r>
-          </a:p>
-          <a:p/>
-          <a:p>
-            <a:r>
-              <a:t>Notice the bottom section on cluster computing principles. The two things that make PySpark dramatically faster than standard Python are Catalyst query optimization and in-memory caching. By calling .cache() on our test predictions, we prevent Spark from re-executing the entire 5-stage feature transformation Directed Acyclic Graph four times during our metric calculations.</a:t>
+              <a:t>SPEAKER SCRIPT (TIME: 55 SECONDS)</a:t>
+            </a:r>
+          </a:p>
+          <a:p>
+            <a:r>
+              <a:t>Here is our complete distributed pipeline. Notice the two architectural advantages: Catalyst Query Optimization and in-memory caching. Catalyst optimizes the physical plan before data moves into memory, while .cache() stores inference predictions in executor RAM, preventing Spark from recomputing the 5-stage pipeline four separate times during metric evaluation.</a:t>
             </a:r>
           </a:p>
         </p:txBody>
@@ -1373,18 +1194,7 @@
           </a:p>
           <a:p>
             <a:r>
-              <a:t>On this slide, you can see the direct execution outputs from our notebook.</a:t>
-            </a:r>
-          </a:p>
-          <a:p>
-            <a:r>
-              <a:t>On the left is our distributed missing value audit. Instead of looping through columns sequentially like standard Python would, we constructed a single Spark SQL select expression combining 32 conditional aggregations. Spark distributes this single pass across all partition blocks, verifying in parallel that zero null values exist across the entire 100,000-record dataset.</a:t>
-            </a:r>
-          </a:p>
-          <a:p/>
-          <a:p>
-            <a:r>
-              <a:t>On the right is our empirical class distribution plot generated using Matplotlib following a Spark collect action. Notice the steep decline: Healthy represents over 54,000 cases, while Severe represents only 4,066 cases. This confirms that standard unweighted accuracy could be easily fooled by a dumb baseline, necessitating weighted multiclass metrics.</a:t>
+              <a:t>On Slide 6, we examine data quality and class distribution. Our parallel scan verified zero missing values across all 32 columns. On the right is the class distribution plot: Healthy and Mild dominate at 87%, while Severe represents 4%. This verified that our model had clean training data but required weighted metrics to handle the imbalance.</a:t>
             </a:r>
           </a:p>
         </p:txBody>
@@ -1459,34 +1269,7 @@
           </a:p>
           <a:p>
             <a:r>
-              <a:t>Here are the four clinical biomarker gradients discovered by running distributed group-by aggregations in PySpark.</a:t>
-            </a:r>
-          </a:p>
-          <a:p/>
-          <a:p>
-            <a:r>
-              <a:t>First, Sleep Duration drops steadily from 6.93 hours in healthy individuals to 4.84 hours in severe patients—a 30.2% drop.</a:t>
-            </a:r>
-          </a:p>
-          <a:p>
-            <a:r>
-              <a:t>Second, Sleep Quality degrades by over 60%, falling from 5.77 down to 2.29.</a:t>
-            </a:r>
-          </a:p>
-          <a:p>
-            <a:r>
-              <a:t>Third, Daily Stress climbs from 5.85 to 7.48, reflecting chronic sympathetic nervous system hyperactivity.</a:t>
-            </a:r>
-          </a:p>
-          <a:p>
-            <a:r>
-              <a:t>Fourth, look at Cognitive Performance: it plummets by 73.7%, collapsing from 72.35 down to just 19.04.</a:t>
-            </a:r>
-          </a:p>
-          <a:p/>
-          <a:p>
-            <a:r>
-              <a:t>This is a vital medical insight: the cognitive decline (-73.7%) and quality loss (-60.3%) are more than double the rate of sleep duration loss (-30.2%). Disordered sleep is not just about fewer hours; it causes severe neurocognitive degradation.</a:t>
+              <a:t>Here are the four biomarker gradients discovered via distributed PySpark group-by aggregations. Notice that while sleep duration decreases by 30%, daytime cognitive performance plummets by 73.7% and sleep quality drops by 60.3%. This proves that sleep disorders cause systemic neurobehavioral damage far exceeding simple sleep loss.</a:t>
             </a:r>
           </a:p>
         </p:txBody>
@@ -1556,24 +1339,12 @@
           <a:lstStyle/>
           <a:p>
             <a:r>
-              <a:t>SPEAKER SCRIPT (TIME: 55 SECONDS)</a:t>
-            </a:r>
-          </a:p>
-          <a:p>
-            <a:r>
-              <a:t>On Slide 8, I want to emphasize our rigorous data engineering methodology: specifically, how we avoided target leakage.</a:t>
-            </a:r>
-          </a:p>
-          <a:p/>
-          <a:p>
-            <a:r>
-              <a:t>In medical AI, many papers achieve 99% accuracy because of target leakage. In this dataset, there are two retrospective variables: felt_rested and cognitive_performance_score. These are recorded the following morning. If a patient feels unrefreshed or has a collapsed cognitive score, they already have symptoms of the disorder! If you include them as inputs, your model is not predicting future risk—it is simply confirming an existing consequence. To ensure our model can be deployed as a genuine prospective screening tool, we explicitly stripped these columns along with person_id.</a:t>
-            </a:r>
-          </a:p>
-          <a:p/>
-          <a:p>
-            <a:r>
-              <a:t>On the right, you see our Spark MLlib pipeline stages: StringIndexer maps string categories, OneHotEncoder creates sparse vectors, and VectorAssembler compiles 28 clean attributes into a single feature vector.</a:t>
+              <a:t>SPEAKER SCRIPT (TIME: 50 SECONDS)</a:t>
+            </a:r>
+          </a:p>
+          <a:p>
+            <a:r>
+              <a:t>On Slide 8, we detail how we prevented target leakage. In healthcare AI, including retrospective morning outcomes like felt_rested and cognitive_score artificially inflates accuracy to 99%, but the model fails in real clinic triage. We eliminated these retrospective columns so the model only relies on baseline habits and overnight vitals.</a:t>
             </a:r>
           </a:p>
         </p:txBody>
@@ -1648,23 +1419,7 @@
           </a:p>
           <a:p>
             <a:r>
-              <a:t>Turning to model training: why did we select RandomForestClassifier in PySpark MLlib?</a:t>
-            </a:r>
-          </a:p>
-          <a:p/>
-          <a:p>
-            <a:r>
-              <a:t>First, clinical biomarkers interact non-linearly. A person with 6 hours of sleep might be completely healthy if their stress is low, but high stress combined with high evening blue light exposure triggers high disorder risk. Tree ensembles capture these interactions naturally.</a:t>
-            </a:r>
-          </a:p>
-          <a:p>
-            <a:r>
-              <a:t>Second, Random Forest is uniquely suited for cluster computing. Because individual decision trees are independent, Spark distributes tree-building jobs across all CPU worker threads concurrently.</a:t>
-            </a:r>
-          </a:p>
-          <a:p>
-            <a:r>
-              <a:t>We configured 50 trees with a maximum depth of 8, trained on 80,000 patient records, and generated predictions on 20,000 unseen hold-out patients.</a:t>
+              <a:t>Turning to model training: Random Forest is uniquely suited for cluster computing because individual decision trees are independent. Spark distributes tree-building tasks across all available CPU threads concurrently. We configured 50 trees with a maximum depth of 8, trained on 80,000 records, and evaluated on 20,000 unseen hold-out patients.</a:t>
             </a:r>
           </a:p>
         </p:txBody>
@@ -4722,7 +4477,7 @@
         <p:spPr>
           <a:xfrm>
             <a:off x="731520" y="594360"/>
-            <a:ext cx="7315200" cy="320040"/>
+            <a:ext cx="7772400" cy="320040"/>
           </a:xfrm>
           <a:prstGeom prst="rect">
             <a:avLst/>
@@ -4736,7 +4491,7 @@
           <a:lstStyle/>
           <a:p>
             <a:pPr>
-              <a:defRPr sz="900" b="1">
+              <a:defRPr sz="1000" b="1">
                 <a:solidFill>
                   <a:srgbClr val="64748B"/>
                 </a:solidFill>
@@ -4764,7 +4519,7 @@
         </p:blipFill>
         <p:spPr>
           <a:xfrm>
-            <a:off x="8961120" y="502920"/>
+            <a:off x="8961120" y="475488"/>
             <a:ext cx="2499055" cy="872636"/>
           </a:xfrm>
           <a:prstGeom prst="rect">
@@ -4780,7 +4535,7 @@
         </p:nvSpPr>
         <p:spPr>
           <a:xfrm>
-            <a:off x="731520" y="1143000"/>
+            <a:off x="731520" y="1170432"/>
             <a:ext cx="10728655" cy="13716"/>
           </a:xfrm>
           <a:prstGeom prst="rect">
@@ -4823,7 +4578,7 @@
         </p:nvSpPr>
         <p:spPr>
           <a:xfrm>
-            <a:off x="731520" y="1325880"/>
+            <a:off x="731520" y="1353312"/>
             <a:ext cx="10698480" cy="1371600"/>
           </a:xfrm>
           <a:prstGeom prst="rect">
@@ -4841,7 +4596,7 @@
               <a:spcAft>
                 <a:spcPts val="800"/>
               </a:spcAft>
-              <a:defRPr sz="2800" b="1">
+              <a:defRPr sz="3000" b="1">
                 <a:solidFill>
                   <a:srgbClr val="0F172A"/>
                 </a:solidFill>
@@ -4857,7 +4612,7 @@
           </a:p>
           <a:p>
             <a:pPr>
-              <a:defRPr sz="1300" b="0">
+              <a:defRPr sz="1500">
                 <a:solidFill>
                   <a:srgbClr val="64748B"/>
                 </a:solidFill>
@@ -4877,8 +4632,8 @@
         </p:nvSpPr>
         <p:spPr>
           <a:xfrm>
-            <a:off x="731520" y="2971800"/>
-            <a:ext cx="6217920" cy="3154680"/>
+            <a:off x="731520" y="3017520"/>
+            <a:ext cx="6217920" cy="3108960"/>
           </a:xfrm>
           <a:prstGeom prst="roundRect">
             <a:avLst/>
@@ -4922,8 +4677,8 @@
         </p:nvSpPr>
         <p:spPr>
           <a:xfrm>
-            <a:off x="960120" y="3108960"/>
-            <a:ext cx="5760720" cy="2880360"/>
+            <a:off x="1005840" y="3154680"/>
+            <a:ext cx="5669280" cy="2834640"/>
           </a:xfrm>
           <a:prstGeom prst="rect">
             <a:avLst/>
@@ -4940,7 +4695,7 @@
               <a:spcAft>
                 <a:spcPts val="1200"/>
               </a:spcAft>
-              <a:defRPr sz="1100" b="1">
+              <a:defRPr sz="1300" b="1">
                 <a:solidFill>
                   <a:srgbClr val="0F172A"/>
                 </a:solidFill>
@@ -4953,11 +4708,11 @@
           <a:p>
             <a:pPr>
               <a:spcAft>
-                <a:spcPts val="500"/>
+                <a:spcPts val="600"/>
               </a:spcAft>
             </a:pPr>
             <a:r>
-              <a:rPr sz="950" b="1">
+              <a:rPr sz="1150" b="1">
                 <a:solidFill>
                   <a:srgbClr val="64748B"/>
                 </a:solidFill>
@@ -4965,7 +4720,7 @@
               <a:t>Candidate Name        : </a:t>
             </a:r>
             <a:r>
-              <a:rPr sz="1000" b="1">
+              <a:rPr sz="1200" b="1">
                 <a:solidFill>
                   <a:srgbClr val="0F172A"/>
                 </a:solidFill>
@@ -4976,11 +4731,11 @@
           <a:p>
             <a:pPr>
               <a:spcAft>
-                <a:spcPts val="500"/>
+                <a:spcPts val="600"/>
               </a:spcAft>
             </a:pPr>
             <a:r>
-              <a:rPr sz="950" b="1">
+              <a:rPr sz="1150" b="1">
                 <a:solidFill>
                   <a:srgbClr val="64748B"/>
                 </a:solidFill>
@@ -4988,7 +4743,7 @@
               <a:t>Registration Number   : </a:t>
             </a:r>
             <a:r>
-              <a:rPr sz="1000" b="1">
+              <a:rPr sz="1200" b="1">
                 <a:solidFill>
                   <a:srgbClr val="0F172A"/>
                 </a:solidFill>
@@ -4999,11 +4754,11 @@
           <a:p>
             <a:pPr>
               <a:spcAft>
-                <a:spcPts val="500"/>
+                <a:spcPts val="600"/>
               </a:spcAft>
             </a:pPr>
             <a:r>
-              <a:rPr sz="950" b="1">
+              <a:rPr sz="1150" b="1">
                 <a:solidFill>
                   <a:srgbClr val="64748B"/>
                 </a:solidFill>
@@ -5011,7 +4766,7 @@
               <a:t>Roll Number           : </a:t>
             </a:r>
             <a:r>
-              <a:rPr sz="1000" b="1">
+              <a:rPr sz="1200" b="1">
                 <a:solidFill>
                   <a:srgbClr val="0F172A"/>
                 </a:solidFill>
@@ -5022,11 +4777,11 @@
           <a:p>
             <a:pPr>
               <a:spcAft>
-                <a:spcPts val="500"/>
+                <a:spcPts val="600"/>
               </a:spcAft>
             </a:pPr>
             <a:r>
-              <a:rPr sz="950" b="1">
+              <a:rPr sz="1150" b="1">
                 <a:solidFill>
                   <a:srgbClr val="64748B"/>
                 </a:solidFill>
@@ -5034,7 +4789,7 @@
               <a:t>Course &amp; Code         : </a:t>
             </a:r>
             <a:r>
-              <a:rPr sz="1000" b="1">
+              <a:rPr sz="1200" b="1">
                 <a:solidFill>
                   <a:srgbClr val="0F172A"/>
                 </a:solidFill>
@@ -5045,11 +4800,11 @@
           <a:p>
             <a:pPr>
               <a:spcAft>
-                <a:spcPts val="500"/>
+                <a:spcPts val="600"/>
               </a:spcAft>
             </a:pPr>
             <a:r>
-              <a:rPr sz="950" b="1">
+              <a:rPr sz="1150" b="1">
                 <a:solidFill>
                   <a:srgbClr val="64748B"/>
                 </a:solidFill>
@@ -5057,7 +4812,7 @@
               <a:t>Faculty Supervisor    : </a:t>
             </a:r>
             <a:r>
-              <a:rPr sz="1000" b="1">
+              <a:rPr sz="1200" b="1">
                 <a:solidFill>
                   <a:srgbClr val="0F172A"/>
                 </a:solidFill>
@@ -5066,49 +4821,21 @@
             </a:r>
           </a:p>
           <a:p>
-            <a:pPr>
-              <a:spcAft>
-                <a:spcPts val="500"/>
-              </a:spcAft>
-            </a:pPr>
-            <a:r>
-              <a:rPr sz="950" b="1">
+            <a:r>
+              <a:rPr sz="1150" b="1">
                 <a:solidFill>
                   <a:srgbClr val="64748B"/>
                 </a:solidFill>
               </a:rPr>
-              <a:t>Department            : </a:t>
-            </a:r>
-            <a:r>
-              <a:rPr sz="1000" b="1">
+              <a:t>Department / School   : </a:t>
+            </a:r>
+            <a:r>
+              <a:rPr sz="1200" b="1">
                 <a:solidFill>
                   <a:srgbClr val="0F172A"/>
                 </a:solidFill>
               </a:rPr>
               <a:t>School of Computer Science, LPU</a:t>
-            </a:r>
-          </a:p>
-          <a:p>
-            <a:pPr>
-              <a:spcAft>
-                <a:spcPts val="500"/>
-              </a:spcAft>
-            </a:pPr>
-            <a:r>
-              <a:rPr sz="950" b="1">
-                <a:solidFill>
-                  <a:srgbClr val="64748B"/>
-                </a:solidFill>
-              </a:rPr>
-              <a:t>Academic Assessment   : </a:t>
-            </a:r>
-            <a:r>
-              <a:rPr sz="1000" b="1">
-                <a:solidFill>
-                  <a:srgbClr val="0F172A"/>
-                </a:solidFill>
-              </a:rPr>
-              <a:t>CA1 Project Evaluation</a:t>
             </a:r>
           </a:p>
         </p:txBody>
@@ -5121,8 +4848,8 @@
         </p:nvSpPr>
         <p:spPr>
           <a:xfrm>
-            <a:off x="7132320" y="2971800"/>
-            <a:ext cx="4327855" cy="3154680"/>
+            <a:off x="7132320" y="3017520"/>
+            <a:ext cx="4327855" cy="3108960"/>
           </a:xfrm>
           <a:prstGeom prst="roundRect">
             <a:avLst/>
@@ -5166,8 +4893,8 @@
         </p:nvSpPr>
         <p:spPr>
           <a:xfrm>
-            <a:off x="7360920" y="3108960"/>
-            <a:ext cx="3886200" cy="2880360"/>
+            <a:off x="7406640" y="3154680"/>
+            <a:ext cx="3794760" cy="2834640"/>
           </a:xfrm>
           <a:prstGeom prst="rect">
             <a:avLst/>
@@ -5184,14 +4911,14 @@
               <a:spcAft>
                 <a:spcPts val="1400"/>
               </a:spcAft>
-              <a:defRPr sz="1100" b="1">
+              <a:defRPr sz="1300" b="1">
                 <a:solidFill>
                   <a:srgbClr val="0F172A"/>
                 </a:solidFill>
               </a:defRPr>
             </a:pPr>
             <a:r>
-              <a:t>DISTRIBUTED CLUSTER METRICS</a:t>
+              <a:t>KEY PROJECT HIGHLIGHTS</a:t>
             </a:r>
           </a:p>
           <a:p>
@@ -5201,7 +4928,7 @@
               </a:spcAft>
             </a:pPr>
             <a:r>
-              <a:rPr sz="1600" b="1">
+              <a:rPr sz="1800" b="1">
                 <a:solidFill>
                   <a:srgbClr val="0F172A"/>
                 </a:solidFill>
@@ -5209,12 +4936,12 @@
               <a:t>100,000  </a:t>
             </a:r>
             <a:r>
-              <a:rPr sz="950">
+              <a:rPr sz="1100">
                 <a:solidFill>
                   <a:srgbClr val="64748B"/>
                 </a:solidFill>
               </a:rPr>
-              <a:t>Patient Cohort Records (14.87 MB)</a:t>
+              <a:t>Patient Cohort Records Analyzed</a:t>
             </a:r>
           </a:p>
           <a:p>
@@ -5224,7 +4951,7 @@
               </a:spcAft>
             </a:pPr>
             <a:r>
-              <a:rPr sz="1600" b="1">
+              <a:rPr sz="1800" b="1">
                 <a:solidFill>
                   <a:srgbClr val="0F172A"/>
                 </a:solidFill>
@@ -5232,7 +4959,7 @@
               <a:t>82.43%  </a:t>
             </a:r>
             <a:r>
-              <a:rPr sz="950">
+              <a:rPr sz="1100">
                 <a:solidFill>
                   <a:srgbClr val="64748B"/>
                 </a:solidFill>
@@ -5247,7 +4974,7 @@
               </a:spcAft>
             </a:pPr>
             <a:r>
-              <a:rPr sz="1600" b="1">
+              <a:rPr sz="1800" b="1">
                 <a:solidFill>
                   <a:srgbClr val="0F172A"/>
                 </a:solidFill>
@@ -5255,7 +4982,7 @@
               <a:t>81.32%  </a:t>
             </a:r>
             <a:r>
-              <a:rPr sz="950">
+              <a:rPr sz="1100">
                 <a:solidFill>
                   <a:srgbClr val="64748B"/>
                 </a:solidFill>
@@ -5270,98 +4997,20 @@
               </a:spcAft>
             </a:pPr>
             <a:r>
-              <a:rPr sz="1600" b="1">
+              <a:rPr sz="1800" b="1">
                 <a:solidFill>
                   <a:srgbClr val="0F172A"/>
                 </a:solidFill>
               </a:rPr>
-              <a:t>local[*]  </a:t>
-            </a:r>
-            <a:r>
-              <a:rPr sz="950">
+              <a:t>PySpark 3.5  </a:t>
+            </a:r>
+            <a:r>
+              <a:rPr sz="1100">
                 <a:solidFill>
                   <a:srgbClr val="64748B"/>
                 </a:solidFill>
               </a:rPr>
-              <a:t>Distributed Multi-Thread Master Mode</a:t>
-            </a:r>
-          </a:p>
-        </p:txBody>
-      </p:sp>
-      <p:sp>
-        <p:nvSpPr>
-          <p:cNvPr id="11" name="Rectangle 10"/>
-          <p:cNvSpPr/>
-          <p:nvPr/>
-        </p:nvSpPr>
-        <p:spPr>
-          <a:xfrm>
-            <a:off x="731520" y="6355080"/>
-            <a:ext cx="10728655" cy="10972"/>
-          </a:xfrm>
-          <a:prstGeom prst="rect">
-            <a:avLst/>
-          </a:prstGeom>
-          <a:solidFill>
-            <a:srgbClr val="E2E8F0"/>
-          </a:solidFill>
-          <a:ln>
-            <a:noFill/>
-          </a:ln>
-        </p:spPr>
-        <p:style>
-          <a:lnRef idx="1">
-            <a:schemeClr val="accent1"/>
-          </a:lnRef>
-          <a:fillRef idx="3">
-            <a:schemeClr val="accent1"/>
-          </a:fillRef>
-          <a:effectRef idx="2">
-            <a:schemeClr val="accent1"/>
-          </a:effectRef>
-          <a:fontRef idx="minor">
-            <a:schemeClr val="lt1"/>
-          </a:fontRef>
-        </p:style>
-        <p:txBody>
-          <a:bodyPr rtlCol="0" anchor="ctr"/>
-          <a:lstStyle/>
-          <a:p>
-            <a:pPr algn="ctr"/>
-          </a:p>
-        </p:txBody>
-      </p:sp>
-      <p:sp>
-        <p:nvSpPr>
-          <p:cNvPr id="12" name="TextBox 11"/>
-          <p:cNvSpPr txBox="1"/>
-          <p:nvPr/>
-        </p:nvSpPr>
-        <p:spPr>
-          <a:xfrm>
-            <a:off x="731520" y="6419088"/>
-            <a:ext cx="10728655" cy="320040"/>
-          </a:xfrm>
-          <a:prstGeom prst="rect">
-            <a:avLst/>
-          </a:prstGeom>
-          <a:noFill/>
-        </p:spPr>
-        <p:txBody>
-          <a:bodyPr wrap="none">
-            <a:spAutoFit/>
-          </a:bodyPr>
-          <a:lstStyle/>
-          <a:p>
-            <a:pPr algn="ctr">
-              <a:defRPr sz="850">
-                <a:solidFill>
-                  <a:srgbClr val="64748B"/>
-                </a:solidFill>
-              </a:defRPr>
-            </a:pPr>
-            <a:r>
-              <a:t>GitHub Repository: Swarajbabu/SLEEP-HEALTH-ANALYSIS  •  Apache Spark 3.5  •  PySpark MLlib</a:t>
+              <a:t>Distributed MLlib Pipeline</a:t>
             </a:r>
           </a:p>
         </p:txBody>
@@ -5436,7 +5085,7 @@
         <p:spPr>
           <a:xfrm>
             <a:off x="731520" y="365760"/>
-            <a:ext cx="7772400" cy="256032"/>
+            <a:ext cx="7772400" cy="274320"/>
           </a:xfrm>
           <a:prstGeom prst="rect">
             <a:avLst/>
@@ -5450,7 +5099,7 @@
           <a:lstStyle/>
           <a:p>
             <a:pPr>
-              <a:defRPr sz="850" b="1">
+              <a:defRPr sz="1000" b="1">
                 <a:solidFill>
                   <a:srgbClr val="64748B"/>
                 </a:solidFill>
@@ -5470,7 +5119,7 @@
         </p:nvSpPr>
         <p:spPr>
           <a:xfrm>
-            <a:off x="731520" y="621792"/>
+            <a:off x="731520" y="658368"/>
             <a:ext cx="8412480" cy="594360"/>
           </a:xfrm>
           <a:prstGeom prst="rect">
@@ -5485,14 +5134,14 @@
           <a:lstStyle/>
           <a:p>
             <a:pPr>
-              <a:defRPr sz="2000" b="1">
+              <a:defRPr sz="2400" b="1">
                 <a:solidFill>
                   <a:srgbClr val="0F172A"/>
                 </a:solidFill>
               </a:defRPr>
             </a:pPr>
             <a:r>
-              <a:t>Multi-Metric Model Validation on 20,000 Unseen Patients</a:t>
+              <a:t>Model Performance on 20,000 Unseen Patients</a:t>
             </a:r>
           </a:p>
         </p:txBody>
@@ -5513,7 +5162,7 @@
         </p:blipFill>
         <p:spPr>
           <a:xfrm>
-            <a:off x="9784080" y="365760"/>
+            <a:off x="9784080" y="347472"/>
             <a:ext cx="1691640" cy="590698"/>
           </a:xfrm>
           <a:prstGeom prst="rect">
@@ -5529,7 +5178,7 @@
         </p:nvSpPr>
         <p:spPr>
           <a:xfrm>
-            <a:off x="731520" y="1261872"/>
+            <a:off x="731520" y="1298448"/>
             <a:ext cx="10728655" cy="10972"/>
           </a:xfrm>
           <a:prstGeom prst="rect">
@@ -5572,7 +5221,7 @@
         </p:nvSpPr>
         <p:spPr>
           <a:xfrm>
-            <a:off x="731520" y="6446520"/>
+            <a:off x="731520" y="6382512"/>
             <a:ext cx="10728655" cy="10972"/>
           </a:xfrm>
           <a:prstGeom prst="rect">
@@ -5615,8 +5264,8 @@
         </p:nvSpPr>
         <p:spPr>
           <a:xfrm>
-            <a:off x="731520" y="6473952"/>
-            <a:ext cx="8412480" cy="274320"/>
+            <a:off x="731520" y="6419088"/>
+            <a:ext cx="8412480" cy="320040"/>
           </a:xfrm>
           <a:prstGeom prst="rect">
             <a:avLst/>
@@ -5630,7 +5279,7 @@
           <a:lstStyle/>
           <a:p>
             <a:pPr>
-              <a:defRPr sz="850">
+              <a:defRPr sz="950">
                 <a:solidFill>
                   <a:srgbClr val="64748B"/>
                 </a:solidFill>
@@ -5650,8 +5299,8 @@
         </p:nvSpPr>
         <p:spPr>
           <a:xfrm>
-            <a:off x="9875520" y="6473952"/>
-            <a:ext cx="1584655" cy="274320"/>
+            <a:off x="9875520" y="6419088"/>
+            <a:ext cx="1584655" cy="320040"/>
           </a:xfrm>
           <a:prstGeom prst="rect">
             <a:avLst/>
@@ -5665,7 +5314,7 @@
           <a:lstStyle/>
           <a:p>
             <a:pPr algn="r">
-              <a:defRPr sz="850" b="1">
+              <a:defRPr sz="1000" b="1">
                 <a:solidFill>
                   <a:srgbClr val="0F172A"/>
                 </a:solidFill>
@@ -5685,8 +5334,8 @@
         </p:nvSpPr>
         <p:spPr>
           <a:xfrm>
-            <a:off x="731520" y="1417320"/>
-            <a:ext cx="2542032" cy="960120"/>
+            <a:off x="731520" y="1444752"/>
+            <a:ext cx="2542032" cy="1005840"/>
           </a:xfrm>
           <a:prstGeom prst="roundRect">
             <a:avLst/>
@@ -5694,7 +5343,7 @@
           <a:solidFill>
             <a:srgbClr val="FFFFFF"/>
           </a:solidFill>
-          <a:ln w="15240">
+          <a:ln w="19050">
             <a:solidFill>
               <a:srgbClr val="0F172A"/>
             </a:solidFill>
@@ -5730,8 +5379,8 @@
         </p:nvSpPr>
         <p:spPr>
           <a:xfrm>
-            <a:off x="841248" y="1463040"/>
-            <a:ext cx="2322576" cy="868680"/>
+            <a:off x="841248" y="1508760"/>
+            <a:ext cx="2322576" cy="914400"/>
           </a:xfrm>
           <a:prstGeom prst="rect">
             <a:avLst/>
@@ -5745,7 +5394,7 @@
           <a:lstStyle/>
           <a:p>
             <a:pPr>
-              <a:defRPr sz="1000" b="1">
+              <a:defRPr sz="1100" b="1">
                 <a:solidFill>
                   <a:srgbClr val="64748B"/>
                 </a:solidFill>
@@ -5757,7 +5406,7 @@
           </a:p>
           <a:p>
             <a:pPr>
-              <a:defRPr sz="2000" b="1">
+              <a:defRPr sz="2200" b="1">
                 <a:solidFill>
                   <a:srgbClr val="0F172A"/>
                 </a:solidFill>
@@ -5769,14 +5418,14 @@
           </a:p>
           <a:p>
             <a:pPr>
-              <a:defRPr sz="750">
+              <a:defRPr sz="850">
                 <a:solidFill>
                   <a:srgbClr val="1E293B"/>
                 </a:solidFill>
               </a:defRPr>
             </a:pPr>
             <a:r>
-              <a:t>Correct predictions across all 4 tiers</a:t>
+              <a:t>Overall correct classifications</a:t>
             </a:r>
           </a:p>
         </p:txBody>
@@ -5789,8 +5438,8 @@
         </p:nvSpPr>
         <p:spPr>
           <a:xfrm>
-            <a:off x="3456432" y="1417320"/>
-            <a:ext cx="2542032" cy="960120"/>
+            <a:off x="3456432" y="1444752"/>
+            <a:ext cx="2542032" cy="1005840"/>
           </a:xfrm>
           <a:prstGeom prst="roundRect">
             <a:avLst/>
@@ -5798,7 +5447,7 @@
           <a:solidFill>
             <a:srgbClr val="FFFFFF"/>
           </a:solidFill>
-          <a:ln w="15240">
+          <a:ln w="19050">
             <a:solidFill>
               <a:srgbClr val="0F172A"/>
             </a:solidFill>
@@ -5834,8 +5483,8 @@
         </p:nvSpPr>
         <p:spPr>
           <a:xfrm>
-            <a:off x="3566160" y="1463040"/>
-            <a:ext cx="2322576" cy="868680"/>
+            <a:off x="3566160" y="1508760"/>
+            <a:ext cx="2322576" cy="914400"/>
           </a:xfrm>
           <a:prstGeom prst="rect">
             <a:avLst/>
@@ -5849,7 +5498,7 @@
           <a:lstStyle/>
           <a:p>
             <a:pPr>
-              <a:defRPr sz="1000" b="1">
+              <a:defRPr sz="1100" b="1">
                 <a:solidFill>
                   <a:srgbClr val="64748B"/>
                 </a:solidFill>
@@ -5861,7 +5510,7 @@
           </a:p>
           <a:p>
             <a:pPr>
-              <a:defRPr sz="2000" b="1">
+              <a:defRPr sz="2200" b="1">
                 <a:solidFill>
                   <a:srgbClr val="0F172A"/>
                 </a:solidFill>
@@ -5873,7 +5522,7 @@
           </a:p>
           <a:p>
             <a:pPr>
-              <a:defRPr sz="750">
+              <a:defRPr sz="850">
                 <a:solidFill>
                   <a:srgbClr val="1E293B"/>
                 </a:solidFill>
@@ -5893,8 +5542,8 @@
         </p:nvSpPr>
         <p:spPr>
           <a:xfrm>
-            <a:off x="6181344" y="1417320"/>
-            <a:ext cx="2542032" cy="960120"/>
+            <a:off x="6181344" y="1444752"/>
+            <a:ext cx="2542032" cy="1005840"/>
           </a:xfrm>
           <a:prstGeom prst="roundRect">
             <a:avLst/>
@@ -5902,7 +5551,7 @@
           <a:solidFill>
             <a:srgbClr val="FFFFFF"/>
           </a:solidFill>
-          <a:ln w="15240">
+          <a:ln w="19050">
             <a:solidFill>
               <a:srgbClr val="0F172A"/>
             </a:solidFill>
@@ -5938,8 +5587,8 @@
         </p:nvSpPr>
         <p:spPr>
           <a:xfrm>
-            <a:off x="6291072" y="1463040"/>
-            <a:ext cx="2322576" cy="868680"/>
+            <a:off x="6291072" y="1508760"/>
+            <a:ext cx="2322576" cy="914400"/>
           </a:xfrm>
           <a:prstGeom prst="rect">
             <a:avLst/>
@@ -5953,7 +5602,7 @@
           <a:lstStyle/>
           <a:p>
             <a:pPr>
-              <a:defRPr sz="1000" b="1">
+              <a:defRPr sz="1100" b="1">
                 <a:solidFill>
                   <a:srgbClr val="64748B"/>
                 </a:solidFill>
@@ -5965,7 +5614,7 @@
           </a:p>
           <a:p>
             <a:pPr>
-              <a:defRPr sz="2000" b="1">
+              <a:defRPr sz="2200" b="1">
                 <a:solidFill>
                   <a:srgbClr val="0F172A"/>
                 </a:solidFill>
@@ -5977,7 +5626,7 @@
           </a:p>
           <a:p>
             <a:pPr>
-              <a:defRPr sz="750">
+              <a:defRPr sz="850">
                 <a:solidFill>
                   <a:srgbClr val="1E293B"/>
                 </a:solidFill>
@@ -5997,8 +5646,8 @@
         </p:nvSpPr>
         <p:spPr>
           <a:xfrm>
-            <a:off x="8906256" y="1417320"/>
-            <a:ext cx="2542032" cy="960120"/>
+            <a:off x="8906256" y="1444752"/>
+            <a:ext cx="2542032" cy="1005840"/>
           </a:xfrm>
           <a:prstGeom prst="roundRect">
             <a:avLst/>
@@ -6006,7 +5655,7 @@
           <a:solidFill>
             <a:srgbClr val="FFFFFF"/>
           </a:solidFill>
-          <a:ln w="15240">
+          <a:ln w="19050">
             <a:solidFill>
               <a:srgbClr val="0F172A"/>
             </a:solidFill>
@@ -6042,8 +5691,8 @@
         </p:nvSpPr>
         <p:spPr>
           <a:xfrm>
-            <a:off x="9015984" y="1463040"/>
-            <a:ext cx="2322576" cy="868680"/>
+            <a:off x="9015984" y="1508760"/>
+            <a:ext cx="2322576" cy="914400"/>
           </a:xfrm>
           <a:prstGeom prst="rect">
             <a:avLst/>
@@ -6057,7 +5706,7 @@
           <a:lstStyle/>
           <a:p>
             <a:pPr>
-              <a:defRPr sz="1000" b="1">
+              <a:defRPr sz="1100" b="1">
                 <a:solidFill>
                   <a:srgbClr val="64748B"/>
                 </a:solidFill>
@@ -6069,7 +5718,7 @@
           </a:p>
           <a:p>
             <a:pPr>
-              <a:defRPr sz="2000" b="1">
+              <a:defRPr sz="2200" b="1">
                 <a:solidFill>
                   <a:srgbClr val="0F172A"/>
                 </a:solidFill>
@@ -6081,7 +5730,7 @@
           </a:p>
           <a:p>
             <a:pPr>
-              <a:defRPr sz="750">
+              <a:defRPr sz="850">
                 <a:solidFill>
                   <a:srgbClr val="1E293B"/>
                 </a:solidFill>
@@ -6101,8 +5750,8 @@
         </p:nvSpPr>
         <p:spPr>
           <a:xfrm>
-            <a:off x="731520" y="2514600"/>
-            <a:ext cx="5212080" cy="3749039"/>
+            <a:off x="731520" y="2578608"/>
+            <a:ext cx="5212080" cy="3657600"/>
           </a:xfrm>
           <a:prstGeom prst="roundRect">
             <a:avLst/>
@@ -6146,8 +5795,206 @@
         </p:nvSpPr>
         <p:spPr>
           <a:xfrm>
-            <a:off x="914400" y="2606040"/>
-            <a:ext cx="4846320" cy="457200"/>
+            <a:off x="960120" y="2697480"/>
+            <a:ext cx="4754880" cy="3383280"/>
+          </a:xfrm>
+          <a:prstGeom prst="rect">
+            <a:avLst/>
+          </a:prstGeom>
+          <a:noFill/>
+        </p:spPr>
+        <p:txBody>
+          <a:bodyPr wrap="square">
+            <a:spAutoFit/>
+          </a:bodyPr>
+          <a:lstStyle/>
+          <a:p>
+            <a:pPr>
+              <a:spcAft>
+                <a:spcPts val="1000"/>
+              </a:spcAft>
+              <a:defRPr sz="1300" b="1">
+                <a:solidFill>
+                  <a:srgbClr val="0F172A"/>
+                </a:solidFill>
+              </a:defRPr>
+            </a:pPr>
+            <a:r>
+              <a:t>EVALUATION METRIC BREAKDOWN</a:t>
+            </a:r>
+          </a:p>
+          <a:p>
+            <a:pPr>
+              <a:spcAft>
+                <a:spcPts val="400"/>
+              </a:spcAft>
+            </a:pPr>
+            <a:r>
+              <a:rPr b="1" sz="1100">
+                <a:solidFill>
+                  <a:srgbClr val="0F172A"/>
+                </a:solidFill>
+              </a:rPr>
+              <a:t>•  Overall Accuracy (82.43%): </a:t>
+            </a:r>
+            <a:r>
+              <a:rPr sz="1000">
+                <a:solidFill>
+                  <a:srgbClr val="64748B"/>
+                </a:solidFill>
+              </a:rPr>
+              <a:t>Correctly assigns exact risk tier for &gt;82 out of 100 unseen patients across all 4 classes simultaneously.</a:t>
+            </a:r>
+          </a:p>
+          <a:p>
+            <a:pPr>
+              <a:spcAft>
+                <a:spcPts val="400"/>
+              </a:spcAft>
+            </a:pPr>
+            <a:r>
+              <a:rPr b="1" sz="1100">
+                <a:solidFill>
+                  <a:srgbClr val="0F172A"/>
+                </a:solidFill>
+              </a:rPr>
+              <a:t>•  Weighted F1-Score (81.32%): </a:t>
+            </a:r>
+            <a:r>
+              <a:rPr sz="1000">
+                <a:solidFill>
+                  <a:srgbClr val="64748B"/>
+                </a:solidFill>
+              </a:rPr>
+              <a:t>Balances precision and recall across classes, safeguarding detection of minority pathological cohorts.</a:t>
+            </a:r>
+          </a:p>
+          <a:p>
+            <a:pPr>
+              <a:spcAft>
+                <a:spcPts val="400"/>
+              </a:spcAft>
+            </a:pPr>
+            <a:r>
+              <a:rPr b="1" sz="1100">
+                <a:solidFill>
+                  <a:srgbClr val="0F172A"/>
+                </a:solidFill>
+              </a:rPr>
+              <a:t>•  Weighted Precision (80.35%): </a:t>
+            </a:r>
+            <a:r>
+              <a:rPr sz="1000">
+                <a:solidFill>
+                  <a:srgbClr val="64748B"/>
+                </a:solidFill>
+              </a:rPr>
+              <a:t>Minimizes false-positive clinical referrals; ~80% of flagged patients genuinely have sleep risk.</a:t>
+            </a:r>
+          </a:p>
+          <a:p>
+            <a:pPr>
+              <a:spcAft>
+                <a:spcPts val="400"/>
+              </a:spcAft>
+            </a:pPr>
+            <a:r>
+              <a:rPr b="1" sz="1100">
+                <a:solidFill>
+                  <a:srgbClr val="0F172A"/>
+                </a:solidFill>
+              </a:rPr>
+              <a:t>•  Weighted Recall (82.43%): </a:t>
+            </a:r>
+            <a:r>
+              <a:rPr sz="1000">
+                <a:solidFill>
+                  <a:srgbClr val="64748B"/>
+                </a:solidFill>
+              </a:rPr>
+              <a:t>Maximizes diagnostic sensitivity, critical for preventing undiagnosed severe apnea or chronic insomnia.</a:t>
+            </a:r>
+          </a:p>
+          <a:p>
+            <a:pPr>
+              <a:spcAft>
+                <a:spcPts val="400"/>
+              </a:spcAft>
+            </a:pPr>
+            <a:r>
+              <a:rPr b="1" sz="1100">
+                <a:solidFill>
+                  <a:srgbClr val="0F172A"/>
+                </a:solidFill>
+              </a:rPr>
+              <a:t>•  Baseline Outperformance: </a:t>
+            </a:r>
+            <a:r>
+              <a:rPr sz="1000">
+                <a:solidFill>
+                  <a:srgbClr val="64748B"/>
+                </a:solidFill>
+              </a:rPr>
+              <a:t>Surpasses naive majority-class baseline (54.16%) by over +28.27 percentage points.</a:t>
+            </a:r>
+          </a:p>
+        </p:txBody>
+      </p:sp>
+      <p:sp>
+        <p:nvSpPr>
+          <p:cNvPr id="20" name="Rounded Rectangle 19"/>
+          <p:cNvSpPr/>
+          <p:nvPr/>
+        </p:nvSpPr>
+        <p:spPr>
+          <a:xfrm>
+            <a:off x="6217920" y="2578608"/>
+            <a:ext cx="5242255" cy="3657600"/>
+          </a:xfrm>
+          <a:prstGeom prst="roundRect">
+            <a:avLst/>
+          </a:prstGeom>
+          <a:solidFill>
+            <a:srgbClr val="FFFFFF"/>
+          </a:solidFill>
+          <a:ln w="12700">
+            <a:solidFill>
+              <a:srgbClr val="CBD5E1"/>
+            </a:solidFill>
+          </a:ln>
+        </p:spPr>
+        <p:style>
+          <a:lnRef idx="1">
+            <a:schemeClr val="accent1"/>
+          </a:lnRef>
+          <a:fillRef idx="3">
+            <a:schemeClr val="accent1"/>
+          </a:fillRef>
+          <a:effectRef idx="2">
+            <a:schemeClr val="accent1"/>
+          </a:effectRef>
+          <a:fontRef idx="minor">
+            <a:schemeClr val="lt1"/>
+          </a:fontRef>
+        </p:style>
+        <p:txBody>
+          <a:bodyPr rtlCol="0" anchor="ctr"/>
+          <a:lstStyle/>
+          <a:p>
+            <a:pPr algn="ctr"/>
+          </a:p>
+        </p:txBody>
+      </p:sp>
+      <p:sp>
+        <p:nvSpPr>
+          <p:cNvPr id="21" name="TextBox 20"/>
+          <p:cNvSpPr txBox="1"/>
+          <p:nvPr/>
+        </p:nvSpPr>
+        <p:spPr>
+          <a:xfrm>
+            <a:off x="6446520" y="2697480"/>
+            <a:ext cx="4754880" cy="457200"/>
           </a:xfrm>
           <a:prstGeom prst="rect">
             <a:avLst/>
@@ -6161,21 +6008,21 @@
           <a:lstStyle/>
           <a:p>
             <a:pPr>
-              <a:defRPr sz="1000" b="1">
+              <a:defRPr sz="1300" b="1">
                 <a:solidFill>
                   <a:srgbClr val="0F172A"/>
                 </a:solidFill>
               </a:defRPr>
             </a:pPr>
             <a:r>
-              <a:t>EVALUATION CONSOLE METRICS (SPARK OUTPUT)</a:t>
+              <a:t>MODEL TEST METRICS (N=20,000 UNSEEN)</a:t>
             </a:r>
           </a:p>
         </p:txBody>
       </p:sp>
       <p:pic>
         <p:nvPicPr>
-          <p:cNvPr id="20" name="Picture 19" descr="Screenshot 2026-10-24 180234.png"/>
+          <p:cNvPr id="22" name="Picture 21" descr="chart_model_performance.png"/>
           <p:cNvPicPr>
             <a:picLocks noChangeAspect="1"/>
           </p:cNvPicPr>
@@ -6189,112 +6036,8 @@
         </p:blipFill>
         <p:spPr>
           <a:xfrm>
-            <a:off x="1097280" y="3154680"/>
-            <a:ext cx="4480560" cy="2568066"/>
-          </a:xfrm>
-          <a:prstGeom prst="rect">
-            <a:avLst/>
-          </a:prstGeom>
-        </p:spPr>
-      </p:pic>
-      <p:sp>
-        <p:nvSpPr>
-          <p:cNvPr id="21" name="Rounded Rectangle 20"/>
-          <p:cNvSpPr/>
-          <p:nvPr/>
-        </p:nvSpPr>
-        <p:spPr>
-          <a:xfrm>
-            <a:off x="6217920" y="2514600"/>
-            <a:ext cx="5242255" cy="3749039"/>
-          </a:xfrm>
-          <a:prstGeom prst="roundRect">
-            <a:avLst/>
-          </a:prstGeom>
-          <a:solidFill>
-            <a:srgbClr val="F8FAFC"/>
-          </a:solidFill>
-          <a:ln w="12700">
-            <a:solidFill>
-              <a:srgbClr val="CBD5E1"/>
-            </a:solidFill>
-          </a:ln>
-        </p:spPr>
-        <p:style>
-          <a:lnRef idx="1">
-            <a:schemeClr val="accent1"/>
-          </a:lnRef>
-          <a:fillRef idx="3">
-            <a:schemeClr val="accent1"/>
-          </a:fillRef>
-          <a:effectRef idx="2">
-            <a:schemeClr val="accent1"/>
-          </a:effectRef>
-          <a:fontRef idx="minor">
-            <a:schemeClr val="lt1"/>
-          </a:fontRef>
-        </p:style>
-        <p:txBody>
-          <a:bodyPr rtlCol="0" anchor="ctr"/>
-          <a:lstStyle/>
-          <a:p>
-            <a:pPr algn="ctr"/>
-          </a:p>
-        </p:txBody>
-      </p:sp>
-      <p:sp>
-        <p:nvSpPr>
-          <p:cNvPr id="22" name="TextBox 21"/>
-          <p:cNvSpPr txBox="1"/>
-          <p:nvPr/>
-        </p:nvSpPr>
-        <p:spPr>
-          <a:xfrm>
-            <a:off x="6400800" y="2606040"/>
-            <a:ext cx="4876495" cy="457200"/>
-          </a:xfrm>
-          <a:prstGeom prst="rect">
-            <a:avLst/>
-          </a:prstGeom>
-          <a:noFill/>
-        </p:spPr>
-        <p:txBody>
-          <a:bodyPr wrap="none">
-            <a:spAutoFit/>
-          </a:bodyPr>
-          <a:lstStyle/>
-          <a:p>
-            <a:pPr>
-              <a:defRPr sz="1000" b="1">
-                <a:solidFill>
-                  <a:srgbClr val="0F172A"/>
-                </a:solidFill>
-              </a:defRPr>
-            </a:pPr>
-            <a:r>
-              <a:t>RANDOM FOREST PERFORMANCE COMPARISON</a:t>
-            </a:r>
-          </a:p>
-        </p:txBody>
-      </p:sp>
-      <p:pic>
-        <p:nvPicPr>
-          <p:cNvPr id="23" name="Picture 22" descr="Screenshot 2026-10-24 180251.png"/>
-          <p:cNvPicPr>
-            <a:picLocks noChangeAspect="1"/>
-          </p:cNvPicPr>
-          <p:nvPr/>
-        </p:nvPicPr>
-        <p:blipFill>
-          <a:blip r:embed="rId4"/>
-          <a:stretch>
-            <a:fillRect/>
-          </a:stretch>
-        </p:blipFill>
-        <p:spPr>
-          <a:xfrm>
-            <a:off x="6583680" y="3154680"/>
-            <a:ext cx="4480560" cy="2947376"/>
+            <a:off x="6537960" y="3154680"/>
+            <a:ext cx="4572000" cy="2954215"/>
           </a:xfrm>
           <a:prstGeom prst="rect">
             <a:avLst/>
@@ -6371,7 +6114,7 @@
         <p:spPr>
           <a:xfrm>
             <a:off x="731520" y="365760"/>
-            <a:ext cx="7772400" cy="256032"/>
+            <a:ext cx="7772400" cy="274320"/>
           </a:xfrm>
           <a:prstGeom prst="rect">
             <a:avLst/>
@@ -6385,7 +6128,7 @@
           <a:lstStyle/>
           <a:p>
             <a:pPr>
-              <a:defRPr sz="850" b="1">
+              <a:defRPr sz="1000" b="1">
                 <a:solidFill>
                   <a:srgbClr val="64748B"/>
                 </a:solidFill>
@@ -6405,7 +6148,7 @@
         </p:nvSpPr>
         <p:spPr>
           <a:xfrm>
-            <a:off x="731520" y="621792"/>
+            <a:off x="731520" y="658368"/>
             <a:ext cx="8412480" cy="594360"/>
           </a:xfrm>
           <a:prstGeom prst="rect">
@@ -6420,14 +6163,14 @@
           <a:lstStyle/>
           <a:p>
             <a:pPr>
-              <a:defRPr sz="2000" b="1">
+              <a:defRPr sz="2400" b="1">
                 <a:solidFill>
                   <a:srgbClr val="0F172A"/>
                 </a:solidFill>
               </a:defRPr>
             </a:pPr>
             <a:r>
-              <a:t>Spark Computational Advantages: Catalyst, Caching &amp; Parallelism</a:t>
+              <a:t>Spark Architectural Advantages: Catalyst, Caching &amp; Parallelism</a:t>
             </a:r>
           </a:p>
         </p:txBody>
@@ -6448,7 +6191,7 @@
         </p:blipFill>
         <p:spPr>
           <a:xfrm>
-            <a:off x="9784080" y="365760"/>
+            <a:off x="9784080" y="347472"/>
             <a:ext cx="1691640" cy="590698"/>
           </a:xfrm>
           <a:prstGeom prst="rect">
@@ -6464,7 +6207,7 @@
         </p:nvSpPr>
         <p:spPr>
           <a:xfrm>
-            <a:off x="731520" y="1261872"/>
+            <a:off x="731520" y="1298448"/>
             <a:ext cx="10728655" cy="10972"/>
           </a:xfrm>
           <a:prstGeom prst="rect">
@@ -6507,7 +6250,7 @@
         </p:nvSpPr>
         <p:spPr>
           <a:xfrm>
-            <a:off x="731520" y="6446520"/>
+            <a:off x="731520" y="6382512"/>
             <a:ext cx="10728655" cy="10972"/>
           </a:xfrm>
           <a:prstGeom prst="rect">
@@ -6550,8 +6293,8 @@
         </p:nvSpPr>
         <p:spPr>
           <a:xfrm>
-            <a:off x="731520" y="6473952"/>
-            <a:ext cx="8412480" cy="274320"/>
+            <a:off x="731520" y="6419088"/>
+            <a:ext cx="8412480" cy="320040"/>
           </a:xfrm>
           <a:prstGeom prst="rect">
             <a:avLst/>
@@ -6565,7 +6308,7 @@
           <a:lstStyle/>
           <a:p>
             <a:pPr>
-              <a:defRPr sz="850">
+              <a:defRPr sz="950">
                 <a:solidFill>
                   <a:srgbClr val="64748B"/>
                 </a:solidFill>
@@ -6585,8 +6328,8 @@
         </p:nvSpPr>
         <p:spPr>
           <a:xfrm>
-            <a:off x="9875520" y="6473952"/>
-            <a:ext cx="1584655" cy="274320"/>
+            <a:off x="9875520" y="6419088"/>
+            <a:ext cx="1584655" cy="320040"/>
           </a:xfrm>
           <a:prstGeom prst="rect">
             <a:avLst/>
@@ -6600,7 +6343,7 @@
           <a:lstStyle/>
           <a:p>
             <a:pPr algn="r">
-              <a:defRPr sz="850" b="1">
+              <a:defRPr sz="1000" b="1">
                 <a:solidFill>
                   <a:srgbClr val="0F172A"/>
                 </a:solidFill>
@@ -6620,8 +6363,8 @@
         </p:nvSpPr>
         <p:spPr>
           <a:xfrm>
-            <a:off x="731520" y="1417320"/>
-            <a:ext cx="10728655" cy="1078992"/>
+            <a:off x="731520" y="1463040"/>
+            <a:ext cx="10728655" cy="1051560"/>
           </a:xfrm>
           <a:prstGeom prst="roundRect">
             <a:avLst/>
@@ -6665,8 +6408,8 @@
         </p:nvSpPr>
         <p:spPr>
           <a:xfrm>
-            <a:off x="960120" y="1581912"/>
-            <a:ext cx="777240" cy="749808"/>
+            <a:off x="960120" y="1609344"/>
+            <a:ext cx="777240" cy="731520"/>
           </a:xfrm>
           <a:prstGeom prst="roundRect">
             <a:avLst/>
@@ -6697,7 +6440,7 @@
           <a:lstStyle/>
           <a:p>
             <a:pPr algn="ctr">
-              <a:defRPr sz="1500" b="1">
+              <a:defRPr sz="1600" b="1">
                 <a:solidFill>
                   <a:srgbClr val="FFFFFF"/>
                 </a:solidFill>
@@ -6717,7 +6460,7 @@
         </p:nvSpPr>
         <p:spPr>
           <a:xfrm>
-            <a:off x="1920240" y="1527048"/>
+            <a:off x="1920240" y="1554480"/>
             <a:ext cx="9326880" cy="868680"/>
           </a:xfrm>
           <a:prstGeom prst="rect">
@@ -6733,9 +6476,9 @@
           <a:p>
             <a:pPr>
               <a:spcAft>
-                <a:spcPts val="400"/>
+                <a:spcPts val="300"/>
               </a:spcAft>
-              <a:defRPr sz="1150" b="1">
+              <a:defRPr sz="1300" b="1">
                 <a:solidFill>
                   <a:srgbClr val="0F172A"/>
                 </a:solidFill>
@@ -6747,7 +6490,7 @@
           </a:p>
           <a:p>
             <a:pPr>
-              <a:defRPr sz="900">
+              <a:defRPr sz="1100">
                 <a:solidFill>
                   <a:srgbClr val="64748B"/>
                 </a:solidFill>
@@ -6767,8 +6510,8 @@
         </p:nvSpPr>
         <p:spPr>
           <a:xfrm>
-            <a:off x="731520" y="2624328"/>
-            <a:ext cx="10728655" cy="1078992"/>
+            <a:off x="731520" y="2633472"/>
+            <a:ext cx="10728655" cy="1051560"/>
           </a:xfrm>
           <a:prstGeom prst="roundRect">
             <a:avLst/>
@@ -6812,8 +6555,8 @@
         </p:nvSpPr>
         <p:spPr>
           <a:xfrm>
-            <a:off x="960120" y="2788920"/>
-            <a:ext cx="777240" cy="749808"/>
+            <a:off x="960120" y="2779776"/>
+            <a:ext cx="777240" cy="731520"/>
           </a:xfrm>
           <a:prstGeom prst="roundRect">
             <a:avLst/>
@@ -6844,7 +6587,7 @@
           <a:lstStyle/>
           <a:p>
             <a:pPr algn="ctr">
-              <a:defRPr sz="1500" b="1">
+              <a:defRPr sz="1600" b="1">
                 <a:solidFill>
                   <a:srgbClr val="FFFFFF"/>
                 </a:solidFill>
@@ -6864,7 +6607,7 @@
         </p:nvSpPr>
         <p:spPr>
           <a:xfrm>
-            <a:off x="1920240" y="2734056"/>
+            <a:off x="1920240" y="2724912"/>
             <a:ext cx="9326880" cy="868680"/>
           </a:xfrm>
           <a:prstGeom prst="rect">
@@ -6880,9 +6623,9 @@
           <a:p>
             <a:pPr>
               <a:spcAft>
-                <a:spcPts val="400"/>
+                <a:spcPts val="300"/>
               </a:spcAft>
-              <a:defRPr sz="1150" b="1">
+              <a:defRPr sz="1300" b="1">
                 <a:solidFill>
                   <a:srgbClr val="0F172A"/>
                 </a:solidFill>
@@ -6894,7 +6637,7 @@
           </a:p>
           <a:p>
             <a:pPr>
-              <a:defRPr sz="900">
+              <a:defRPr sz="1100">
                 <a:solidFill>
                   <a:srgbClr val="64748B"/>
                 </a:solidFill>
@@ -6914,8 +6657,8 @@
         </p:nvSpPr>
         <p:spPr>
           <a:xfrm>
-            <a:off x="731520" y="3831336"/>
-            <a:ext cx="10728655" cy="1078992"/>
+            <a:off x="731520" y="3803904"/>
+            <a:ext cx="10728655" cy="1051560"/>
           </a:xfrm>
           <a:prstGeom prst="roundRect">
             <a:avLst/>
@@ -6959,8 +6702,8 @@
         </p:nvSpPr>
         <p:spPr>
           <a:xfrm>
-            <a:off x="960120" y="3995928"/>
-            <a:ext cx="777240" cy="749808"/>
+            <a:off x="960120" y="3950208"/>
+            <a:ext cx="777240" cy="731520"/>
           </a:xfrm>
           <a:prstGeom prst="roundRect">
             <a:avLst/>
@@ -6991,7 +6734,7 @@
           <a:lstStyle/>
           <a:p>
             <a:pPr algn="ctr">
-              <a:defRPr sz="1500" b="1">
+              <a:defRPr sz="1600" b="1">
                 <a:solidFill>
                   <a:srgbClr val="FFFFFF"/>
                 </a:solidFill>
@@ -7011,7 +6754,7 @@
         </p:nvSpPr>
         <p:spPr>
           <a:xfrm>
-            <a:off x="1920240" y="3941064"/>
+            <a:off x="1920240" y="3895344"/>
             <a:ext cx="9326880" cy="868680"/>
           </a:xfrm>
           <a:prstGeom prst="rect">
@@ -7027,9 +6770,9 @@
           <a:p>
             <a:pPr>
               <a:spcAft>
-                <a:spcPts val="400"/>
+                <a:spcPts val="300"/>
               </a:spcAft>
-              <a:defRPr sz="1150" b="1">
+              <a:defRPr sz="1300" b="1">
                 <a:solidFill>
                   <a:srgbClr val="0F172A"/>
                 </a:solidFill>
@@ -7041,7 +6784,7 @@
           </a:p>
           <a:p>
             <a:pPr>
-              <a:defRPr sz="900">
+              <a:defRPr sz="1100">
                 <a:solidFill>
                   <a:srgbClr val="64748B"/>
                 </a:solidFill>
@@ -7061,8 +6804,8 @@
         </p:nvSpPr>
         <p:spPr>
           <a:xfrm>
-            <a:off x="731520" y="5038344"/>
-            <a:ext cx="10728655" cy="1078992"/>
+            <a:off x="731520" y="4974336"/>
+            <a:ext cx="10728655" cy="1051560"/>
           </a:xfrm>
           <a:prstGeom prst="roundRect">
             <a:avLst/>
@@ -7106,8 +6849,8 @@
         </p:nvSpPr>
         <p:spPr>
           <a:xfrm>
-            <a:off x="960120" y="5202936"/>
-            <a:ext cx="777240" cy="749808"/>
+            <a:off x="960120" y="5120640"/>
+            <a:ext cx="777240" cy="731520"/>
           </a:xfrm>
           <a:prstGeom prst="roundRect">
             <a:avLst/>
@@ -7138,7 +6881,7 @@
           <a:lstStyle/>
           <a:p>
             <a:pPr algn="ctr">
-              <a:defRPr sz="1500" b="1">
+              <a:defRPr sz="1600" b="1">
                 <a:solidFill>
                   <a:srgbClr val="FFFFFF"/>
                 </a:solidFill>
@@ -7158,7 +6901,7 @@
         </p:nvSpPr>
         <p:spPr>
           <a:xfrm>
-            <a:off x="1920240" y="5148072"/>
+            <a:off x="1920240" y="5065776"/>
             <a:ext cx="9326880" cy="868680"/>
           </a:xfrm>
           <a:prstGeom prst="rect">
@@ -7174,9 +6917,9 @@
           <a:p>
             <a:pPr>
               <a:spcAft>
-                <a:spcPts val="400"/>
+                <a:spcPts val="300"/>
               </a:spcAft>
-              <a:defRPr sz="1150" b="1">
+              <a:defRPr sz="1300" b="1">
                 <a:solidFill>
                   <a:srgbClr val="0F172A"/>
                 </a:solidFill>
@@ -7188,7 +6931,7 @@
           </a:p>
           <a:p>
             <a:pPr>
-              <a:defRPr sz="900">
+              <a:defRPr sz="1100">
                 <a:solidFill>
                   <a:srgbClr val="64748B"/>
                 </a:solidFill>
@@ -7270,7 +7013,7 @@
         <p:spPr>
           <a:xfrm>
             <a:off x="731520" y="365760"/>
-            <a:ext cx="7772400" cy="256032"/>
+            <a:ext cx="7772400" cy="274320"/>
           </a:xfrm>
           <a:prstGeom prst="rect">
             <a:avLst/>
@@ -7284,7 +7027,7 @@
           <a:lstStyle/>
           <a:p>
             <a:pPr>
-              <a:defRPr sz="850" b="1">
+              <a:defRPr sz="1000" b="1">
                 <a:solidFill>
                   <a:srgbClr val="64748B"/>
                 </a:solidFill>
@@ -7304,7 +7047,7 @@
         </p:nvSpPr>
         <p:spPr>
           <a:xfrm>
-            <a:off x="731520" y="621792"/>
+            <a:off x="731520" y="658368"/>
             <a:ext cx="8412480" cy="594360"/>
           </a:xfrm>
           <a:prstGeom prst="rect">
@@ -7319,7 +7062,7 @@
           <a:lstStyle/>
           <a:p>
             <a:pPr>
-              <a:defRPr sz="2000" b="1">
+              <a:defRPr sz="2400" b="1">
                 <a:solidFill>
                   <a:srgbClr val="0F172A"/>
                 </a:solidFill>
@@ -7347,7 +7090,7 @@
         </p:blipFill>
         <p:spPr>
           <a:xfrm>
-            <a:off x="9784080" y="365760"/>
+            <a:off x="9784080" y="347472"/>
             <a:ext cx="1691640" cy="590698"/>
           </a:xfrm>
           <a:prstGeom prst="rect">
@@ -7363,7 +7106,7 @@
         </p:nvSpPr>
         <p:spPr>
           <a:xfrm>
-            <a:off x="731520" y="1261872"/>
+            <a:off x="731520" y="1298448"/>
             <a:ext cx="10728655" cy="10972"/>
           </a:xfrm>
           <a:prstGeom prst="rect">
@@ -7406,7 +7149,7 @@
         </p:nvSpPr>
         <p:spPr>
           <a:xfrm>
-            <a:off x="731520" y="6446520"/>
+            <a:off x="731520" y="6382512"/>
             <a:ext cx="10728655" cy="10972"/>
           </a:xfrm>
           <a:prstGeom prst="rect">
@@ -7449,8 +7192,8 @@
         </p:nvSpPr>
         <p:spPr>
           <a:xfrm>
-            <a:off x="731520" y="6473952"/>
-            <a:ext cx="8412480" cy="274320"/>
+            <a:off x="731520" y="6419088"/>
+            <a:ext cx="8412480" cy="320040"/>
           </a:xfrm>
           <a:prstGeom prst="rect">
             <a:avLst/>
@@ -7464,7 +7207,7 @@
           <a:lstStyle/>
           <a:p>
             <a:pPr>
-              <a:defRPr sz="850">
+              <a:defRPr sz="950">
                 <a:solidFill>
                   <a:srgbClr val="64748B"/>
                 </a:solidFill>
@@ -7484,8 +7227,8 @@
         </p:nvSpPr>
         <p:spPr>
           <a:xfrm>
-            <a:off x="9875520" y="6473952"/>
-            <a:ext cx="1584655" cy="274320"/>
+            <a:off x="9875520" y="6419088"/>
+            <a:ext cx="1584655" cy="320040"/>
           </a:xfrm>
           <a:prstGeom prst="rect">
             <a:avLst/>
@@ -7499,7 +7242,7 @@
           <a:lstStyle/>
           <a:p>
             <a:pPr algn="r">
-              <a:defRPr sz="850" b="1">
+              <a:defRPr sz="1000" b="1">
                 <a:solidFill>
                   <a:srgbClr val="0F172A"/>
                 </a:solidFill>
@@ -7519,8 +7262,8 @@
         </p:nvSpPr>
         <p:spPr>
           <a:xfrm>
-            <a:off x="731520" y="1417320"/>
-            <a:ext cx="5212080" cy="4846320"/>
+            <a:off x="731520" y="1463040"/>
+            <a:ext cx="5212080" cy="4754880"/>
           </a:xfrm>
           <a:prstGeom prst="roundRect">
             <a:avLst/>
@@ -7564,8 +7307,8 @@
         </p:nvSpPr>
         <p:spPr>
           <a:xfrm>
-            <a:off x="914400" y="1554480"/>
-            <a:ext cx="4846320" cy="4572000"/>
+            <a:off x="960120" y="1600200"/>
+            <a:ext cx="4754880" cy="4480560"/>
           </a:xfrm>
           <a:prstGeom prst="rect">
             <a:avLst/>
@@ -7580,9 +7323,9 @@
           <a:p>
             <a:pPr>
               <a:spcAft>
-                <a:spcPts val="1000"/>
+                <a:spcPts val="1200"/>
               </a:spcAft>
-              <a:defRPr sz="1100" b="1">
+              <a:defRPr sz="1400" b="1">
                 <a:solidFill>
                   <a:srgbClr val="0F172A"/>
                 </a:solidFill>
@@ -7599,15 +7342,15 @@
               </a:spcAft>
             </a:pPr>
             <a:r>
-              <a:rPr b="1" sz="950">
+              <a:rPr b="1" sz="1150">
                 <a:solidFill>
                   <a:srgbClr val="0F172A"/>
                 </a:solidFill>
               </a:rPr>
-              <a:t>•  Synthetic Calibration: </a:t>
-            </a:r>
-            <a:r>
-              <a:rPr sz="850">
+              <a:t>•  Synthetic Data Calibration: </a:t>
+            </a:r>
+            <a:r>
+              <a:rPr sz="1100">
                 <a:solidFill>
                   <a:srgbClr val="64748B"/>
                 </a:solidFill>
@@ -7622,7 +7365,7 @@
               </a:spcAft>
             </a:pPr>
             <a:r>
-              <a:rPr b="1" sz="950">
+              <a:rPr b="1" sz="1150">
                 <a:solidFill>
                   <a:srgbClr val="0F172A"/>
                 </a:solidFill>
@@ -7630,7 +7373,7 @@
               <a:t>•  Single-Node Simulation: </a:t>
             </a:r>
             <a:r>
-              <a:rPr sz="850">
+              <a:rPr sz="1100">
                 <a:solidFill>
                   <a:srgbClr val="64748B"/>
                 </a:solidFill>
@@ -7645,7 +7388,7 @@
               </a:spcAft>
             </a:pPr>
             <a:r>
-              <a:rPr b="1" sz="950">
+              <a:rPr b="1" sz="1150">
                 <a:solidFill>
                   <a:srgbClr val="0F172A"/>
                 </a:solidFill>
@@ -7653,7 +7396,7 @@
               <a:t>•  Fixed Hyperparameters: </a:t>
             </a:r>
             <a:r>
-              <a:rPr sz="850">
+              <a:rPr sz="1100">
                 <a:solidFill>
                   <a:srgbClr val="64748B"/>
                 </a:solidFill>
@@ -7668,7 +7411,7 @@
               </a:spcAft>
             </a:pPr>
             <a:r>
-              <a:rPr b="1" sz="950">
+              <a:rPr b="1" sz="1150">
                 <a:solidFill>
                   <a:srgbClr val="0F172A"/>
                 </a:solidFill>
@@ -7676,7 +7419,7 @@
               <a:t>•  Severe Cohort Imbalance: </a:t>
             </a:r>
             <a:r>
-              <a:rPr sz="850">
+              <a:rPr sz="1100">
                 <a:solidFill>
                   <a:srgbClr val="64748B"/>
                 </a:solidFill>
@@ -7694,18 +7437,18 @@
         </p:nvSpPr>
         <p:spPr>
           <a:xfrm>
-            <a:off x="6217920" y="1417320"/>
-            <a:ext cx="5242255" cy="4846320"/>
+            <a:off x="6217920" y="1463040"/>
+            <a:ext cx="5242255" cy="4754880"/>
           </a:xfrm>
           <a:prstGeom prst="roundRect">
             <a:avLst/>
           </a:prstGeom>
           <a:solidFill>
-            <a:srgbClr val="F8FAFC"/>
+            <a:srgbClr val="FFFFFF"/>
           </a:solidFill>
-          <a:ln w="12700">
+          <a:ln w="19050">
             <a:solidFill>
-              <a:srgbClr val="CBD5E1"/>
+              <a:srgbClr val="0F172A"/>
             </a:solidFill>
           </a:ln>
         </p:spPr>
@@ -7739,8 +7482,8 @@
         </p:nvSpPr>
         <p:spPr>
           <a:xfrm>
-            <a:off x="6400800" y="1554480"/>
-            <a:ext cx="4876495" cy="4572000"/>
+            <a:off x="6446520" y="1600200"/>
+            <a:ext cx="4754880" cy="4480560"/>
           </a:xfrm>
           <a:prstGeom prst="rect">
             <a:avLst/>
@@ -7755,9 +7498,9 @@
           <a:p>
             <a:pPr>
               <a:spcAft>
-                <a:spcPts val="1000"/>
+                <a:spcPts val="1200"/>
               </a:spcAft>
-              <a:defRPr sz="1100" b="1">
+              <a:defRPr sz="1400" b="1">
                 <a:solidFill>
                   <a:srgbClr val="0F172A"/>
                 </a:solidFill>
@@ -7774,7 +7517,7 @@
               </a:spcAft>
             </a:pPr>
             <a:r>
-              <a:rPr b="1" sz="950">
+              <a:rPr b="1" sz="1150">
                 <a:solidFill>
                   <a:srgbClr val="0F172A"/>
                 </a:solidFill>
@@ -7782,7 +7525,7 @@
               <a:t>•  Distributed Hyperparameter Tuning: </a:t>
             </a:r>
             <a:r>
-              <a:rPr sz="850">
+              <a:rPr sz="1100">
                 <a:solidFill>
                   <a:srgbClr val="64748B"/>
                 </a:solidFill>
@@ -7797,7 +7540,7 @@
               </a:spcAft>
             </a:pPr>
             <a:r>
-              <a:rPr b="1" sz="950">
+              <a:rPr b="1" sz="1150">
                 <a:solidFill>
                   <a:srgbClr val="0F172A"/>
                 </a:solidFill>
@@ -7805,7 +7548,7 @@
               <a:t>•  Class-Weighted Loss &amp; Resampling: </a:t>
             </a:r>
             <a:r>
-              <a:rPr sz="850">
+              <a:rPr sz="1100">
                 <a:solidFill>
                   <a:srgbClr val="64748B"/>
                 </a:solidFill>
@@ -7820,7 +7563,7 @@
               </a:spcAft>
             </a:pPr>
             <a:r>
-              <a:rPr b="1" sz="950">
+              <a:rPr b="1" sz="1150">
                 <a:solidFill>
                   <a:srgbClr val="0F172A"/>
                 </a:solidFill>
@@ -7828,7 +7571,7 @@
               <a:t>•  Real-Time Streaming Telemetry: </a:t>
             </a:r>
             <a:r>
-              <a:rPr sz="850">
+              <a:rPr sz="1100">
                 <a:solidFill>
                   <a:srgbClr val="64748B"/>
                 </a:solidFill>
@@ -7843,7 +7586,7 @@
               </a:spcAft>
             </a:pPr>
             <a:r>
-              <a:rPr b="1" sz="950">
+              <a:rPr b="1" sz="1150">
                 <a:solidFill>
                   <a:srgbClr val="0F172A"/>
                 </a:solidFill>
@@ -7851,7 +7594,7 @@
               <a:t>•  Multi-Node Cloud Deployment: </a:t>
             </a:r>
             <a:r>
-              <a:rPr sz="850">
+              <a:rPr sz="1100">
                 <a:solidFill>
                   <a:srgbClr val="64748B"/>
                 </a:solidFill>
@@ -7931,7 +7674,7 @@
         <p:spPr>
           <a:xfrm>
             <a:off x="731520" y="365760"/>
-            <a:ext cx="7772400" cy="256032"/>
+            <a:ext cx="7772400" cy="274320"/>
           </a:xfrm>
           <a:prstGeom prst="rect">
             <a:avLst/>
@@ -7945,7 +7688,7 @@
           <a:lstStyle/>
           <a:p>
             <a:pPr>
-              <a:defRPr sz="850" b="1">
+              <a:defRPr sz="1000" b="1">
                 <a:solidFill>
                   <a:srgbClr val="64748B"/>
                 </a:solidFill>
@@ -7965,7 +7708,7 @@
         </p:nvSpPr>
         <p:spPr>
           <a:xfrm>
-            <a:off x="731520" y="621792"/>
+            <a:off x="731520" y="658368"/>
             <a:ext cx="8412480" cy="594360"/>
           </a:xfrm>
           <a:prstGeom prst="rect">
@@ -7980,7 +7723,7 @@
           <a:lstStyle/>
           <a:p>
             <a:pPr>
-              <a:defRPr sz="2000" b="1">
+              <a:defRPr sz="2400" b="1">
                 <a:solidFill>
                   <a:srgbClr val="0F172A"/>
                 </a:solidFill>
@@ -8008,7 +7751,7 @@
         </p:blipFill>
         <p:spPr>
           <a:xfrm>
-            <a:off x="9784080" y="365760"/>
+            <a:off x="9784080" y="347472"/>
             <a:ext cx="1691640" cy="590698"/>
           </a:xfrm>
           <a:prstGeom prst="rect">
@@ -8024,7 +7767,7 @@
         </p:nvSpPr>
         <p:spPr>
           <a:xfrm>
-            <a:off x="731520" y="1261872"/>
+            <a:off x="731520" y="1298448"/>
             <a:ext cx="10728655" cy="10972"/>
           </a:xfrm>
           <a:prstGeom prst="rect">
@@ -8067,7 +7810,7 @@
         </p:nvSpPr>
         <p:spPr>
           <a:xfrm>
-            <a:off x="731520" y="6446520"/>
+            <a:off x="731520" y="6382512"/>
             <a:ext cx="10728655" cy="10972"/>
           </a:xfrm>
           <a:prstGeom prst="rect">
@@ -8110,8 +7853,8 @@
         </p:nvSpPr>
         <p:spPr>
           <a:xfrm>
-            <a:off x="731520" y="6473952"/>
-            <a:ext cx="8412480" cy="274320"/>
+            <a:off x="731520" y="6419088"/>
+            <a:ext cx="8412480" cy="320040"/>
           </a:xfrm>
           <a:prstGeom prst="rect">
             <a:avLst/>
@@ -8125,7 +7868,7 @@
           <a:lstStyle/>
           <a:p>
             <a:pPr>
-              <a:defRPr sz="850">
+              <a:defRPr sz="950">
                 <a:solidFill>
                   <a:srgbClr val="64748B"/>
                 </a:solidFill>
@@ -8145,8 +7888,8 @@
         </p:nvSpPr>
         <p:spPr>
           <a:xfrm>
-            <a:off x="9875520" y="6473952"/>
-            <a:ext cx="1584655" cy="274320"/>
+            <a:off x="9875520" y="6419088"/>
+            <a:ext cx="1584655" cy="320040"/>
           </a:xfrm>
           <a:prstGeom prst="rect">
             <a:avLst/>
@@ -8160,7 +7903,7 @@
           <a:lstStyle/>
           <a:p>
             <a:pPr algn="r">
-              <a:defRPr sz="850" b="1">
+              <a:defRPr sz="1000" b="1">
                 <a:solidFill>
                   <a:srgbClr val="0F172A"/>
                 </a:solidFill>
@@ -8180,7 +7923,7 @@
         </p:nvSpPr>
         <p:spPr>
           <a:xfrm>
-            <a:off x="731520" y="1417320"/>
+            <a:off x="731520" y="1463040"/>
             <a:ext cx="5212080" cy="3840480"/>
           </a:xfrm>
           <a:prstGeom prst="roundRect">
@@ -8225,8 +7968,8 @@
         </p:nvSpPr>
         <p:spPr>
           <a:xfrm>
-            <a:off x="914400" y="1554480"/>
-            <a:ext cx="4846320" cy="3566160"/>
+            <a:off x="960120" y="1600200"/>
+            <a:ext cx="4754880" cy="3566160"/>
           </a:xfrm>
           <a:prstGeom prst="rect">
             <a:avLst/>
@@ -8241,9 +7984,9 @@
           <a:p>
             <a:pPr>
               <a:spcAft>
-                <a:spcPts val="1000"/>
+                <a:spcPts val="1200"/>
               </a:spcAft>
-              <a:defRPr sz="1100" b="1">
+              <a:defRPr sz="1400" b="1">
                 <a:solidFill>
                   <a:srgbClr val="0F172A"/>
                 </a:solidFill>
@@ -8256,11 +7999,11 @@
           <a:p>
             <a:pPr>
               <a:spcAft>
-                <a:spcPts val="500"/>
+                <a:spcPts val="600"/>
               </a:spcAft>
             </a:pPr>
             <a:r>
-              <a:rPr b="1" sz="950">
+              <a:rPr b="1" sz="1150">
                 <a:solidFill>
                   <a:srgbClr val="0F172A"/>
                 </a:solidFill>
@@ -8268,7 +8011,7 @@
               <a:t>•  End-to-End Big Data Pipeline: </a:t>
             </a:r>
             <a:r>
-              <a:rPr sz="850">
+              <a:rPr sz="1050">
                 <a:solidFill>
                   <a:srgbClr val="64748B"/>
                 </a:solidFill>
@@ -8279,11 +8022,11 @@
           <a:p>
             <a:pPr>
               <a:spcAft>
-                <a:spcPts val="500"/>
+                <a:spcPts val="600"/>
               </a:spcAft>
             </a:pPr>
             <a:r>
-              <a:rPr b="1" sz="950">
+              <a:rPr b="1" sz="1150">
                 <a:solidFill>
                   <a:srgbClr val="0F172A"/>
                 </a:solidFill>
@@ -8291,7 +8034,7 @@
               <a:t>•  High Diagnostic Accuracy: </a:t>
             </a:r>
             <a:r>
-              <a:rPr sz="850">
+              <a:rPr sz="1050">
                 <a:solidFill>
                   <a:srgbClr val="64748B"/>
                 </a:solidFill>
@@ -8302,11 +8045,11 @@
           <a:p>
             <a:pPr>
               <a:spcAft>
-                <a:spcPts val="500"/>
+                <a:spcPts val="600"/>
               </a:spcAft>
             </a:pPr>
             <a:r>
-              <a:rPr b="1" sz="950">
+              <a:rPr b="1" sz="1150">
                 <a:solidFill>
                   <a:srgbClr val="0F172A"/>
                 </a:solidFill>
@@ -8314,7 +8057,7 @@
               <a:t>•  Target Leakage Cleanliness: </a:t>
             </a:r>
             <a:r>
-              <a:rPr sz="850">
+              <a:rPr sz="1050">
                 <a:solidFill>
                   <a:srgbClr val="64748B"/>
                 </a:solidFill>
@@ -8325,11 +8068,11 @@
           <a:p>
             <a:pPr>
               <a:spcAft>
-                <a:spcPts val="500"/>
+                <a:spcPts val="600"/>
               </a:spcAft>
             </a:pPr>
             <a:r>
-              <a:rPr b="1" sz="950">
+              <a:rPr b="1" sz="1150">
                 <a:solidFill>
                   <a:srgbClr val="0F172A"/>
                 </a:solidFill>
@@ -8337,7 +8080,7 @@
               <a:t>•  Cluster Scalability: </a:t>
             </a:r>
             <a:r>
-              <a:rPr sz="850">
+              <a:rPr sz="1050">
                 <a:solidFill>
                   <a:srgbClr val="64748B"/>
                 </a:solidFill>
@@ -8355,229 +8098,8 @@
         </p:nvSpPr>
         <p:spPr>
           <a:xfrm>
-            <a:off x="6217920" y="1417320"/>
+            <a:off x="6217920" y="1463040"/>
             <a:ext cx="5242255" cy="3840480"/>
-          </a:xfrm>
-          <a:prstGeom prst="roundRect">
-            <a:avLst/>
-          </a:prstGeom>
-          <a:solidFill>
-            <a:srgbClr val="F8FAFC"/>
-          </a:solidFill>
-          <a:ln w="12700">
-            <a:solidFill>
-              <a:srgbClr val="CBD5E1"/>
-            </a:solidFill>
-          </a:ln>
-        </p:spPr>
-        <p:style>
-          <a:lnRef idx="1">
-            <a:schemeClr val="accent1"/>
-          </a:lnRef>
-          <a:fillRef idx="3">
-            <a:schemeClr val="accent1"/>
-          </a:fillRef>
-          <a:effectRef idx="2">
-            <a:schemeClr val="accent1"/>
-          </a:effectRef>
-          <a:fontRef idx="minor">
-            <a:schemeClr val="lt1"/>
-          </a:fontRef>
-        </p:style>
-        <p:txBody>
-          <a:bodyPr rtlCol="0" anchor="ctr"/>
-          <a:lstStyle/>
-          <a:p>
-            <a:pPr algn="ctr"/>
-          </a:p>
-        </p:txBody>
-      </p:sp>
-      <p:sp>
-        <p:nvSpPr>
-          <p:cNvPr id="13" name="TextBox 12"/>
-          <p:cNvSpPr txBox="1"/>
-          <p:nvPr/>
-        </p:nvSpPr>
-        <p:spPr>
-          <a:xfrm>
-            <a:off x="6400800" y="1554480"/>
-            <a:ext cx="4876495" cy="3566160"/>
-          </a:xfrm>
-          <a:prstGeom prst="rect">
-            <a:avLst/>
-          </a:prstGeom>
-          <a:noFill/>
-        </p:spPr>
-        <p:txBody>
-          <a:bodyPr wrap="square">
-            <a:spAutoFit/>
-          </a:bodyPr>
-          <a:lstStyle/>
-          <a:p>
-            <a:pPr>
-              <a:spcAft>
-                <a:spcPts val="1000"/>
-              </a:spcAft>
-              <a:defRPr sz="1100" b="1">
-                <a:solidFill>
-                  <a:srgbClr val="0F172A"/>
-                </a:solidFill>
-              </a:defRPr>
-            </a:pPr>
-            <a:r>
-              <a:t>VERIFIED REPOSITORY ARTIFACTS</a:t>
-            </a:r>
-          </a:p>
-          <a:p>
-            <a:pPr>
-              <a:spcAft>
-                <a:spcPts val="400"/>
-              </a:spcAft>
-            </a:pPr>
-            <a:r>
-              <a:rPr b="1" sz="950">
-                <a:solidFill>
-                  <a:srgbClr val="0F172A"/>
-                </a:solidFill>
-              </a:rPr>
-              <a:t>•  GitHub Repository: </a:t>
-            </a:r>
-            <a:r>
-              <a:rPr sz="850">
-                <a:solidFill>
-                  <a:srgbClr val="64748B"/>
-                </a:solidFill>
-              </a:rPr>
-              <a:t>https://github.com/Swarajbabu/SLEEP-HEALTH-ANALYSIS</a:t>
-            </a:r>
-          </a:p>
-          <a:p>
-            <a:pPr>
-              <a:spcAft>
-                <a:spcPts val="400"/>
-              </a:spcAft>
-            </a:pPr>
-            <a:r>
-              <a:rPr b="1" sz="950">
-                <a:solidFill>
-                  <a:srgbClr val="0F172A"/>
-                </a:solidFill>
-              </a:rPr>
-              <a:t>•  Project Report (PDF): </a:t>
-            </a:r>
-            <a:r>
-              <a:rPr sz="850">
-                <a:solidFill>
-                  <a:srgbClr val="64748B"/>
-                </a:solidFill>
-              </a:rPr>
-              <a:t>16-page formal academic report complete with theoretical formulations, system architecture, and empirical tables</a:t>
-            </a:r>
-          </a:p>
-          <a:p>
-            <a:pPr>
-              <a:spcAft>
-                <a:spcPts val="400"/>
-              </a:spcAft>
-            </a:pPr>
-            <a:r>
-              <a:rPr b="1" sz="950">
-                <a:solidFill>
-                  <a:srgbClr val="0F172A"/>
-                </a:solidFill>
-              </a:rPr>
-              <a:t>•  PySpark Notebook: </a:t>
-            </a:r>
-            <a:r>
-              <a:rPr sz="850">
-                <a:solidFill>
-                  <a:srgbClr val="64748B"/>
-                </a:solidFill>
-              </a:rPr>
-              <a:t>Project.ipynb: fully reproducible, zero-error executable Google Colab notebook</a:t>
-            </a:r>
-          </a:p>
-          <a:p>
-            <a:pPr>
-              <a:spcAft>
-                <a:spcPts val="400"/>
-              </a:spcAft>
-            </a:pPr>
-            <a:r>
-              <a:rPr b="1" sz="950">
-                <a:solidFill>
-                  <a:srgbClr val="0F172A"/>
-                </a:solidFill>
-              </a:rPr>
-              <a:t>•  Dataset Archive: </a:t>
-            </a:r>
-            <a:r>
-              <a:rPr sz="850">
-                <a:solidFill>
-                  <a:srgbClr val="64748B"/>
-                </a:solidFill>
-              </a:rPr>
-              <a:t>sleep_health_dataset.csv: 100,000 rows, 32 attributes (14.87 MB)</a:t>
-            </a:r>
-          </a:p>
-          <a:p>
-            <a:pPr>
-              <a:spcAft>
-                <a:spcPts val="400"/>
-              </a:spcAft>
-            </a:pPr>
-            <a:r>
-              <a:rPr b="1" sz="950">
-                <a:solidFill>
-                  <a:srgbClr val="0F172A"/>
-                </a:solidFill>
-              </a:rPr>
-              <a:t>•  Visual Asset Gallery: </a:t>
-            </a:r>
-            <a:r>
-              <a:rPr sz="850">
-                <a:solidFill>
-                  <a:srgbClr val="64748B"/>
-                </a:solidFill>
-              </a:rPr>
-              <a:t>images/ directory containing all 16 execution and result screenshots</a:t>
-            </a:r>
-          </a:p>
-          <a:p>
-            <a:pPr>
-              <a:spcAft>
-                <a:spcPts val="400"/>
-              </a:spcAft>
-            </a:pPr>
-            <a:r>
-              <a:rPr b="1" sz="950">
-                <a:solidFill>
-                  <a:srgbClr val="0F172A"/>
-                </a:solidFill>
-              </a:rPr>
-              <a:t>•  Documentation: </a:t>
-            </a:r>
-            <a:r>
-              <a:rPr sz="850">
-                <a:solidFill>
-                  <a:srgbClr val="64748B"/>
-                </a:solidFill>
-              </a:rPr>
-              <a:t>README.md: production-grade documentation with architecture diagrams, formulas, and gallery</a:t>
-            </a:r>
-          </a:p>
-        </p:txBody>
-      </p:sp>
-      <p:sp>
-        <p:nvSpPr>
-          <p:cNvPr id="14" name="Rounded Rectangle 13"/>
-          <p:cNvSpPr/>
-          <p:nvPr/>
-        </p:nvSpPr>
-        <p:spPr>
-          <a:xfrm>
-            <a:off x="731520" y="5440680"/>
-            <a:ext cx="10728655" cy="868680"/>
           </a:xfrm>
           <a:prstGeom prst="roundRect">
             <a:avLst/>
@@ -8615,14 +8137,14 @@
       </p:sp>
       <p:sp>
         <p:nvSpPr>
-          <p:cNvPr id="15" name="TextBox 14"/>
+          <p:cNvPr id="13" name="TextBox 12"/>
           <p:cNvSpPr txBox="1"/>
           <p:nvPr/>
         </p:nvSpPr>
         <p:spPr>
           <a:xfrm>
-            <a:off x="914400" y="5532120"/>
-            <a:ext cx="10362895" cy="731520"/>
+            <a:off x="6446520" y="1600200"/>
+            <a:ext cx="4754880" cy="3566160"/>
           </a:xfrm>
           <a:prstGeom prst="rect">
             <a:avLst/>
@@ -8635,8 +8157,229 @@
           </a:bodyPr>
           <a:lstStyle/>
           <a:p>
-            <a:r>
-              <a:rPr b="1" sz="1200">
+            <a:pPr>
+              <a:spcAft>
+                <a:spcPts val="1200"/>
+              </a:spcAft>
+              <a:defRPr sz="1400" b="1">
+                <a:solidFill>
+                  <a:srgbClr val="0F172A"/>
+                </a:solidFill>
+              </a:defRPr>
+            </a:pPr>
+            <a:r>
+              <a:t>VERIFIED REPOSITORY ARTIFACTS</a:t>
+            </a:r>
+          </a:p>
+          <a:p>
+            <a:pPr>
+              <a:spcAft>
+                <a:spcPts val="500"/>
+              </a:spcAft>
+            </a:pPr>
+            <a:r>
+              <a:rPr b="1" sz="1150">
+                <a:solidFill>
+                  <a:srgbClr val="0F172A"/>
+                </a:solidFill>
+              </a:rPr>
+              <a:t>•  GitHub Repository: </a:t>
+            </a:r>
+            <a:r>
+              <a:rPr sz="1050">
+                <a:solidFill>
+                  <a:srgbClr val="64748B"/>
+                </a:solidFill>
+              </a:rPr>
+              <a:t>https://github.com/Swarajbabu/SLEEP-HEALTH-ANALYSIS</a:t>
+            </a:r>
+          </a:p>
+          <a:p>
+            <a:pPr>
+              <a:spcAft>
+                <a:spcPts val="500"/>
+              </a:spcAft>
+            </a:pPr>
+            <a:r>
+              <a:rPr b="1" sz="1150">
+                <a:solidFill>
+                  <a:srgbClr val="0F172A"/>
+                </a:solidFill>
+              </a:rPr>
+              <a:t>•  Project Report (PDF): </a:t>
+            </a:r>
+            <a:r>
+              <a:rPr sz="1050">
+                <a:solidFill>
+                  <a:srgbClr val="64748B"/>
+                </a:solidFill>
+              </a:rPr>
+              <a:t>16-page formal academic report complete with theoretical formulations, system architecture, and empirical tables</a:t>
+            </a:r>
+          </a:p>
+          <a:p>
+            <a:pPr>
+              <a:spcAft>
+                <a:spcPts val="500"/>
+              </a:spcAft>
+            </a:pPr>
+            <a:r>
+              <a:rPr b="1" sz="1150">
+                <a:solidFill>
+                  <a:srgbClr val="0F172A"/>
+                </a:solidFill>
+              </a:rPr>
+              <a:t>•  PySpark Notebook: </a:t>
+            </a:r>
+            <a:r>
+              <a:rPr sz="1050">
+                <a:solidFill>
+                  <a:srgbClr val="64748B"/>
+                </a:solidFill>
+              </a:rPr>
+              <a:t>Project.ipynb: fully reproducible, zero-error executable Google Colab notebook</a:t>
+            </a:r>
+          </a:p>
+          <a:p>
+            <a:pPr>
+              <a:spcAft>
+                <a:spcPts val="500"/>
+              </a:spcAft>
+            </a:pPr>
+            <a:r>
+              <a:rPr b="1" sz="1150">
+                <a:solidFill>
+                  <a:srgbClr val="0F172A"/>
+                </a:solidFill>
+              </a:rPr>
+              <a:t>•  Dataset Archive: </a:t>
+            </a:r>
+            <a:r>
+              <a:rPr sz="1050">
+                <a:solidFill>
+                  <a:srgbClr val="64748B"/>
+                </a:solidFill>
+              </a:rPr>
+              <a:t>sleep_health_dataset.csv: 100,000 rows, 32 attributes (14.87 MB)</a:t>
+            </a:r>
+          </a:p>
+          <a:p>
+            <a:pPr>
+              <a:spcAft>
+                <a:spcPts val="500"/>
+              </a:spcAft>
+            </a:pPr>
+            <a:r>
+              <a:rPr b="1" sz="1150">
+                <a:solidFill>
+                  <a:srgbClr val="0F172A"/>
+                </a:solidFill>
+              </a:rPr>
+              <a:t>•  Visual Asset Gallery: </a:t>
+            </a:r>
+            <a:r>
+              <a:rPr sz="1050">
+                <a:solidFill>
+                  <a:srgbClr val="64748B"/>
+                </a:solidFill>
+              </a:rPr>
+              <a:t>images/ directory containing all empirical graphs and official LPU logo</a:t>
+            </a:r>
+          </a:p>
+          <a:p>
+            <a:pPr>
+              <a:spcAft>
+                <a:spcPts val="500"/>
+              </a:spcAft>
+            </a:pPr>
+            <a:r>
+              <a:rPr b="1" sz="1150">
+                <a:solidFill>
+                  <a:srgbClr val="0F172A"/>
+                </a:solidFill>
+              </a:rPr>
+              <a:t>•  Defense Manual: </a:t>
+            </a:r>
+            <a:r>
+              <a:rPr sz="1050">
+                <a:solidFill>
+                  <a:srgbClr val="64748B"/>
+                </a:solidFill>
+              </a:rPr>
+              <a:t>ppt/README.md: complete presentation manual with speaker scripts and viva Q&amp;A</a:t>
+            </a:r>
+          </a:p>
+        </p:txBody>
+      </p:sp>
+      <p:sp>
+        <p:nvSpPr>
+          <p:cNvPr id="14" name="Rounded Rectangle 13"/>
+          <p:cNvSpPr/>
+          <p:nvPr/>
+        </p:nvSpPr>
+        <p:spPr>
+          <a:xfrm>
+            <a:off x="731520" y="5440680"/>
+            <a:ext cx="10728655" cy="841248"/>
+          </a:xfrm>
+          <a:prstGeom prst="roundRect">
+            <a:avLst/>
+          </a:prstGeom>
+          <a:solidFill>
+            <a:srgbClr val="F8FAFC"/>
+          </a:solidFill>
+          <a:ln w="19050">
+            <a:solidFill>
+              <a:srgbClr val="0F172A"/>
+            </a:solidFill>
+          </a:ln>
+        </p:spPr>
+        <p:style>
+          <a:lnRef idx="1">
+            <a:schemeClr val="accent1"/>
+          </a:lnRef>
+          <a:fillRef idx="3">
+            <a:schemeClr val="accent1"/>
+          </a:fillRef>
+          <a:effectRef idx="2">
+            <a:schemeClr val="accent1"/>
+          </a:effectRef>
+          <a:fontRef idx="minor">
+            <a:schemeClr val="lt1"/>
+          </a:fontRef>
+        </p:style>
+        <p:txBody>
+          <a:bodyPr rtlCol="0" anchor="ctr"/>
+          <a:lstStyle/>
+          <a:p>
+            <a:pPr algn="ctr"/>
+          </a:p>
+        </p:txBody>
+      </p:sp>
+      <p:sp>
+        <p:nvSpPr>
+          <p:cNvPr id="15" name="TextBox 14"/>
+          <p:cNvSpPr txBox="1"/>
+          <p:nvPr/>
+        </p:nvSpPr>
+        <p:spPr>
+          <a:xfrm>
+            <a:off x="960120" y="5532120"/>
+            <a:ext cx="10241280" cy="685800"/>
+          </a:xfrm>
+          <a:prstGeom prst="rect">
+            <a:avLst/>
+          </a:prstGeom>
+          <a:noFill/>
+        </p:spPr>
+        <p:txBody>
+          <a:bodyPr wrap="square">
+            <a:spAutoFit/>
+          </a:bodyPr>
+          <a:lstStyle/>
+          <a:p>
+            <a:r>
+              <a:rPr b="1" sz="1250">
                 <a:solidFill>
                   <a:srgbClr val="0F172A"/>
                 </a:solidFill>
@@ -8645,7 +8388,7 @@
 </a:t>
             </a:r>
             <a:r>
-              <a:rPr sz="950">
+              <a:rPr sz="1100">
                 <a:solidFill>
                   <a:srgbClr val="1E293B"/>
                 </a:solidFill>
@@ -8725,7 +8468,7 @@
         <p:spPr>
           <a:xfrm>
             <a:off x="731520" y="365760"/>
-            <a:ext cx="7772400" cy="256032"/>
+            <a:ext cx="7772400" cy="274320"/>
           </a:xfrm>
           <a:prstGeom prst="rect">
             <a:avLst/>
@@ -8739,7 +8482,7 @@
           <a:lstStyle/>
           <a:p>
             <a:pPr>
-              <a:defRPr sz="850" b="1">
+              <a:defRPr sz="1000" b="1">
                 <a:solidFill>
                   <a:srgbClr val="64748B"/>
                 </a:solidFill>
@@ -8759,7 +8502,7 @@
         </p:nvSpPr>
         <p:spPr>
           <a:xfrm>
-            <a:off x="731520" y="621792"/>
+            <a:off x="731520" y="658368"/>
             <a:ext cx="8412480" cy="594360"/>
           </a:xfrm>
           <a:prstGeom prst="rect">
@@ -8774,7 +8517,7 @@
           <a:lstStyle/>
           <a:p>
             <a:pPr>
-              <a:defRPr sz="2000" b="1">
+              <a:defRPr sz="2400" b="1">
                 <a:solidFill>
                   <a:srgbClr val="0F172A"/>
                 </a:solidFill>
@@ -8802,7 +8545,7 @@
         </p:blipFill>
         <p:spPr>
           <a:xfrm>
-            <a:off x="9784080" y="365760"/>
+            <a:off x="9784080" y="347472"/>
             <a:ext cx="1691640" cy="590698"/>
           </a:xfrm>
           <a:prstGeom prst="rect">
@@ -8818,7 +8561,7 @@
         </p:nvSpPr>
         <p:spPr>
           <a:xfrm>
-            <a:off x="731520" y="1261872"/>
+            <a:off x="731520" y="1298448"/>
             <a:ext cx="10728655" cy="10972"/>
           </a:xfrm>
           <a:prstGeom prst="rect">
@@ -8861,7 +8604,7 @@
         </p:nvSpPr>
         <p:spPr>
           <a:xfrm>
-            <a:off x="731520" y="6446520"/>
+            <a:off x="731520" y="6382512"/>
             <a:ext cx="10728655" cy="10972"/>
           </a:xfrm>
           <a:prstGeom prst="rect">
@@ -8904,8 +8647,8 @@
         </p:nvSpPr>
         <p:spPr>
           <a:xfrm>
-            <a:off x="731520" y="6473952"/>
-            <a:ext cx="8412480" cy="274320"/>
+            <a:off x="731520" y="6419088"/>
+            <a:ext cx="8412480" cy="320040"/>
           </a:xfrm>
           <a:prstGeom prst="rect">
             <a:avLst/>
@@ -8919,7 +8662,7 @@
           <a:lstStyle/>
           <a:p>
             <a:pPr>
-              <a:defRPr sz="850">
+              <a:defRPr sz="950">
                 <a:solidFill>
                   <a:srgbClr val="64748B"/>
                 </a:solidFill>
@@ -8939,8 +8682,8 @@
         </p:nvSpPr>
         <p:spPr>
           <a:xfrm>
-            <a:off x="9875520" y="6473952"/>
-            <a:ext cx="1584655" cy="274320"/>
+            <a:off x="9875520" y="6419088"/>
+            <a:ext cx="1584655" cy="320040"/>
           </a:xfrm>
           <a:prstGeom prst="rect">
             <a:avLst/>
@@ -8954,7 +8697,7 @@
           <a:lstStyle/>
           <a:p>
             <a:pPr algn="r">
-              <a:defRPr sz="850" b="1">
+              <a:defRPr sz="1000" b="1">
                 <a:solidFill>
                   <a:srgbClr val="0F172A"/>
                 </a:solidFill>
@@ -8974,8 +8717,8 @@
         </p:nvSpPr>
         <p:spPr>
           <a:xfrm>
-            <a:off x="731520" y="1417320"/>
-            <a:ext cx="5212080" cy="3840480"/>
+            <a:off x="731520" y="1463040"/>
+            <a:ext cx="5212080" cy="3794760"/>
           </a:xfrm>
           <a:prstGeom prst="roundRect">
             <a:avLst/>
@@ -9019,8 +8762,8 @@
         </p:nvSpPr>
         <p:spPr>
           <a:xfrm>
-            <a:off x="914400" y="1554480"/>
-            <a:ext cx="4846320" cy="3566160"/>
+            <a:off x="960120" y="1600200"/>
+            <a:ext cx="4754880" cy="3474720"/>
           </a:xfrm>
           <a:prstGeom prst="rect">
             <a:avLst/>
@@ -9035,108 +8778,108 @@
           <a:p>
             <a:pPr>
               <a:spcAft>
-                <a:spcPts val="1200"/>
+                <a:spcPts val="1400"/>
               </a:spcAft>
-              <a:defRPr sz="1150" b="1">
+              <a:defRPr sz="1400" b="1">
                 <a:solidFill>
                   <a:srgbClr val="0F172A"/>
                 </a:solidFill>
               </a:defRPr>
             </a:pPr>
             <a:r>
-              <a:t>THE CLINICAL BOTTLENECK (PSG LIMITS)</a:t>
+              <a:t>THE CLINICAL SCREENING BOTTLENECK</a:t>
             </a:r>
           </a:p>
           <a:p>
             <a:pPr>
               <a:spcAft>
-                <a:spcPts val="600"/>
+                <a:spcPts val="800"/>
               </a:spcAft>
             </a:pPr>
             <a:r>
-              <a:rPr b="1" sz="950">
+              <a:rPr b="1" sz="1150">
                 <a:solidFill>
                   <a:srgbClr val="0F172A"/>
                 </a:solidFill>
               </a:rPr>
-              <a:t>•  High Prevalence: </a:t>
-            </a:r>
-            <a:r>
-              <a:rPr sz="900">
+              <a:t>•  High Global Prevalence: </a:t>
+            </a:r>
+            <a:r>
+              <a:rPr sz="1100">
                 <a:solidFill>
                   <a:srgbClr val="64748B"/>
                 </a:solidFill>
               </a:rPr>
-              <a:t>Over 30% of adults worldwide suffer from chronic sleep disorders such as Obstructive Sleep Apnea (OSA) and Chronic Insomnia.</a:t>
+              <a:t>Sleep disorders (apnea, chronic insomnia) afflict over 30% of adults worldwide, leading to cardiovascular and cognitive morbidity.</a:t>
             </a:r>
           </a:p>
           <a:p>
             <a:pPr>
               <a:spcAft>
-                <a:spcPts val="600"/>
+                <a:spcPts val="800"/>
               </a:spcAft>
             </a:pPr>
             <a:r>
-              <a:rPr b="1" sz="950">
+              <a:rPr b="1" sz="1150">
                 <a:solidFill>
                   <a:srgbClr val="0F172A"/>
                 </a:solidFill>
               </a:rPr>
-              <a:t>•  Gold-Standard Barrier: </a:t>
-            </a:r>
-            <a:r>
-              <a:rPr sz="900">
+              <a:t>•  Invasive Gold Standard: </a:t>
+            </a:r>
+            <a:r>
+              <a:rPr sz="1100">
                 <a:solidFill>
                   <a:srgbClr val="64748B"/>
                 </a:solidFill>
               </a:rPr>
-              <a:t>Diagnosis strictly relies on overnight Polysomnography (PSG) in dedicated sleep laboratories with multi-sensor body attachments.</a:t>
+              <a:t>Diagnosis requires overnight Polysomnography (PSG) in dedicated hospital sleep labs with extensive wired sensors.</a:t>
             </a:r>
           </a:p>
           <a:p>
             <a:pPr>
               <a:spcAft>
-                <a:spcPts val="600"/>
+                <a:spcPts val="800"/>
               </a:spcAft>
             </a:pPr>
             <a:r>
-              <a:rPr b="1" sz="950">
+              <a:rPr b="1" sz="1150">
                 <a:solidFill>
                   <a:srgbClr val="0F172A"/>
                 </a:solidFill>
               </a:rPr>
-              <a:t>•  Severe Constraints: </a:t>
-            </a:r>
-            <a:r>
-              <a:rPr sz="900">
+              <a:t>•  Resource Bottleneck: </a:t>
+            </a:r>
+            <a:r>
+              <a:rPr sz="1100">
                 <a:solidFill>
                   <a:srgbClr val="64748B"/>
                 </a:solidFill>
               </a:rPr>
-              <a:t>PSG is highly invasive, wire-tethered, cost-prohibitive, and suffers from multi-month waiting lists in clinical facilities.</a:t>
+              <a:t>PSG requires clinical overnight stays, costs thousands of dollars, and faces multi-month appointment waitlists.</a:t>
             </a:r>
           </a:p>
           <a:p>
             <a:pPr>
               <a:spcAft>
-                <a:spcPts val="600"/>
+                <a:spcPts val="800"/>
               </a:spcAft>
             </a:pPr>
             <a:r>
-              <a:rPr b="1" sz="950">
+              <a:rPr b="1" sz="1150">
                 <a:solidFill>
                   <a:srgbClr val="0F172A"/>
                 </a:solidFill>
               </a:rPr>
-              <a:t>•  Triage Failure: </a:t>
-            </a:r>
-            <a:r>
-              <a:rPr sz="900">
+              <a:t>•  Scalability Failure: </a:t>
+            </a:r>
+            <a:r>
+              <a:rPr sz="1100">
                 <a:solidFill>
                   <a:srgbClr val="64748B"/>
                 </a:solidFill>
               </a:rPr>
-              <a:t>PSG cannot scale for population-wide screening or early preventative intervention, necessitating non-invasive wearable-based screening.</a:t>
+              <a:t>In-lab PSG cannot serve as a population-level preventative screening tool. Non-invasive algorithmic triage is required.</a:t>
             </a:r>
           </a:p>
         </p:txBody>
@@ -9149,8 +8892,8 @@
         </p:nvSpPr>
         <p:spPr>
           <a:xfrm>
-            <a:off x="6217920" y="1417320"/>
-            <a:ext cx="5242255" cy="3840480"/>
+            <a:off x="6217920" y="1463040"/>
+            <a:ext cx="5242255" cy="3794760"/>
           </a:xfrm>
           <a:prstGeom prst="roundRect">
             <a:avLst/>
@@ -9194,8 +8937,8 @@
         </p:nvSpPr>
         <p:spPr>
           <a:xfrm>
-            <a:off x="6400800" y="1554480"/>
-            <a:ext cx="4876495" cy="3566160"/>
+            <a:off x="6446520" y="1600200"/>
+            <a:ext cx="4754880" cy="3474720"/>
           </a:xfrm>
           <a:prstGeom prst="rect">
             <a:avLst/>
@@ -9210,9 +8953,9 @@
           <a:p>
             <a:pPr>
               <a:spcAft>
-                <a:spcPts val="1200"/>
+                <a:spcPts val="1400"/>
               </a:spcAft>
-              <a:defRPr sz="1150" b="1">
+              <a:defRPr sz="1400" b="1">
                 <a:solidFill>
                   <a:srgbClr val="0F172A"/>
                 </a:solidFill>
@@ -9225,34 +8968,34 @@
           <a:p>
             <a:pPr>
               <a:spcAft>
-                <a:spcPts val="600"/>
+                <a:spcPts val="800"/>
               </a:spcAft>
             </a:pPr>
             <a:r>
-              <a:rPr b="1" sz="950">
+              <a:rPr b="1" sz="1150">
                 <a:solidFill>
                   <a:srgbClr val="0F172A"/>
                 </a:solidFill>
               </a:rPr>
-              <a:t>•  Massive Telemetry: </a:t>
-            </a:r>
-            <a:r>
-              <a:rPr sz="900">
+              <a:t>•  Continuous Wearable Telemetry: </a:t>
+            </a:r>
+            <a:r>
+              <a:rPr sz="1100">
                 <a:solidFill>
                   <a:srgbClr val="64748B"/>
                 </a:solidFill>
               </a:rPr>
-              <a:t>Modern smartwatches and clinical EHRs generate continuous high-frequency vitals, creating multi-gigabyte cohort tables.</a:t>
+              <a:t>Consumer smartwatches and EHRs generate continuous streams of sleep stages, heart rates, and daytime steps.</a:t>
             </a:r>
           </a:p>
           <a:p>
             <a:pPr>
               <a:spcAft>
-                <a:spcPts val="600"/>
+                <a:spcPts val="800"/>
               </a:spcAft>
             </a:pPr>
             <a:r>
-              <a:rPr b="1" sz="950">
+              <a:rPr b="1" sz="1150">
                 <a:solidFill>
                   <a:srgbClr val="0F172A"/>
                 </a:solidFill>
@@ -9260,58 +9003,58 @@
               <a:t>•  Single-Node Failure: </a:t>
             </a:r>
             <a:r>
-              <a:rPr sz="900">
+              <a:rPr sz="1100">
                 <a:solidFill>
                   <a:srgbClr val="64748B"/>
                 </a:solidFill>
               </a:rPr>
-              <a:t>Traditional Python frameworks (Pandas, Scikit-Learn) load full datasets into monolithic RAM and execute on a single CPU core.</a:t>
+              <a:t>Standard Python tools (Pandas, Scikit-Learn) load full datasets into memory and compute on a single CPU core.</a:t>
             </a:r>
           </a:p>
           <a:p>
             <a:pPr>
               <a:spcAft>
-                <a:spcPts val="600"/>
+                <a:spcPts val="800"/>
               </a:spcAft>
             </a:pPr>
             <a:r>
-              <a:rPr b="1" sz="950">
+              <a:rPr b="1" sz="1150">
                 <a:solidFill>
                   <a:srgbClr val="0F172A"/>
                 </a:solidFill>
               </a:rPr>
-              <a:t>•  Scaling Bottleneck: </a:t>
-            </a:r>
-            <a:r>
-              <a:rPr sz="900">
+              <a:t>•  Out-of-Memory Threshold: </a:t>
+            </a:r>
+            <a:r>
+              <a:rPr sz="1100">
                 <a:solidFill>
                   <a:srgbClr val="64748B"/>
                 </a:solidFill>
               </a:rPr>
-              <a:t>At 100,000+ records and 32 features, encoding, vector assembly, and ensemble fitting cause memory swapping, disk thrashing, and crashes.</a:t>
+              <a:t>At 100,000 records with 32 attributes, categorical encoding and tree induction trigger memory swapping and crashes.</a:t>
             </a:r>
           </a:p>
           <a:p>
             <a:pPr>
               <a:spcAft>
-                <a:spcPts val="600"/>
+                <a:spcPts val="800"/>
               </a:spcAft>
             </a:pPr>
             <a:r>
-              <a:rPr b="1" sz="950">
+              <a:rPr b="1" sz="1150">
                 <a:solidFill>
                   <a:srgbClr val="0F172A"/>
                 </a:solidFill>
               </a:rPr>
-              <a:t>•  Horizontal Wall: </a:t>
-            </a:r>
-            <a:r>
-              <a:rPr sz="900">
+              <a:t>•  Horizontal Scalability: </a:t>
+            </a:r>
+            <a:r>
+              <a:rPr sz="1100">
                 <a:solidFill>
                   <a:srgbClr val="64748B"/>
                 </a:solidFill>
               </a:rPr>
-              <a:t>Single-node tools cannot scale linearly as patient registries grow into millions of observations without distributed cluster architectures.</a:t>
+              <a:t>Single-node architectures cannot scale linearly as registries grow into millions of patient observations.</a:t>
             </a:r>
           </a:p>
         </p:txBody>
@@ -9324,8 +9067,8 @@
         </p:nvSpPr>
         <p:spPr>
           <a:xfrm>
-            <a:off x="731520" y="5440680"/>
-            <a:ext cx="10728655" cy="868680"/>
+            <a:off x="731520" y="5413248"/>
+            <a:ext cx="10728655" cy="841248"/>
           </a:xfrm>
           <a:prstGeom prst="roundRect">
             <a:avLst/>
@@ -9369,8 +9112,8 @@
         </p:nvSpPr>
         <p:spPr>
           <a:xfrm>
-            <a:off x="914400" y="5532120"/>
-            <a:ext cx="10362895" cy="731520"/>
+            <a:off x="960120" y="5486400"/>
+            <a:ext cx="10241280" cy="685800"/>
           </a:xfrm>
           <a:prstGeom prst="rect">
             <a:avLst/>
@@ -9384,20 +9127,20 @@
           <a:lstStyle/>
           <a:p>
             <a:r>
-              <a:rPr b="1" sz="1050">
+              <a:rPr b="1" sz="1200">
                 <a:solidFill>
                   <a:srgbClr val="0F172A"/>
                 </a:solidFill>
               </a:rPr>
-              <a:t>THE DISTRIBUTED CLUSTER COMPUTING PARADIGM: </a:t>
-            </a:r>
-            <a:r>
-              <a:rPr sz="950">
+              <a:t>DISTRIBUTED CLUSTER COMPUTING SOLUTION: </a:t>
+            </a:r>
+            <a:r>
+              <a:rPr sz="1150">
                 <a:solidFill>
                   <a:srgbClr val="1E293B"/>
                 </a:solidFill>
               </a:rPr>
-              <a:t>Apache PySpark bridges this dual crisis by partitioning 100,000 records across parallel worker threads (`local[*]`), compiling queries with the Catalyst optimizer, and executing distributed MLlib pipelines without single-node memory exhaustion.</a:t>
+              <a:t>Apache PySpark resolves this dual challenge by partitioning 100,000 records across parallel worker threads (`local[*]`), compiling queries with Catalyst optimization, and training MLlib pipelines without memory exhaustion.</a:t>
             </a:r>
           </a:p>
         </p:txBody>
@@ -9472,7 +9215,7 @@
         <p:spPr>
           <a:xfrm>
             <a:off x="731520" y="365760"/>
-            <a:ext cx="7772400" cy="256032"/>
+            <a:ext cx="7772400" cy="274320"/>
           </a:xfrm>
           <a:prstGeom prst="rect">
             <a:avLst/>
@@ -9486,7 +9229,7 @@
           <a:lstStyle/>
           <a:p>
             <a:pPr>
-              <a:defRPr sz="850" b="1">
+              <a:defRPr sz="1000" b="1">
                 <a:solidFill>
                   <a:srgbClr val="64748B"/>
                 </a:solidFill>
@@ -9506,7 +9249,7 @@
         </p:nvSpPr>
         <p:spPr>
           <a:xfrm>
-            <a:off x="731520" y="621792"/>
+            <a:off x="731520" y="658368"/>
             <a:ext cx="8412480" cy="594360"/>
           </a:xfrm>
           <a:prstGeom prst="rect">
@@ -9521,7 +9264,7 @@
           <a:lstStyle/>
           <a:p>
             <a:pPr>
-              <a:defRPr sz="2000" b="1">
+              <a:defRPr sz="2400" b="1">
                 <a:solidFill>
                   <a:srgbClr val="0F172A"/>
                 </a:solidFill>
@@ -9549,7 +9292,7 @@
         </p:blipFill>
         <p:spPr>
           <a:xfrm>
-            <a:off x="9784080" y="365760"/>
+            <a:off x="9784080" y="347472"/>
             <a:ext cx="1691640" cy="590698"/>
           </a:xfrm>
           <a:prstGeom prst="rect">
@@ -9565,7 +9308,7 @@
         </p:nvSpPr>
         <p:spPr>
           <a:xfrm>
-            <a:off x="731520" y="1261872"/>
+            <a:off x="731520" y="1298448"/>
             <a:ext cx="10728655" cy="10972"/>
           </a:xfrm>
           <a:prstGeom prst="rect">
@@ -9608,7 +9351,7 @@
         </p:nvSpPr>
         <p:spPr>
           <a:xfrm>
-            <a:off x="731520" y="6446520"/>
+            <a:off x="731520" y="6382512"/>
             <a:ext cx="10728655" cy="10972"/>
           </a:xfrm>
           <a:prstGeom prst="rect">
@@ -9651,8 +9394,8 @@
         </p:nvSpPr>
         <p:spPr>
           <a:xfrm>
-            <a:off x="731520" y="6473952"/>
-            <a:ext cx="8412480" cy="274320"/>
+            <a:off x="731520" y="6419088"/>
+            <a:ext cx="8412480" cy="320040"/>
           </a:xfrm>
           <a:prstGeom prst="rect">
             <a:avLst/>
@@ -9666,7 +9409,7 @@
           <a:lstStyle/>
           <a:p>
             <a:pPr>
-              <a:defRPr sz="850">
+              <a:defRPr sz="950">
                 <a:solidFill>
                   <a:srgbClr val="64748B"/>
                 </a:solidFill>
@@ -9686,8 +9429,8 @@
         </p:nvSpPr>
         <p:spPr>
           <a:xfrm>
-            <a:off x="9875520" y="6473952"/>
-            <a:ext cx="1584655" cy="274320"/>
+            <a:off x="9875520" y="6419088"/>
+            <a:ext cx="1584655" cy="320040"/>
           </a:xfrm>
           <a:prstGeom prst="rect">
             <a:avLst/>
@@ -9701,7 +9444,7 @@
           <a:lstStyle/>
           <a:p>
             <a:pPr algn="r">
-              <a:defRPr sz="850" b="1">
+              <a:defRPr sz="1000" b="1">
                 <a:solidFill>
                   <a:srgbClr val="0F172A"/>
                 </a:solidFill>
@@ -9721,8 +9464,8 @@
         </p:nvSpPr>
         <p:spPr>
           <a:xfrm>
-            <a:off x="731520" y="1417320"/>
-            <a:ext cx="10728655" cy="1078992"/>
+            <a:off x="731520" y="1463040"/>
+            <a:ext cx="10728655" cy="1051560"/>
           </a:xfrm>
           <a:prstGeom prst="roundRect">
             <a:avLst/>
@@ -9766,8 +9509,8 @@
         </p:nvSpPr>
         <p:spPr>
           <a:xfrm>
-            <a:off x="960120" y="1581912"/>
-            <a:ext cx="777240" cy="749808"/>
+            <a:off x="960120" y="1609344"/>
+            <a:ext cx="777240" cy="731520"/>
           </a:xfrm>
           <a:prstGeom prst="roundRect">
             <a:avLst/>
@@ -9798,7 +9541,7 @@
           <a:lstStyle/>
           <a:p>
             <a:pPr algn="ctr">
-              <a:defRPr sz="1500" b="1">
+              <a:defRPr sz="1600" b="1">
                 <a:solidFill>
                   <a:srgbClr val="FFFFFF"/>
                 </a:solidFill>
@@ -9818,7 +9561,7 @@
         </p:nvSpPr>
         <p:spPr>
           <a:xfrm>
-            <a:off x="1920240" y="1527048"/>
+            <a:off x="1920240" y="1554480"/>
             <a:ext cx="9326880" cy="868680"/>
           </a:xfrm>
           <a:prstGeom prst="rect">
@@ -9836,26 +9579,26 @@
               <a:spcAft>
                 <a:spcPts val="300"/>
               </a:spcAft>
-              <a:defRPr sz="1150" b="1">
+              <a:defRPr sz="1300" b="1">
                 <a:solidFill>
                   <a:srgbClr val="0F172A"/>
                 </a:solidFill>
               </a:defRPr>
             </a:pPr>
             <a:r>
-              <a:t>Distributed Ingestion &amp; Schema Parsing</a:t>
-            </a:r>
-          </a:p>
-          <a:p>
-            <a:pPr>
-              <a:defRPr sz="900">
+              <a:t>Distributed Data Ingestion &amp; Schema Parsing</a:t>
+            </a:r>
+          </a:p>
+          <a:p>
+            <a:pPr>
+              <a:defRPr sz="1100">
                 <a:solidFill>
                   <a:srgbClr val="64748B"/>
                 </a:solidFill>
               </a:defRPr>
             </a:pPr>
             <a:r>
-              <a:t>Ingest 100,000 records from CSV storage using spark.read.csv() in local[*] master mode. Autonomously infer data types across all 32 clinical, demographic, and vital attributes with zero schema truncation.</a:t>
+              <a:t>Ingest 100,000 patient records from CSV storage using PySpark's resilient DataFrame API in local[*] multi-threaded cluster mode, automatically inferring data types across 32 clinical features without schema truncation.</a:t>
             </a:r>
           </a:p>
         </p:txBody>
@@ -9868,8 +9611,8 @@
         </p:nvSpPr>
         <p:spPr>
           <a:xfrm>
-            <a:off x="731520" y="2624328"/>
-            <a:ext cx="10728655" cy="1078992"/>
+            <a:off x="731520" y="2633472"/>
+            <a:ext cx="10728655" cy="1051560"/>
           </a:xfrm>
           <a:prstGeom prst="roundRect">
             <a:avLst/>
@@ -9913,8 +9656,8 @@
         </p:nvSpPr>
         <p:spPr>
           <a:xfrm>
-            <a:off x="960120" y="2788920"/>
-            <a:ext cx="777240" cy="749808"/>
+            <a:off x="960120" y="2779776"/>
+            <a:ext cx="777240" cy="731520"/>
           </a:xfrm>
           <a:prstGeom prst="roundRect">
             <a:avLst/>
@@ -9945,7 +9688,7 @@
           <a:lstStyle/>
           <a:p>
             <a:pPr algn="ctr">
-              <a:defRPr sz="1500" b="1">
+              <a:defRPr sz="1600" b="1">
                 <a:solidFill>
                   <a:srgbClr val="FFFFFF"/>
                 </a:solidFill>
@@ -9965,7 +9708,7 @@
         </p:nvSpPr>
         <p:spPr>
           <a:xfrm>
-            <a:off x="1920240" y="2734056"/>
+            <a:off x="1920240" y="2724912"/>
             <a:ext cx="9326880" cy="868680"/>
           </a:xfrm>
           <a:prstGeom prst="rect">
@@ -9983,26 +9726,26 @@
               <a:spcAft>
                 <a:spcPts val="300"/>
               </a:spcAft>
-              <a:defRPr sz="1150" b="1">
+              <a:defRPr sz="1300" b="1">
                 <a:solidFill>
                   <a:srgbClr val="0F172A"/>
                 </a:solidFill>
               </a:defRPr>
             </a:pPr>
             <a:r>
-              <a:t>Parallel Quality Verification &amp; EDA</a:t>
-            </a:r>
-          </a:p>
-          <a:p>
-            <a:pPr>
-              <a:defRPr sz="900">
+              <a:t>Parallel Quality Verification &amp; Class Profiling</a:t>
+            </a:r>
+          </a:p>
+          <a:p>
+            <a:pPr>
+              <a:defRPr sz="1100">
                 <a:solidFill>
                   <a:srgbClr val="64748B"/>
                 </a:solidFill>
               </a:defRPr>
             </a:pPr>
             <a:r>
-              <a:t>Execute parallelized Spark SQL aggregation expressions across all 32 columns simultaneously to mathematically confirm zero missing values. Profile the 4-tier class distribution and calculate biomarker means.</a:t>
+              <a:t>Execute parallelized Spark SQL aggregation queries across all 32 columns simultaneously to verify zero missing values, evaluate class imbalance, and compute biomarker averages across risk tiers.</a:t>
             </a:r>
           </a:p>
         </p:txBody>
@@ -10015,8 +9758,8 @@
         </p:nvSpPr>
         <p:spPr>
           <a:xfrm>
-            <a:off x="731520" y="3831336"/>
-            <a:ext cx="10728655" cy="1078992"/>
+            <a:off x="731520" y="3803904"/>
+            <a:ext cx="10728655" cy="1051560"/>
           </a:xfrm>
           <a:prstGeom prst="roundRect">
             <a:avLst/>
@@ -10060,8 +9803,8 @@
         </p:nvSpPr>
         <p:spPr>
           <a:xfrm>
-            <a:off x="960120" y="3995928"/>
-            <a:ext cx="777240" cy="749808"/>
+            <a:off x="960120" y="3950208"/>
+            <a:ext cx="777240" cy="731520"/>
           </a:xfrm>
           <a:prstGeom prst="roundRect">
             <a:avLst/>
@@ -10092,7 +9835,7 @@
           <a:lstStyle/>
           <a:p>
             <a:pPr algn="ctr">
-              <a:defRPr sz="1500" b="1">
+              <a:defRPr sz="1600" b="1">
                 <a:solidFill>
                   <a:srgbClr val="FFFFFF"/>
                 </a:solidFill>
@@ -10112,7 +9855,7 @@
         </p:nvSpPr>
         <p:spPr>
           <a:xfrm>
-            <a:off x="1920240" y="3941064"/>
+            <a:off x="1920240" y="3895344"/>
             <a:ext cx="9326880" cy="868680"/>
           </a:xfrm>
           <a:prstGeom prst="rect">
@@ -10130,26 +9873,26 @@
               <a:spcAft>
                 <a:spcPts val="300"/>
               </a:spcAft>
-              <a:defRPr sz="1150" b="1">
+              <a:defRPr sz="1300" b="1">
                 <a:solidFill>
                   <a:srgbClr val="0F172A"/>
                 </a:solidFill>
               </a:defRPr>
             </a:pPr>
             <a:r>
-              <a:t>Leakage Elimination &amp; MLlib Pipeline</a:t>
-            </a:r>
-          </a:p>
-          <a:p>
-            <a:pPr>
-              <a:defRPr sz="900">
+              <a:t>Target Leakage Prevention &amp; Pipeline Engineering</a:t>
+            </a:r>
+          </a:p>
+          <a:p>
+            <a:pPr>
+              <a:defRPr sz="1100">
                 <a:solidFill>
                   <a:srgbClr val="64748B"/>
                 </a:solidFill>
               </a:defRPr>
             </a:pPr>
             <a:r>
-              <a:t>Proactively strip non-predictive identifiers (person_id) and retrospective next-day outcomes (felt_rested, cognitive_score) to prevent target leakage. Construct an integrated StringIndexer + OneHotEncoder + VectorAssembler pipeline.</a:t>
+              <a:t>Proactively strip non-predictive IDs and retrospective next-day recovery metrics (felt_rested, cognitive_score) to preserve prospective triage integrity, constructing an integrated MLlib transformation pipeline.</a:t>
             </a:r>
           </a:p>
         </p:txBody>
@@ -10162,8 +9905,8 @@
         </p:nvSpPr>
         <p:spPr>
           <a:xfrm>
-            <a:off x="731520" y="5038344"/>
-            <a:ext cx="10728655" cy="1078992"/>
+            <a:off x="731520" y="4974336"/>
+            <a:ext cx="10728655" cy="1051560"/>
           </a:xfrm>
           <a:prstGeom prst="roundRect">
             <a:avLst/>
@@ -10207,8 +9950,8 @@
         </p:nvSpPr>
         <p:spPr>
           <a:xfrm>
-            <a:off x="960120" y="5202936"/>
-            <a:ext cx="777240" cy="749808"/>
+            <a:off x="960120" y="5120640"/>
+            <a:ext cx="777240" cy="731520"/>
           </a:xfrm>
           <a:prstGeom prst="roundRect">
             <a:avLst/>
@@ -10239,7 +9982,7 @@
           <a:lstStyle/>
           <a:p>
             <a:pPr algn="ctr">
-              <a:defRPr sz="1500" b="1">
+              <a:defRPr sz="1600" b="1">
                 <a:solidFill>
                   <a:srgbClr val="FFFFFF"/>
                 </a:solidFill>
@@ -10259,7 +10002,7 @@
         </p:nvSpPr>
         <p:spPr>
           <a:xfrm>
-            <a:off x="1920240" y="5148072"/>
+            <a:off x="1920240" y="5065776"/>
             <a:ext cx="9326880" cy="868680"/>
           </a:xfrm>
           <a:prstGeom prst="rect">
@@ -10277,26 +10020,26 @@
               <a:spcAft>
                 <a:spcPts val="300"/>
               </a:spcAft>
-              <a:defRPr sz="1150" b="1">
+              <a:defRPr sz="1300" b="1">
                 <a:solidFill>
                   <a:srgbClr val="0F172A"/>
                 </a:solidFill>
               </a:defRPr>
             </a:pPr>
             <a:r>
-              <a:t>Ensemble Training, Caching &amp; Evaluation</a:t>
-            </a:r>
-          </a:p>
-          <a:p>
-            <a:pPr>
-              <a:defRPr sz="900">
+              <a:t>Ensemble Training, In-Memory Caching &amp; Evaluation</a:t>
+            </a:r>
+          </a:p>
+          <a:p>
+            <a:pPr>
+              <a:defRPr sz="1100">
                 <a:solidFill>
                   <a:srgbClr val="64748B"/>
                 </a:solidFill>
               </a:defRPr>
             </a:pPr>
             <a:r>
-              <a:t>Train a distributed RandomForestClassifier (50 trees, maxDepth 8) on an 80% split (80,000 records). Cache test prediction DataFrames in executor RAM to prevent re-computation and measure multiclass Accuracy, F1, Precision, and Recall.</a:t>
+              <a:t>Train a distributed RandomForestClassifier (50 trees, maxDepth 8) on 80,000 records, cache inference DataFrames in executor RAM (.cache()), and compute multiclass Accuracy, F1, Precision, and Recall.</a:t>
             </a:r>
           </a:p>
         </p:txBody>
@@ -10371,7 +10114,7 @@
         <p:spPr>
           <a:xfrm>
             <a:off x="731520" y="365760"/>
-            <a:ext cx="7772400" cy="256032"/>
+            <a:ext cx="7772400" cy="274320"/>
           </a:xfrm>
           <a:prstGeom prst="rect">
             <a:avLst/>
@@ -10385,7 +10128,7 @@
           <a:lstStyle/>
           <a:p>
             <a:pPr>
-              <a:defRPr sz="850" b="1">
+              <a:defRPr sz="1000" b="1">
                 <a:solidFill>
                   <a:srgbClr val="64748B"/>
                 </a:solidFill>
@@ -10405,7 +10148,7 @@
         </p:nvSpPr>
         <p:spPr>
           <a:xfrm>
-            <a:off x="731520" y="621792"/>
+            <a:off x="731520" y="658368"/>
             <a:ext cx="8412480" cy="594360"/>
           </a:xfrm>
           <a:prstGeom prst="rect">
@@ -10420,7 +10163,7 @@
           <a:lstStyle/>
           <a:p>
             <a:pPr>
-              <a:defRPr sz="2000" b="1">
+              <a:defRPr sz="2400" b="1">
                 <a:solidFill>
                   <a:srgbClr val="0F172A"/>
                 </a:solidFill>
@@ -10448,7 +10191,7 @@
         </p:blipFill>
         <p:spPr>
           <a:xfrm>
-            <a:off x="9784080" y="365760"/>
+            <a:off x="9784080" y="347472"/>
             <a:ext cx="1691640" cy="590698"/>
           </a:xfrm>
           <a:prstGeom prst="rect">
@@ -10464,7 +10207,7 @@
         </p:nvSpPr>
         <p:spPr>
           <a:xfrm>
-            <a:off x="731520" y="1261872"/>
+            <a:off x="731520" y="1298448"/>
             <a:ext cx="10728655" cy="10972"/>
           </a:xfrm>
           <a:prstGeom prst="rect">
@@ -10507,7 +10250,7 @@
         </p:nvSpPr>
         <p:spPr>
           <a:xfrm>
-            <a:off x="731520" y="6446520"/>
+            <a:off x="731520" y="6382512"/>
             <a:ext cx="10728655" cy="10972"/>
           </a:xfrm>
           <a:prstGeom prst="rect">
@@ -10550,8 +10293,8 @@
         </p:nvSpPr>
         <p:spPr>
           <a:xfrm>
-            <a:off x="731520" y="6473952"/>
-            <a:ext cx="8412480" cy="274320"/>
+            <a:off x="731520" y="6419088"/>
+            <a:ext cx="8412480" cy="320040"/>
           </a:xfrm>
           <a:prstGeom prst="rect">
             <a:avLst/>
@@ -10565,7 +10308,7 @@
           <a:lstStyle/>
           <a:p>
             <a:pPr>
-              <a:defRPr sz="850">
+              <a:defRPr sz="950">
                 <a:solidFill>
                   <a:srgbClr val="64748B"/>
                 </a:solidFill>
@@ -10585,8 +10328,8 @@
         </p:nvSpPr>
         <p:spPr>
           <a:xfrm>
-            <a:off x="9875520" y="6473952"/>
-            <a:ext cx="1584655" cy="274320"/>
+            <a:off x="9875520" y="6419088"/>
+            <a:ext cx="1584655" cy="320040"/>
           </a:xfrm>
           <a:prstGeom prst="rect">
             <a:avLst/>
@@ -10600,7 +10343,7 @@
           <a:lstStyle/>
           <a:p>
             <a:pPr algn="r">
-              <a:defRPr sz="850" b="1">
+              <a:defRPr sz="1000" b="1">
                 <a:solidFill>
                   <a:srgbClr val="0F172A"/>
                 </a:solidFill>
@@ -10620,8 +10363,8 @@
         </p:nvSpPr>
         <p:spPr>
           <a:xfrm>
-            <a:off x="731520" y="1417320"/>
-            <a:ext cx="2542032" cy="731520"/>
+            <a:off x="731520" y="1444752"/>
+            <a:ext cx="2542032" cy="868680"/>
           </a:xfrm>
           <a:prstGeom prst="roundRect">
             <a:avLst/>
@@ -10665,8 +10408,8 @@
         </p:nvSpPr>
         <p:spPr>
           <a:xfrm>
-            <a:off x="868680" y="1463040"/>
-            <a:ext cx="2286000" cy="640080"/>
+            <a:off x="868680" y="1508760"/>
+            <a:ext cx="2286000" cy="731520"/>
           </a:xfrm>
           <a:prstGeom prst="rect">
             <a:avLst/>
@@ -10680,7 +10423,7 @@
           <a:lstStyle/>
           <a:p>
             <a:pPr>
-              <a:defRPr sz="1600" b="1">
+              <a:defRPr sz="2000" b="1">
                 <a:solidFill>
                   <a:srgbClr val="0F172A"/>
                 </a:solidFill>
@@ -10692,7 +10435,7 @@
           </a:p>
           <a:p>
             <a:pPr>
-              <a:defRPr sz="850">
+              <a:defRPr sz="1000">
                 <a:solidFill>
                   <a:srgbClr val="64748B"/>
                 </a:solidFill>
@@ -10712,8 +10455,8 @@
         </p:nvSpPr>
         <p:spPr>
           <a:xfrm>
-            <a:off x="3456432" y="1417320"/>
-            <a:ext cx="2542032" cy="731520"/>
+            <a:off x="3456432" y="1444752"/>
+            <a:ext cx="2542032" cy="868680"/>
           </a:xfrm>
           <a:prstGeom prst="roundRect">
             <a:avLst/>
@@ -10757,8 +10500,8 @@
         </p:nvSpPr>
         <p:spPr>
           <a:xfrm>
-            <a:off x="3593592" y="1463040"/>
-            <a:ext cx="2286000" cy="640080"/>
+            <a:off x="3593592" y="1508760"/>
+            <a:ext cx="2286000" cy="731520"/>
           </a:xfrm>
           <a:prstGeom prst="rect">
             <a:avLst/>
@@ -10772,7 +10515,7 @@
           <a:lstStyle/>
           <a:p>
             <a:pPr>
-              <a:defRPr sz="1600" b="1">
+              <a:defRPr sz="2000" b="1">
                 <a:solidFill>
                   <a:srgbClr val="0F172A"/>
                 </a:solidFill>
@@ -10784,7 +10527,7 @@
           </a:p>
           <a:p>
             <a:pPr>
-              <a:defRPr sz="850">
+              <a:defRPr sz="1000">
                 <a:solidFill>
                   <a:srgbClr val="64748B"/>
                 </a:solidFill>
@@ -10804,8 +10547,8 @@
         </p:nvSpPr>
         <p:spPr>
           <a:xfrm>
-            <a:off x="6181344" y="1417320"/>
-            <a:ext cx="2542032" cy="731520"/>
+            <a:off x="6181344" y="1444752"/>
+            <a:ext cx="2542032" cy="868680"/>
           </a:xfrm>
           <a:prstGeom prst="roundRect">
             <a:avLst/>
@@ -10849,8 +10592,8 @@
         </p:nvSpPr>
         <p:spPr>
           <a:xfrm>
-            <a:off x="6318504" y="1463040"/>
-            <a:ext cx="2286000" cy="640080"/>
+            <a:off x="6318504" y="1508760"/>
+            <a:ext cx="2286000" cy="731520"/>
           </a:xfrm>
           <a:prstGeom prst="rect">
             <a:avLst/>
@@ -10864,7 +10607,7 @@
           <a:lstStyle/>
           <a:p>
             <a:pPr>
-              <a:defRPr sz="1600" b="1">
+              <a:defRPr sz="2000" b="1">
                 <a:solidFill>
                   <a:srgbClr val="0F172A"/>
                 </a:solidFill>
@@ -10876,14 +10619,14 @@
           </a:p>
           <a:p>
             <a:pPr>
-              <a:defRPr sz="850">
+              <a:defRPr sz="1000">
                 <a:solidFill>
                   <a:srgbClr val="64748B"/>
                 </a:solidFill>
               </a:defRPr>
             </a:pPr>
             <a:r>
-              <a:t>Uncompressed CSV Size</a:t>
+              <a:t>Uncompressed Data Volume</a:t>
             </a:r>
           </a:p>
         </p:txBody>
@@ -10896,8 +10639,8 @@
         </p:nvSpPr>
         <p:spPr>
           <a:xfrm>
-            <a:off x="8906256" y="1417320"/>
-            <a:ext cx="2542032" cy="731520"/>
+            <a:off x="8906256" y="1444752"/>
+            <a:ext cx="2542032" cy="868680"/>
           </a:xfrm>
           <a:prstGeom prst="roundRect">
             <a:avLst/>
@@ -10941,8 +10684,8 @@
         </p:nvSpPr>
         <p:spPr>
           <a:xfrm>
-            <a:off x="9043416" y="1463040"/>
-            <a:ext cx="2286000" cy="640080"/>
+            <a:off x="9043416" y="1508760"/>
+            <a:ext cx="2286000" cy="731520"/>
           </a:xfrm>
           <a:prstGeom prst="rect">
             <a:avLst/>
@@ -10956,7 +10699,7 @@
           <a:lstStyle/>
           <a:p>
             <a:pPr>
-              <a:defRPr sz="1600" b="1">
+              <a:defRPr sz="2000" b="1">
                 <a:solidFill>
                   <a:srgbClr val="0F172A"/>
                 </a:solidFill>
@@ -10968,7 +10711,7 @@
           </a:p>
           <a:p>
             <a:pPr>
-              <a:defRPr sz="850">
+              <a:defRPr sz="1000">
                 <a:solidFill>
                   <a:srgbClr val="64748B"/>
                 </a:solidFill>
@@ -10988,8 +10731,8 @@
         </p:nvSpPr>
         <p:spPr>
           <a:xfrm>
-            <a:off x="731520" y="2286000"/>
-            <a:ext cx="6217920" cy="3977639"/>
+            <a:off x="731520" y="2468880"/>
+            <a:ext cx="6217920" cy="3794760"/>
           </a:xfrm>
           <a:prstGeom prst="roundRect">
             <a:avLst/>
@@ -11033,8 +10776,8 @@
         </p:nvSpPr>
         <p:spPr>
           <a:xfrm>
-            <a:off x="914400" y="2423160"/>
-            <a:ext cx="5852160" cy="3657600"/>
+            <a:off x="960120" y="2578608"/>
+            <a:ext cx="5760720" cy="3566160"/>
           </a:xfrm>
           <a:prstGeom prst="rect">
             <a:avLst/>
@@ -11051,24 +10794,24 @@
               <a:spcAft>
                 <a:spcPts val="1000"/>
               </a:spcAft>
-              <a:defRPr sz="1100" b="1">
+              <a:defRPr sz="1300" b="1">
                 <a:solidFill>
                   <a:srgbClr val="0F172A"/>
                 </a:solidFill>
               </a:defRPr>
             </a:pPr>
             <a:r>
-              <a:t>FEATURE DOMAINS &amp; CLINICAL ATTRIBUTES</a:t>
+              <a:t>FEATURE DOMAIN BREAKDOWN</a:t>
             </a:r>
           </a:p>
           <a:p>
             <a:pPr>
               <a:spcAft>
-                <a:spcPts val="400"/>
+                <a:spcPts val="500"/>
               </a:spcAft>
             </a:pPr>
             <a:r>
-              <a:rPr b="1" sz="950">
+              <a:rPr b="1" sz="1100">
                 <a:solidFill>
                   <a:srgbClr val="0F172A"/>
                 </a:solidFill>
@@ -11076,22 +10819,22 @@
               <a:t>•  Demographics (5): </a:t>
             </a:r>
             <a:r>
-              <a:rPr sz="850">
+              <a:rPr sz="1050">
                 <a:solidFill>
                   <a:srgbClr val="64748B"/>
                 </a:solidFill>
               </a:rPr>
-              <a:t>person_id, age (18-65), gender, country, occupation (12 distinct categories: Nurses, Doctors, Engineers, Lawyers, etc.)</a:t>
+              <a:t>Age (18-65), Gender, Country, 12 Occupations (Nurses, Engineers, Doctors, etc.)</a:t>
             </a:r>
           </a:p>
           <a:p>
             <a:pPr>
               <a:spcAft>
-                <a:spcPts val="400"/>
+                <a:spcPts val="500"/>
               </a:spcAft>
             </a:pPr>
             <a:r>
-              <a:rPr b="1" sz="950">
+              <a:rPr b="1" sz="1100">
                 <a:solidFill>
                   <a:srgbClr val="0F172A"/>
                 </a:solidFill>
@@ -11099,68 +10842,68 @@
               <a:t>•  Sleep Architecture (6): </a:t>
             </a:r>
             <a:r>
-              <a:rPr sz="850">
+              <a:rPr sz="1050">
                 <a:solidFill>
                   <a:srgbClr val="64748B"/>
                 </a:solidFill>
               </a:rPr>
-              <a:t>sleep_duration_hrs, sleep_quality_score (1-10), rem_percentage, deep_sleep_percentage, sleep_latency_mins, wake_episodes_per_night</a:t>
+              <a:t>Duration (hrs), Quality (1-10), REM%, Deep Sleep%, Latency (mins), Nightly Awakenings</a:t>
             </a:r>
           </a:p>
           <a:p>
             <a:pPr>
               <a:spcAft>
-                <a:spcPts val="400"/>
+                <a:spcPts val="500"/>
               </a:spcAft>
             </a:pPr>
             <a:r>
-              <a:rPr b="1" sz="950">
+              <a:rPr b="1" sz="1100">
                 <a:solidFill>
                   <a:srgbClr val="0F172A"/>
                 </a:solidFill>
               </a:rPr>
-              <a:t>•  Autonomic &amp; Vitals (5): </a:t>
-            </a:r>
-            <a:r>
-              <a:rPr sz="850">
+              <a:t>•  Cardiovascular &amp; Vitals (5): </a:t>
+            </a:r>
+            <a:r>
+              <a:rPr sz="1050">
                 <a:solidFill>
                   <a:srgbClr val="64748B"/>
                 </a:solidFill>
               </a:rPr>
-              <a:t>stress_score (1-10), heart_rate_resting_bpm, systolic_bp, diastolic_bp, room_temperature_celsius</a:t>
+              <a:t>Stress Score (1-10), Resting Heart Rate (bpm), Systolic &amp; Diastolic Blood Pressure</a:t>
             </a:r>
           </a:p>
           <a:p>
             <a:pPr>
               <a:spcAft>
-                <a:spcPts val="400"/>
+                <a:spcPts val="500"/>
               </a:spcAft>
             </a:pPr>
             <a:r>
-              <a:rPr b="1" sz="950">
+              <a:rPr b="1" sz="1100">
                 <a:solidFill>
                   <a:srgbClr val="0F172A"/>
                 </a:solidFill>
               </a:rPr>
-              <a:t>•  Lifestyle &amp; Habits (8): </a:t>
-            </a:r>
-            <a:r>
-              <a:rPr sz="850">
+              <a:t>•  Lifestyle &amp; Environmental (8): </a:t>
+            </a:r>
+            <a:r>
+              <a:rPr sz="1050">
                 <a:solidFill>
                   <a:srgbClr val="64748B"/>
                 </a:solidFill>
               </a:rPr>
-              <a:t>caffeine_mg_before_bed, alcohol_units, screen_time_mins, exercise_day, steps_that_day, nap_duration_mins, work_hours, shift_work</a:t>
+              <a:t>Evening Caffeine, Alcohol, Pre-bed Screen Time, Daily Steps, Exercise, Shift Work</a:t>
             </a:r>
           </a:p>
           <a:p>
             <a:pPr>
               <a:spcAft>
-                <a:spcPts val="400"/>
+                <a:spcPts val="500"/>
               </a:spcAft>
             </a:pPr>
             <a:r>
-              <a:rPr b="1" sz="950">
+              <a:rPr b="1" sz="1100">
                 <a:solidFill>
                   <a:srgbClr val="0F172A"/>
                 </a:solidFill>
@@ -11168,35 +10911,35 @@
               <a:t>•  Circadian Dynamics (4): </a:t>
             </a:r>
             <a:r>
-              <a:rPr sz="850">
+              <a:rPr sz="1050">
                 <a:solidFill>
                   <a:srgbClr val="64748B"/>
                 </a:solidFill>
               </a:rPr>
-              <a:t>chronotype (Morning/Evening), season, day_type (Weekday/Weekend), weekend_sleep_diff_hrs (social jetlag)</a:t>
+              <a:t>Chronotype (Morning/Evening), Season, Weekday vs Weekend, Sleep Diff (Social Jetlag)</a:t>
             </a:r>
           </a:p>
           <a:p>
             <a:pPr>
               <a:spcAft>
-                <a:spcPts val="400"/>
+                <a:spcPts val="500"/>
               </a:spcAft>
             </a:pPr>
             <a:r>
-              <a:rPr b="1" sz="950">
+              <a:rPr b="1" sz="1100">
                 <a:solidFill>
                   <a:srgbClr val="0F172A"/>
                 </a:solidFill>
               </a:rPr>
-              <a:t>•  Excluded Leakage (3): </a:t>
-            </a:r>
-            <a:r>
-              <a:rPr sz="850">
+              <a:t>•  Excluded Leakage Columns (3): </a:t>
+            </a:r>
+            <a:r>
+              <a:rPr sz="1050">
                 <a:solidFill>
                   <a:srgbClr val="64748B"/>
                 </a:solidFill>
               </a:rPr>
-              <a:t>person_id (non-predictive ID), felt_rested, cognitive_performance_score (retrospective recovery indicators dropped to preserve prospective validity)</a:t>
+              <a:t>person_id (arbitrary ID), felt_rested, cognitive_score (retrospective morning outcomes)</a:t>
             </a:r>
           </a:p>
         </p:txBody>
@@ -11209,8 +10952,8 @@
         </p:nvSpPr>
         <p:spPr>
           <a:xfrm>
-            <a:off x="7132320" y="2286000"/>
-            <a:ext cx="4327855" cy="3977639"/>
+            <a:off x="7132320" y="2468880"/>
+            <a:ext cx="4327855" cy="3794760"/>
           </a:xfrm>
           <a:prstGeom prst="roundRect">
             <a:avLst/>
@@ -11254,8 +10997,8 @@
         </p:nvSpPr>
         <p:spPr>
           <a:xfrm>
-            <a:off x="7315200" y="2423160"/>
-            <a:ext cx="3962095" cy="3657600"/>
+            <a:off x="7360920" y="2578608"/>
+            <a:ext cx="3886200" cy="3566160"/>
           </a:xfrm>
           <a:prstGeom prst="rect">
             <a:avLst/>
@@ -11272,7 +11015,7 @@
               <a:spcAft>
                 <a:spcPts val="1000"/>
               </a:spcAft>
-              <a:defRPr sz="1100" b="1">
+              <a:defRPr sz="1300" b="1">
                 <a:solidFill>
                   <a:srgbClr val="0F172A"/>
                 </a:solidFill>
@@ -11280,21 +11023,6 @@
             </a:pPr>
             <a:r>
               <a:t>TARGET DISTRIBUTION: sleep_disorder_risk</a:t>
-            </a:r>
-          </a:p>
-          <a:p>
-            <a:pPr>
-              <a:spcAft>
-                <a:spcPts val="1000"/>
-              </a:spcAft>
-              <a:defRPr sz="900">
-                <a:solidFill>
-                  <a:srgbClr val="64748B"/>
-                </a:solidFill>
-              </a:defRPr>
-            </a:pPr>
-            <a:r>
-              <a:t>4-tier clinical risk stratification across 100,000 patients:</a:t>
             </a:r>
           </a:p>
           <a:p>
@@ -11304,15 +11032,15 @@
               </a:spcAft>
             </a:pPr>
             <a:r>
-              <a:rPr b="1" sz="1050">
+              <a:rPr b="1" sz="1200">
                 <a:solidFill>
                   <a:srgbClr val="0F172A"/>
                 </a:solidFill>
               </a:rPr>
-              <a:t>Healthy     </a:t>
-            </a:r>
-            <a:r>
-              <a:rPr b="1" sz="1050">
+              <a:t>Healthy          </a:t>
+            </a:r>
+            <a:r>
+              <a:rPr b="1" sz="1200">
                 <a:solidFill>
                   <a:srgbClr val="0F172A"/>
                 </a:solidFill>
@@ -11320,12 +11048,12 @@
               <a:t>(54.16%)  </a:t>
             </a:r>
             <a:r>
-              <a:rPr sz="900">
+              <a:rPr sz="1050">
                 <a:solidFill>
                   <a:srgbClr val="64748B"/>
                 </a:solidFill>
               </a:rPr>
-              <a:t>54,156 records</a:t>
+              <a:t>54,156 patients</a:t>
             </a:r>
           </a:p>
           <a:p>
@@ -11335,15 +11063,15 @@
               </a:spcAft>
             </a:pPr>
             <a:r>
-              <a:rPr b="1" sz="1050">
+              <a:rPr b="1" sz="1200">
                 <a:solidFill>
                   <a:srgbClr val="0F172A"/>
                 </a:solidFill>
               </a:rPr>
-              <a:t>Mild        </a:t>
-            </a:r>
-            <a:r>
-              <a:rPr b="1" sz="1050">
+              <a:t>Mild Risk        </a:t>
+            </a:r>
+            <a:r>
+              <a:rPr b="1" sz="1200">
                 <a:solidFill>
                   <a:srgbClr val="0F172A"/>
                 </a:solidFill>
@@ -11351,12 +11079,12 @@
               <a:t>(33.48%)  </a:t>
             </a:r>
             <a:r>
-              <a:rPr sz="900">
+              <a:rPr sz="1050">
                 <a:solidFill>
                   <a:srgbClr val="64748B"/>
                 </a:solidFill>
               </a:rPr>
-              <a:t>33,479 records</a:t>
+              <a:t>33,479 patients</a:t>
             </a:r>
           </a:p>
           <a:p>
@@ -11366,15 +11094,15 @@
               </a:spcAft>
             </a:pPr>
             <a:r>
-              <a:rPr b="1" sz="1050">
+              <a:rPr b="1" sz="1200">
                 <a:solidFill>
                   <a:srgbClr val="0F172A"/>
                 </a:solidFill>
               </a:rPr>
-              <a:t>Moderate    </a:t>
-            </a:r>
-            <a:r>
-              <a:rPr b="1" sz="1050">
+              <a:t>Moderate Risk    </a:t>
+            </a:r>
+            <a:r>
+              <a:rPr b="1" sz="1200">
                 <a:solidFill>
                   <a:srgbClr val="0F172A"/>
                 </a:solidFill>
@@ -11382,12 +11110,12 @@
               <a:t>(8.30%)  </a:t>
             </a:r>
             <a:r>
-              <a:rPr sz="900">
+              <a:rPr sz="1050">
                 <a:solidFill>
                   <a:srgbClr val="64748B"/>
                 </a:solidFill>
               </a:rPr>
-              <a:t>8,299 records</a:t>
+              <a:t>8,299 patients</a:t>
             </a:r>
           </a:p>
           <a:p>
@@ -11397,15 +11125,15 @@
               </a:spcAft>
             </a:pPr>
             <a:r>
-              <a:rPr b="1" sz="1050">
+              <a:rPr b="1" sz="1200">
                 <a:solidFill>
                   <a:srgbClr val="0F172A"/>
                 </a:solidFill>
               </a:rPr>
-              <a:t>Severe      </a:t>
-            </a:r>
-            <a:r>
-              <a:rPr b="1" sz="1050">
+              <a:t>Severe Risk      </a:t>
+            </a:r>
+            <a:r>
+              <a:rPr b="1" sz="1200">
                 <a:solidFill>
                   <a:srgbClr val="0F172A"/>
                 </a:solidFill>
@@ -11413,12 +11141,12 @@
               <a:t>(4.07%)  </a:t>
             </a:r>
             <a:r>
-              <a:rPr sz="900">
+              <a:rPr sz="1050">
                 <a:solidFill>
                   <a:srgbClr val="64748B"/>
                 </a:solidFill>
               </a:rPr>
-              <a:t>4,066 records</a:t>
+              <a:t>4,066 patients</a:t>
             </a:r>
           </a:p>
           <a:p>
@@ -11428,21 +11156,21 @@
               </a:spcBef>
             </a:pPr>
             <a:r>
-              <a:rPr b="1" sz="950">
+              <a:rPr b="1" sz="1100">
                 <a:solidFill>
                   <a:srgbClr val="0F172A"/>
                 </a:solidFill>
               </a:rPr>
-              <a:t>CRITICAL IMBALANCE NOTE:
+              <a:t>CRITICAL IMBALANCE OBSERVATION:
 </a:t>
             </a:r>
             <a:r>
-              <a:rPr sz="850">
+              <a:rPr sz="1000">
                 <a:solidFill>
                   <a:srgbClr val="64748B"/>
                 </a:solidFill>
               </a:rPr>
-              <a:t>Healthy + Mild account for 87.64% of the cohort. A naive classifier predicting Healthy every time yields 54.16% accuracy. Our distributed model must demonstrate true multiclass discriminative power.</a:t>
+              <a:t>Healthy + Mild account for 87.64% of the cohort. A naive baseline guessing 'Healthy' reaches 54.16% accuracy with zero diagnostic utility. Our distributed model must prove true multi-class discriminative precision.</a:t>
             </a:r>
           </a:p>
         </p:txBody>
@@ -11517,7 +11245,7 @@
         <p:spPr>
           <a:xfrm>
             <a:off x="731520" y="365760"/>
-            <a:ext cx="7772400" cy="256032"/>
+            <a:ext cx="7772400" cy="274320"/>
           </a:xfrm>
           <a:prstGeom prst="rect">
             <a:avLst/>
@@ -11531,7 +11259,7 @@
           <a:lstStyle/>
           <a:p>
             <a:pPr>
-              <a:defRPr sz="850" b="1">
+              <a:defRPr sz="1000" b="1">
                 <a:solidFill>
                   <a:srgbClr val="64748B"/>
                 </a:solidFill>
@@ -11551,7 +11279,7 @@
         </p:nvSpPr>
         <p:spPr>
           <a:xfrm>
-            <a:off x="731520" y="621792"/>
+            <a:off x="731520" y="658368"/>
             <a:ext cx="8412480" cy="594360"/>
           </a:xfrm>
           <a:prstGeom prst="rect">
@@ -11566,7 +11294,7 @@
           <a:lstStyle/>
           <a:p>
             <a:pPr>
-              <a:defRPr sz="2000" b="1">
+              <a:defRPr sz="2400" b="1">
                 <a:solidFill>
                   <a:srgbClr val="0F172A"/>
                 </a:solidFill>
@@ -11594,7 +11322,7 @@
         </p:blipFill>
         <p:spPr>
           <a:xfrm>
-            <a:off x="9784080" y="365760"/>
+            <a:off x="9784080" y="347472"/>
             <a:ext cx="1691640" cy="590698"/>
           </a:xfrm>
           <a:prstGeom prst="rect">
@@ -11610,7 +11338,7 @@
         </p:nvSpPr>
         <p:spPr>
           <a:xfrm>
-            <a:off x="731520" y="1261872"/>
+            <a:off x="731520" y="1298448"/>
             <a:ext cx="10728655" cy="10972"/>
           </a:xfrm>
           <a:prstGeom prst="rect">
@@ -11653,7 +11381,7 @@
         </p:nvSpPr>
         <p:spPr>
           <a:xfrm>
-            <a:off x="731520" y="6446520"/>
+            <a:off x="731520" y="6382512"/>
             <a:ext cx="10728655" cy="10972"/>
           </a:xfrm>
           <a:prstGeom prst="rect">
@@ -11696,8 +11424,8 @@
         </p:nvSpPr>
         <p:spPr>
           <a:xfrm>
-            <a:off x="731520" y="6473952"/>
-            <a:ext cx="8412480" cy="274320"/>
+            <a:off x="731520" y="6419088"/>
+            <a:ext cx="8412480" cy="320040"/>
           </a:xfrm>
           <a:prstGeom prst="rect">
             <a:avLst/>
@@ -11711,7 +11439,7 @@
           <a:lstStyle/>
           <a:p>
             <a:pPr>
-              <a:defRPr sz="850">
+              <a:defRPr sz="950">
                 <a:solidFill>
                   <a:srgbClr val="64748B"/>
                 </a:solidFill>
@@ -11731,8 +11459,8 @@
         </p:nvSpPr>
         <p:spPr>
           <a:xfrm>
-            <a:off x="9875520" y="6473952"/>
-            <a:ext cx="1584655" cy="274320"/>
+            <a:off x="9875520" y="6419088"/>
+            <a:ext cx="1584655" cy="320040"/>
           </a:xfrm>
           <a:prstGeom prst="rect">
             <a:avLst/>
@@ -11746,7 +11474,7 @@
           <a:lstStyle/>
           <a:p>
             <a:pPr algn="r">
-              <a:defRPr sz="850" b="1">
+              <a:defRPr sz="1000" b="1">
                 <a:solidFill>
                   <a:srgbClr val="0F172A"/>
                 </a:solidFill>
@@ -11766,8 +11494,8 @@
         </p:nvSpPr>
         <p:spPr>
           <a:xfrm>
-            <a:off x="731520" y="1417320"/>
-            <a:ext cx="2029968" cy="3108960"/>
+            <a:off x="731520" y="1463040"/>
+            <a:ext cx="2029968" cy="3017520"/>
           </a:xfrm>
           <a:prstGeom prst="roundRect">
             <a:avLst/>
@@ -11811,7 +11539,7 @@
         </p:nvSpPr>
         <p:spPr>
           <a:xfrm>
-            <a:off x="896112" y="1572768"/>
+            <a:off x="896112" y="1600200"/>
             <a:ext cx="1700784" cy="292608"/>
           </a:xfrm>
           <a:prstGeom prst="roundRect">
@@ -11843,7 +11571,7 @@
           <a:lstStyle/>
           <a:p>
             <a:pPr algn="ctr">
-              <a:defRPr sz="850" b="1">
+              <a:defRPr sz="900" b="1">
                 <a:solidFill>
                   <a:srgbClr val="FFFFFF"/>
                 </a:solidFill>
@@ -11864,7 +11592,7 @@
         <p:spPr>
           <a:xfrm>
             <a:off x="841248" y="1965960"/>
-            <a:ext cx="1810512" cy="2423160"/>
+            <a:ext cx="1810512" cy="2377440"/>
           </a:xfrm>
           <a:prstGeom prst="rect">
             <a:avLst/>
@@ -11881,7 +11609,7 @@
               <a:spcAft>
                 <a:spcPts val="600"/>
               </a:spcAft>
-              <a:defRPr sz="1050" b="1">
+              <a:defRPr sz="1150" b="1">
                 <a:solidFill>
                   <a:srgbClr val="0F172A"/>
                 </a:solidFill>
@@ -11893,7 +11621,7 @@
           </a:p>
           <a:p>
             <a:pPr>
-              <a:defRPr sz="850">
+              <a:defRPr sz="950">
                 <a:solidFill>
                   <a:srgbClr val="64748B"/>
                 </a:solidFill>
@@ -11916,11 +11644,7 @@
             </a:r>
             <a:br/>
             <a:r>
-              <a:t>• Suppress JVM ERROR logs</a:t>
-            </a:r>
-            <a:br/>
-            <a:r>
-              <a:t>• Driver memory allocation</a:t>
+              <a:t>• local[*] core allocation</a:t>
             </a:r>
           </a:p>
         </p:txBody>
@@ -11933,8 +11657,8 @@
         </p:nvSpPr>
         <p:spPr>
           <a:xfrm>
-            <a:off x="2916936" y="1417320"/>
-            <a:ext cx="2029968" cy="3108960"/>
+            <a:off x="2916936" y="1463040"/>
+            <a:ext cx="2029968" cy="3017520"/>
           </a:xfrm>
           <a:prstGeom prst="roundRect">
             <a:avLst/>
@@ -11978,7 +11702,7 @@
         </p:nvSpPr>
         <p:spPr>
           <a:xfrm>
-            <a:off x="3081528" y="1572768"/>
+            <a:off x="3081528" y="1600200"/>
             <a:ext cx="1700784" cy="292608"/>
           </a:xfrm>
           <a:prstGeom prst="roundRect">
@@ -12010,7 +11734,7 @@
           <a:lstStyle/>
           <a:p>
             <a:pPr algn="ctr">
-              <a:defRPr sz="850" b="1">
+              <a:defRPr sz="900" b="1">
                 <a:solidFill>
                   <a:srgbClr val="FFFFFF"/>
                 </a:solidFill>
@@ -12031,7 +11755,7 @@
         <p:spPr>
           <a:xfrm>
             <a:off x="3026664" y="1965960"/>
-            <a:ext cx="1810512" cy="2423160"/>
+            <a:ext cx="1810512" cy="2377440"/>
           </a:xfrm>
           <a:prstGeom prst="rect">
             <a:avLst/>
@@ -12048,7 +11772,7 @@
               <a:spcAft>
                 <a:spcPts val="600"/>
               </a:spcAft>
-              <a:defRPr sz="1050" b="1">
+              <a:defRPr sz="1150" b="1">
                 <a:solidFill>
                   <a:srgbClr val="0F172A"/>
                 </a:solidFill>
@@ -12060,7 +11784,7 @@
           </a:p>
           <a:p>
             <a:pPr>
-              <a:defRPr sz="850">
+              <a:defRPr sz="950">
                 <a:solidFill>
                   <a:srgbClr val="64748B"/>
                 </a:solidFill>
@@ -12075,15 +11799,11 @@
             </a:r>
             <a:br/>
             <a:r>
-              <a:t>• Simultaneous across 32 cols</a:t>
+              <a:t>• Evaluated across 32 cols</a:t>
             </a:r>
             <a:br/>
             <a:r>
-              <a:t>• Confirms 0 missing values</a:t>
-            </a:r>
-            <a:br/>
-            <a:r>
-              <a:t>• GroupBy class frequency</a:t>
+              <a:t>• Confirms 0 null values</a:t>
             </a:r>
             <a:br/>
             <a:r>
@@ -12100,8 +11820,8 @@
         </p:nvSpPr>
         <p:spPr>
           <a:xfrm>
-            <a:off x="5102352" y="1417320"/>
-            <a:ext cx="2029968" cy="3108960"/>
+            <a:off x="5102352" y="1463040"/>
+            <a:ext cx="2029968" cy="3017520"/>
           </a:xfrm>
           <a:prstGeom prst="roundRect">
             <a:avLst/>
@@ -12145,7 +11865,7 @@
         </p:nvSpPr>
         <p:spPr>
           <a:xfrm>
-            <a:off x="5266944" y="1572768"/>
+            <a:off x="5266944" y="1600200"/>
             <a:ext cx="1700784" cy="292608"/>
           </a:xfrm>
           <a:prstGeom prst="roundRect">
@@ -12177,7 +11897,7 @@
           <a:lstStyle/>
           <a:p>
             <a:pPr algn="ctr">
-              <a:defRPr sz="850" b="1">
+              <a:defRPr sz="900" b="1">
                 <a:solidFill>
                   <a:srgbClr val="FFFFFF"/>
                 </a:solidFill>
@@ -12198,7 +11918,7 @@
         <p:spPr>
           <a:xfrm>
             <a:off x="5212080" y="1965960"/>
-            <a:ext cx="1810512" cy="2423160"/>
+            <a:ext cx="1810512" cy="2377440"/>
           </a:xfrm>
           <a:prstGeom prst="rect">
             <a:avLst/>
@@ -12215,7 +11935,7 @@
               <a:spcAft>
                 <a:spcPts val="600"/>
               </a:spcAft>
-              <a:defRPr sz="1050" b="1">
+              <a:defRPr sz="1150" b="1">
                 <a:solidFill>
                   <a:srgbClr val="0F172A"/>
                 </a:solidFill>
@@ -12227,7 +11947,7 @@
           </a:p>
           <a:p>
             <a:pPr>
-              <a:defRPr sz="850">
+              <a:defRPr sz="950">
                 <a:solidFill>
                   <a:srgbClr val="64748B"/>
                 </a:solidFill>
@@ -12250,11 +11970,7 @@
             </a:r>
             <a:br/>
             <a:r>
-              <a:t>• 80% Train (80k rows)</a:t>
-            </a:r>
-            <a:br/>
-            <a:r>
-              <a:t>• 20% Test (20k rows, seed=42)</a:t>
+              <a:t>• 80/20 train/test split</a:t>
             </a:r>
           </a:p>
         </p:txBody>
@@ -12267,8 +11983,8 @@
         </p:nvSpPr>
         <p:spPr>
           <a:xfrm>
-            <a:off x="7287768" y="1417320"/>
-            <a:ext cx="2029968" cy="3108960"/>
+            <a:off x="7287768" y="1463040"/>
+            <a:ext cx="2029968" cy="3017520"/>
           </a:xfrm>
           <a:prstGeom prst="roundRect">
             <a:avLst/>
@@ -12312,7 +12028,7 @@
         </p:nvSpPr>
         <p:spPr>
           <a:xfrm>
-            <a:off x="7452360" y="1572768"/>
+            <a:off x="7452360" y="1600200"/>
             <a:ext cx="1700784" cy="292608"/>
           </a:xfrm>
           <a:prstGeom prst="roundRect">
@@ -12344,7 +12060,7 @@
           <a:lstStyle/>
           <a:p>
             <a:pPr algn="ctr">
-              <a:defRPr sz="850" b="1">
+              <a:defRPr sz="900" b="1">
                 <a:solidFill>
                   <a:srgbClr val="FFFFFF"/>
                 </a:solidFill>
@@ -12365,7 +12081,7 @@
         <p:spPr>
           <a:xfrm>
             <a:off x="7397496" y="1965960"/>
-            <a:ext cx="1810512" cy="2423160"/>
+            <a:ext cx="1810512" cy="2377440"/>
           </a:xfrm>
           <a:prstGeom prst="rect">
             <a:avLst/>
@@ -12382,7 +12098,7 @@
               <a:spcAft>
                 <a:spcPts val="600"/>
               </a:spcAft>
-              <a:defRPr sz="1050" b="1">
+              <a:defRPr sz="1150" b="1">
                 <a:solidFill>
                   <a:srgbClr val="0F172A"/>
                 </a:solidFill>
@@ -12394,7 +12110,7 @@
           </a:p>
           <a:p>
             <a:pPr>
-              <a:defRPr sz="850">
+              <a:defRPr sz="950">
                 <a:solidFill>
                   <a:srgbClr val="64748B"/>
                 </a:solidFill>
@@ -12413,15 +12129,11 @@
             </a:r>
             <a:br/>
             <a:r>
-              <a:t>• Target label StringIndexer</a:t>
+              <a:t>• RandomForest (50 trees, d=8)</a:t>
             </a:r>
             <a:br/>
             <a:r>
-              <a:t>• RandomForest (50 trees, d=8)</a:t>
-            </a:r>
-            <a:br/>
-            <a:r>
-              <a:t>• Atomic pipeline fitting</a:t>
+              <a:t>• Atomic pipeline execution</a:t>
             </a:r>
           </a:p>
         </p:txBody>
@@ -12434,8 +12146,8 @@
         </p:nvSpPr>
         <p:spPr>
           <a:xfrm>
-            <a:off x="9473184" y="1417320"/>
-            <a:ext cx="2029968" cy="3108960"/>
+            <a:off x="9473184" y="1463040"/>
+            <a:ext cx="2029968" cy="3017520"/>
           </a:xfrm>
           <a:prstGeom prst="roundRect">
             <a:avLst/>
@@ -12479,7 +12191,7 @@
         </p:nvSpPr>
         <p:spPr>
           <a:xfrm>
-            <a:off x="9637776" y="1572768"/>
+            <a:off x="9637776" y="1600200"/>
             <a:ext cx="1700784" cy="292608"/>
           </a:xfrm>
           <a:prstGeom prst="roundRect">
@@ -12511,7 +12223,7 @@
           <a:lstStyle/>
           <a:p>
             <a:pPr algn="ctr">
-              <a:defRPr sz="850" b="1">
+              <a:defRPr sz="900" b="1">
                 <a:solidFill>
                   <a:srgbClr val="FFFFFF"/>
                 </a:solidFill>
@@ -12532,7 +12244,7 @@
         <p:spPr>
           <a:xfrm>
             <a:off x="9582912" y="1965960"/>
-            <a:ext cx="1810512" cy="2423160"/>
+            <a:ext cx="1810512" cy="2377440"/>
           </a:xfrm>
           <a:prstGeom prst="rect">
             <a:avLst/>
@@ -12549,7 +12261,7 @@
               <a:spcAft>
                 <a:spcPts val="600"/>
               </a:spcAft>
-              <a:defRPr sz="1050" b="1">
+              <a:defRPr sz="1150" b="1">
                 <a:solidFill>
                   <a:srgbClr val="0F172A"/>
                 </a:solidFill>
@@ -12561,7 +12273,7 @@
           </a:p>
           <a:p>
             <a:pPr>
-              <a:defRPr sz="850">
+              <a:defRPr sz="950">
                 <a:solidFill>
                   <a:srgbClr val="64748B"/>
                 </a:solidFill>
@@ -12601,7 +12313,7 @@
         </p:nvSpPr>
         <p:spPr>
           <a:xfrm>
-            <a:off x="731520" y="4709160"/>
+            <a:off x="731520" y="4663440"/>
             <a:ext cx="10728655" cy="1554480"/>
           </a:xfrm>
           <a:prstGeom prst="roundRect">
@@ -12610,7 +12322,7 @@
           <a:solidFill>
             <a:srgbClr val="FFFFFF"/>
           </a:solidFill>
-          <a:ln w="15240">
+          <a:ln w="19050">
             <a:solidFill>
               <a:srgbClr val="0F172A"/>
             </a:solidFill>
@@ -12646,8 +12358,8 @@
         </p:nvSpPr>
         <p:spPr>
           <a:xfrm>
-            <a:off x="914400" y="4800600"/>
-            <a:ext cx="10362895" cy="1371600"/>
+            <a:off x="960120" y="4754880"/>
+            <a:ext cx="10241280" cy="1371600"/>
           </a:xfrm>
           <a:prstGeom prst="rect">
             <a:avLst/>
@@ -12664,14 +12376,14 @@
               <a:spcAft>
                 <a:spcPts val="600"/>
               </a:spcAft>
-              <a:defRPr sz="1050" b="1">
+              <a:defRPr sz="1200" b="1">
                 <a:solidFill>
                   <a:srgbClr val="0F172A"/>
                 </a:solidFill>
               </a:defRPr>
             </a:pPr>
             <a:r>
-              <a:t>CORE DISTRIBUTED CLUSTER COMPUTING ENGINE PRINCIPLES</a:t>
+              <a:t>CORE DISTRIBUTED CLUSTER COMPUTING PRINCIPLES</a:t>
             </a:r>
           </a:p>
           <a:p>
@@ -12681,20 +12393,20 @@
               </a:spcAft>
             </a:pPr>
             <a:r>
-              <a:rPr b="1" sz="900">
+              <a:rPr b="1" sz="1100">
                 <a:solidFill>
                   <a:srgbClr val="0F172A"/>
                 </a:solidFill>
               </a:rPr>
-              <a:t>•  Catalyst Query Optimization: </a:t>
-            </a:r>
-            <a:r>
-              <a:rPr sz="850">
+              <a:t>•  Catalyst Query Optimizer: </a:t>
+            </a:r>
+            <a:r>
+              <a:rPr sz="1050">
                 <a:solidFill>
                   <a:srgbClr val="64748B"/>
                 </a:solidFill>
               </a:rPr>
-              <a:t>Spark builds an abstract syntax tree and defers physical memory operations until terminal actions (count, show). Catalyst performs predicate pushdown and columnar projection optimization.</a:t>
+              <a:t>Spark constructs logical execution plans, combining column projections and pushing down filters before physical data materialization.</a:t>
             </a:r>
           </a:p>
           <a:p>
@@ -12704,7 +12416,7 @@
               </a:spcAft>
             </a:pPr>
             <a:r>
-              <a:rPr b="1" sz="900">
+              <a:rPr b="1" sz="1100">
                 <a:solidFill>
                   <a:srgbClr val="0F172A"/>
                 </a:solidFill>
@@ -12712,12 +12424,12 @@
               <a:t>•  Multi-Threaded Partitioning (`local[*]`): </a:t>
             </a:r>
             <a:r>
-              <a:rPr sz="850">
+              <a:rPr sz="1050">
                 <a:solidFill>
                   <a:srgbClr val="64748B"/>
                 </a:solidFill>
               </a:rPr>
-              <a:t>Spark binds driver and executor tasks across all virtual CPU cores on the host VM, processing DataFrame partitions in parallel worker threads without single-core bottlenecks.</a:t>
+              <a:t>Spark binds driver and executor tasks across all virtual CPU cores on the host, processing DataFrame partitions in parallel worker threads.</a:t>
             </a:r>
           </a:p>
           <a:p>
@@ -12727,7 +12439,7 @@
               </a:spcAft>
             </a:pPr>
             <a:r>
-              <a:rPr b="1" sz="900">
+              <a:rPr b="1" sz="1100">
                 <a:solidFill>
                   <a:srgbClr val="0F172A"/>
                 </a:solidFill>
@@ -12735,12 +12447,12 @@
               <a:t>•  In-Memory Caching (`.cache()`): </a:t>
             </a:r>
             <a:r>
-              <a:rPr sz="850">
+              <a:rPr sz="1050">
                 <a:solidFill>
                   <a:srgbClr val="64748B"/>
                 </a:solidFill>
               </a:rPr>
-              <a:t>Evaluating 4 multiclass metrics sequentially would trigger 4 separate evaluations of the feature transformation pipeline DAG. Caching predictions in memory cuts total evaluation latency drastically.</a:t>
+              <a:t>Evaluating 4 multiclass metrics sequentially normally forces 4 separate evaluations of the feature transformation DAG. Caching predictions in memory eliminates redundant passes.</a:t>
             </a:r>
           </a:p>
         </p:txBody>
@@ -12815,7 +12527,7 @@
         <p:spPr>
           <a:xfrm>
             <a:off x="731520" y="365760"/>
-            <a:ext cx="7772400" cy="256032"/>
+            <a:ext cx="7772400" cy="274320"/>
           </a:xfrm>
           <a:prstGeom prst="rect">
             <a:avLst/>
@@ -12829,14 +12541,14 @@
           <a:lstStyle/>
           <a:p>
             <a:pPr>
-              <a:defRPr sz="850" b="1">
+              <a:defRPr sz="1000" b="1">
                 <a:solidFill>
                   <a:srgbClr val="64748B"/>
                 </a:solidFill>
               </a:defRPr>
             </a:pPr>
             <a:r>
-              <a:t>DATA QUALITY &amp; EXPLORATORY DATA ANALYSIS</a:t>
+              <a:t>DATA QUALITY &amp; EXPLORATORY ANALYSIS</a:t>
             </a:r>
           </a:p>
         </p:txBody>
@@ -12849,7 +12561,7 @@
         </p:nvSpPr>
         <p:spPr>
           <a:xfrm>
-            <a:off x="731520" y="621792"/>
+            <a:off x="731520" y="658368"/>
             <a:ext cx="8412480" cy="594360"/>
           </a:xfrm>
           <a:prstGeom prst="rect">
@@ -12864,14 +12576,14 @@
           <a:lstStyle/>
           <a:p>
             <a:pPr>
-              <a:defRPr sz="2000" b="1">
+              <a:defRPr sz="2400" b="1">
                 <a:solidFill>
                   <a:srgbClr val="0F172A"/>
                 </a:solidFill>
               </a:defRPr>
             </a:pPr>
             <a:r>
-              <a:t>Parallel Null Verification &amp; Risk Stratification Analysis</a:t>
+              <a:t>Data Quality Verification &amp; Class Distribution</a:t>
             </a:r>
           </a:p>
         </p:txBody>
@@ -12892,7 +12604,7 @@
         </p:blipFill>
         <p:spPr>
           <a:xfrm>
-            <a:off x="9784080" y="365760"/>
+            <a:off x="9784080" y="347472"/>
             <a:ext cx="1691640" cy="590698"/>
           </a:xfrm>
           <a:prstGeom prst="rect">
@@ -12908,7 +12620,7 @@
         </p:nvSpPr>
         <p:spPr>
           <a:xfrm>
-            <a:off x="731520" y="1261872"/>
+            <a:off x="731520" y="1298448"/>
             <a:ext cx="10728655" cy="10972"/>
           </a:xfrm>
           <a:prstGeom prst="rect">
@@ -12951,7 +12663,7 @@
         </p:nvSpPr>
         <p:spPr>
           <a:xfrm>
-            <a:off x="731520" y="6446520"/>
+            <a:off x="731520" y="6382512"/>
             <a:ext cx="10728655" cy="10972"/>
           </a:xfrm>
           <a:prstGeom prst="rect">
@@ -12994,8 +12706,8 @@
         </p:nvSpPr>
         <p:spPr>
           <a:xfrm>
-            <a:off x="731520" y="6473952"/>
-            <a:ext cx="8412480" cy="274320"/>
+            <a:off x="731520" y="6419088"/>
+            <a:ext cx="8412480" cy="320040"/>
           </a:xfrm>
           <a:prstGeom prst="rect">
             <a:avLst/>
@@ -13009,7 +12721,7 @@
           <a:lstStyle/>
           <a:p>
             <a:pPr>
-              <a:defRPr sz="850">
+              <a:defRPr sz="950">
                 <a:solidFill>
                   <a:srgbClr val="64748B"/>
                 </a:solidFill>
@@ -13029,8 +12741,8 @@
         </p:nvSpPr>
         <p:spPr>
           <a:xfrm>
-            <a:off x="9875520" y="6473952"/>
-            <a:ext cx="1584655" cy="274320"/>
+            <a:off x="9875520" y="6419088"/>
+            <a:ext cx="1584655" cy="320040"/>
           </a:xfrm>
           <a:prstGeom prst="rect">
             <a:avLst/>
@@ -13044,7 +12756,7 @@
           <a:lstStyle/>
           <a:p>
             <a:pPr algn="r">
-              <a:defRPr sz="850" b="1">
+              <a:defRPr sz="1000" b="1">
                 <a:solidFill>
                   <a:srgbClr val="0F172A"/>
                 </a:solidFill>
@@ -13064,8 +12776,8 @@
         </p:nvSpPr>
         <p:spPr>
           <a:xfrm>
-            <a:off x="731520" y="1417320"/>
-            <a:ext cx="5212080" cy="4846320"/>
+            <a:off x="731520" y="1463040"/>
+            <a:ext cx="5212080" cy="4754880"/>
           </a:xfrm>
           <a:prstGeom prst="roundRect">
             <a:avLst/>
@@ -13109,8 +12821,8 @@
         </p:nvSpPr>
         <p:spPr>
           <a:xfrm>
-            <a:off x="914400" y="1554480"/>
-            <a:ext cx="4846320" cy="1645920"/>
+            <a:off x="960120" y="1600200"/>
+            <a:ext cx="4754880" cy="4480560"/>
           </a:xfrm>
           <a:prstGeom prst="rect">
             <a:avLst/>
@@ -13125,51 +12837,195 @@
           <a:p>
             <a:pPr>
               <a:spcAft>
-                <a:spcPts val="600"/>
+                <a:spcPts val="1200"/>
               </a:spcAft>
-              <a:defRPr sz="1100" b="1">
+              <a:defRPr sz="1400" b="1">
                 <a:solidFill>
                   <a:srgbClr val="0F172A"/>
                 </a:solidFill>
               </a:defRPr>
             </a:pPr>
             <a:r>
-              <a:t>PARALLELIZED NULL AGGREGATION QUERY</a:t>
-            </a:r>
-          </a:p>
-          <a:p>
-            <a:pPr>
-              <a:defRPr sz="850">
-                <a:solidFill>
-                  <a:srgbClr val="1E293B"/>
-                </a:solidFill>
-              </a:defRPr>
-            </a:pPr>
-            <a:r>
-              <a:t>missing = df.select([</a:t>
-            </a:r>
-            <a:br/>
-            <a:r>
-              <a:t>    F.sum(F.when(F.col(c).isNull(), 1).otherwise(0)).alias(c)</a:t>
-            </a:r>
-            <a:br/>
-            <a:r>
-              <a:t>    for c in df.columns</a:t>
-            </a:r>
-            <a:br/>
-            <a:r>
-              <a:t>]).first().asDict()</a:t>
-            </a:r>
-            <a:br/>
-            <a:r>
-              <a:t>Result: None (Dataset is 100% complete across all 32 columns)</a:t>
+              <a:t>PARALLEL QUALITY VERIFICATION AUDIT</a:t>
+            </a:r>
+          </a:p>
+          <a:p>
+            <a:pPr>
+              <a:spcAft>
+                <a:spcPts val="1000"/>
+              </a:spcAft>
+            </a:pPr>
+            <a:r>
+              <a:rPr b="1" sz="1150">
+                <a:solidFill>
+                  <a:srgbClr val="0F172A"/>
+                </a:solidFill>
+              </a:rPr>
+              <a:t>•  Simultaneous Multi-Column Scan: </a:t>
+            </a:r>
+            <a:r>
+              <a:rPr sz="1100">
+                <a:solidFill>
+                  <a:srgbClr val="64748B"/>
+                </a:solidFill>
+              </a:rPr>
+              <a:t>Rather than scanning columns sequentially, PySpark executes a single parallelized Spark SQL aggregation expression across all 32 clinical features simultaneously.</a:t>
+            </a:r>
+          </a:p>
+          <a:p>
+            <a:pPr>
+              <a:spcAft>
+                <a:spcPts val="1000"/>
+              </a:spcAft>
+            </a:pPr>
+            <a:r>
+              <a:rPr b="1" sz="1150">
+                <a:solidFill>
+                  <a:srgbClr val="0F172A"/>
+                </a:solidFill>
+              </a:rPr>
+              <a:t>•  Data Completeness Result: </a:t>
+            </a:r>
+            <a:r>
+              <a:rPr sz="1100">
+                <a:solidFill>
+                  <a:srgbClr val="64748B"/>
+                </a:solidFill>
+              </a:rPr>
+              <a:t>Mathematically verified 0 null or missing values across all 100,000 observations (100.0% data completeness).</a:t>
+            </a:r>
+          </a:p>
+          <a:p>
+            <a:pPr>
+              <a:spcAft>
+                <a:spcPts val="1000"/>
+              </a:spcAft>
+            </a:pPr>
+            <a:r>
+              <a:rPr b="1" sz="1150">
+                <a:solidFill>
+                  <a:srgbClr val="0F172A"/>
+                </a:solidFill>
+              </a:rPr>
+              <a:t>•  Zero Imputation Bias: </a:t>
+            </a:r>
+            <a:r>
+              <a:rPr sz="1100">
+                <a:solidFill>
+                  <a:srgbClr val="64748B"/>
+                </a:solidFill>
+              </a:rPr>
+              <a:t>Because all records are intact, zero artificial imputation (mean/median replacement) was required, preserving authentic physiological distributions.</a:t>
+            </a:r>
+          </a:p>
+          <a:p>
+            <a:pPr>
+              <a:spcAft>
+                <a:spcPts val="1000"/>
+              </a:spcAft>
+            </a:pPr>
+            <a:r>
+              <a:rPr b="1" sz="1150">
+                <a:solidFill>
+                  <a:srgbClr val="0F172A"/>
+                </a:solidFill>
+              </a:rPr>
+              <a:t>•  Partition-Level Integrity: </a:t>
+            </a:r>
+            <a:r>
+              <a:rPr sz="1100">
+                <a:solidFill>
+                  <a:srgbClr val="64748B"/>
+                </a:solidFill>
+              </a:rPr>
+              <a:t>Each partition block verifies local completeness concurrently, eliminating driver bottlenecks during ingestion.</a:t>
+            </a:r>
+          </a:p>
+        </p:txBody>
+      </p:sp>
+      <p:sp>
+        <p:nvSpPr>
+          <p:cNvPr id="12" name="Rounded Rectangle 11"/>
+          <p:cNvSpPr/>
+          <p:nvPr/>
+        </p:nvSpPr>
+        <p:spPr>
+          <a:xfrm>
+            <a:off x="6217920" y="1463040"/>
+            <a:ext cx="5242255" cy="4754880"/>
+          </a:xfrm>
+          <a:prstGeom prst="roundRect">
+            <a:avLst/>
+          </a:prstGeom>
+          <a:solidFill>
+            <a:srgbClr val="FFFFFF"/>
+          </a:solidFill>
+          <a:ln w="12700">
+            <a:solidFill>
+              <a:srgbClr val="CBD5E1"/>
+            </a:solidFill>
+          </a:ln>
+        </p:spPr>
+        <p:style>
+          <a:lnRef idx="1">
+            <a:schemeClr val="accent1"/>
+          </a:lnRef>
+          <a:fillRef idx="3">
+            <a:schemeClr val="accent1"/>
+          </a:fillRef>
+          <a:effectRef idx="2">
+            <a:schemeClr val="accent1"/>
+          </a:effectRef>
+          <a:fontRef idx="minor">
+            <a:schemeClr val="lt1"/>
+          </a:fontRef>
+        </p:style>
+        <p:txBody>
+          <a:bodyPr rtlCol="0" anchor="ctr"/>
+          <a:lstStyle/>
+          <a:p>
+            <a:pPr algn="ctr"/>
+          </a:p>
+        </p:txBody>
+      </p:sp>
+      <p:sp>
+        <p:nvSpPr>
+          <p:cNvPr id="13" name="TextBox 12"/>
+          <p:cNvSpPr txBox="1"/>
+          <p:nvPr/>
+        </p:nvSpPr>
+        <p:spPr>
+          <a:xfrm>
+            <a:off x="6446520" y="1600200"/>
+            <a:ext cx="4754880" cy="548640"/>
+          </a:xfrm>
+          <a:prstGeom prst="rect">
+            <a:avLst/>
+          </a:prstGeom>
+          <a:noFill/>
+        </p:spPr>
+        <p:txBody>
+          <a:bodyPr wrap="none">
+            <a:spAutoFit/>
+          </a:bodyPr>
+          <a:lstStyle/>
+          <a:p>
+            <a:pPr>
+              <a:defRPr sz="1300" b="1">
+                <a:solidFill>
+                  <a:srgbClr val="0F172A"/>
+                </a:solidFill>
+              </a:defRPr>
+            </a:pPr>
+            <a:r>
+              <a:t>EMPIRICAL CLASS DISTRIBUTION (N=100,000)</a:t>
             </a:r>
           </a:p>
         </p:txBody>
       </p:sp>
       <p:pic>
         <p:nvPicPr>
-          <p:cNvPr id="12" name="Picture 11" descr="Screenshot 2026-10-24 175553.png"/>
+          <p:cNvPr id="14" name="Picture 13" descr="chart_class_distribution.png"/>
           <p:cNvPicPr>
             <a:picLocks noChangeAspect="1"/>
           </p:cNvPicPr>
@@ -13183,127 +13039,8 @@
         </p:blipFill>
         <p:spPr>
           <a:xfrm>
-            <a:off x="1097280" y="3383280"/>
-            <a:ext cx="4480560" cy="2246039"/>
-          </a:xfrm>
-          <a:prstGeom prst="rect">
-            <a:avLst/>
-          </a:prstGeom>
-        </p:spPr>
-      </p:pic>
-      <p:sp>
-        <p:nvSpPr>
-          <p:cNvPr id="13" name="Rounded Rectangle 12"/>
-          <p:cNvSpPr/>
-          <p:nvPr/>
-        </p:nvSpPr>
-        <p:spPr>
-          <a:xfrm>
-            <a:off x="6217920" y="1417320"/>
-            <a:ext cx="5242255" cy="4846320"/>
-          </a:xfrm>
-          <a:prstGeom prst="roundRect">
-            <a:avLst/>
-          </a:prstGeom>
-          <a:solidFill>
-            <a:srgbClr val="F8FAFC"/>
-          </a:solidFill>
-          <a:ln w="12700">
-            <a:solidFill>
-              <a:srgbClr val="CBD5E1"/>
-            </a:solidFill>
-          </a:ln>
-        </p:spPr>
-        <p:style>
-          <a:lnRef idx="1">
-            <a:schemeClr val="accent1"/>
-          </a:lnRef>
-          <a:fillRef idx="3">
-            <a:schemeClr val="accent1"/>
-          </a:fillRef>
-          <a:effectRef idx="2">
-            <a:schemeClr val="accent1"/>
-          </a:effectRef>
-          <a:fontRef idx="minor">
-            <a:schemeClr val="lt1"/>
-          </a:fontRef>
-        </p:style>
-        <p:txBody>
-          <a:bodyPr rtlCol="0" anchor="ctr"/>
-          <a:lstStyle/>
-          <a:p>
-            <a:pPr algn="ctr"/>
-          </a:p>
-        </p:txBody>
-      </p:sp>
-      <p:sp>
-        <p:nvSpPr>
-          <p:cNvPr id="14" name="TextBox 13"/>
-          <p:cNvSpPr txBox="1"/>
-          <p:nvPr/>
-        </p:nvSpPr>
-        <p:spPr>
-          <a:xfrm>
-            <a:off x="6400800" y="1554480"/>
-            <a:ext cx="4876495" cy="1188720"/>
-          </a:xfrm>
-          <a:prstGeom prst="rect">
-            <a:avLst/>
-          </a:prstGeom>
-          <a:noFill/>
-        </p:spPr>
-        <p:txBody>
-          <a:bodyPr wrap="square">
-            <a:spAutoFit/>
-          </a:bodyPr>
-          <a:lstStyle/>
-          <a:p>
-            <a:pPr>
-              <a:spcAft>
-                <a:spcPts val="600"/>
-              </a:spcAft>
-              <a:defRPr sz="1100" b="1">
-                <a:solidFill>
-                  <a:srgbClr val="0F172A"/>
-                </a:solidFill>
-              </a:defRPr>
-            </a:pPr>
-            <a:r>
-              <a:t>EMPIRICAL CLASS SKEW PROFILE</a:t>
-            </a:r>
-          </a:p>
-          <a:p>
-            <a:pPr>
-              <a:defRPr sz="850">
-                <a:solidFill>
-                  <a:srgbClr val="64748B"/>
-                </a:solidFill>
-              </a:defRPr>
-            </a:pPr>
-            <a:r>
-              <a:t>Spark SQL group-by aggregations reveal significant class imbalance: Healthy (54,156), Mild (33,479), Moderate (8,299), and Severe (4,066). The model cannot rely on majority guessing.</a:t>
-            </a:r>
-          </a:p>
-        </p:txBody>
-      </p:sp>
-      <p:pic>
-        <p:nvPicPr>
-          <p:cNvPr id="15" name="Picture 14" descr="Screenshot 2026-10-24 175643.png"/>
-          <p:cNvPicPr>
-            <a:picLocks noChangeAspect="1"/>
-          </p:cNvPicPr>
-          <p:nvPr/>
-        </p:nvPicPr>
-        <p:blipFill>
-          <a:blip r:embed="rId4"/>
-          <a:stretch>
-            <a:fillRect/>
-          </a:stretch>
-        </p:blipFill>
-        <p:spPr>
-          <a:xfrm>
-            <a:off x="6766560" y="2880360"/>
-            <a:ext cx="4114800" cy="3169163"/>
+            <a:off x="6537960" y="2240280"/>
+            <a:ext cx="4572000" cy="2954215"/>
           </a:xfrm>
           <a:prstGeom prst="rect">
             <a:avLst/>
@@ -13380,7 +13117,7 @@
         <p:spPr>
           <a:xfrm>
             <a:off x="731520" y="365760"/>
-            <a:ext cx="7772400" cy="256032"/>
+            <a:ext cx="7772400" cy="274320"/>
           </a:xfrm>
           <a:prstGeom prst="rect">
             <a:avLst/>
@@ -13394,7 +13131,7 @@
           <a:lstStyle/>
           <a:p>
             <a:pPr>
-              <a:defRPr sz="850" b="1">
+              <a:defRPr sz="1000" b="1">
                 <a:solidFill>
                   <a:srgbClr val="64748B"/>
                 </a:solidFill>
@@ -13414,7 +13151,7 @@
         </p:nvSpPr>
         <p:spPr>
           <a:xfrm>
-            <a:off x="731520" y="621792"/>
+            <a:off x="731520" y="658368"/>
             <a:ext cx="8412480" cy="594360"/>
           </a:xfrm>
           <a:prstGeom prst="rect">
@@ -13429,14 +13166,14 @@
           <a:lstStyle/>
           <a:p>
             <a:pPr>
-              <a:defRPr sz="2000" b="1">
+              <a:defRPr sz="2400" b="1">
                 <a:solidFill>
                   <a:srgbClr val="0F172A"/>
                 </a:solidFill>
               </a:defRPr>
             </a:pPr>
             <a:r>
-              <a:t>Progressive Deterioration of Biomarkers Across Risk Tiers</a:t>
+              <a:t>Clinical Biomarker Gradients Across Risk Tiers</a:t>
             </a:r>
           </a:p>
         </p:txBody>
@@ -13457,7 +13194,7 @@
         </p:blipFill>
         <p:spPr>
           <a:xfrm>
-            <a:off x="9784080" y="365760"/>
+            <a:off x="9784080" y="347472"/>
             <a:ext cx="1691640" cy="590698"/>
           </a:xfrm>
           <a:prstGeom prst="rect">
@@ -13473,7 +13210,7 @@
         </p:nvSpPr>
         <p:spPr>
           <a:xfrm>
-            <a:off x="731520" y="1261872"/>
+            <a:off x="731520" y="1298448"/>
             <a:ext cx="10728655" cy="10972"/>
           </a:xfrm>
           <a:prstGeom prst="rect">
@@ -13516,7 +13253,7 @@
         </p:nvSpPr>
         <p:spPr>
           <a:xfrm>
-            <a:off x="731520" y="6446520"/>
+            <a:off x="731520" y="6382512"/>
             <a:ext cx="10728655" cy="10972"/>
           </a:xfrm>
           <a:prstGeom prst="rect">
@@ -13559,8 +13296,8 @@
         </p:nvSpPr>
         <p:spPr>
           <a:xfrm>
-            <a:off x="731520" y="6473952"/>
-            <a:ext cx="8412480" cy="274320"/>
+            <a:off x="731520" y="6419088"/>
+            <a:ext cx="8412480" cy="320040"/>
           </a:xfrm>
           <a:prstGeom prst="rect">
             <a:avLst/>
@@ -13574,7 +13311,7 @@
           <a:lstStyle/>
           <a:p>
             <a:pPr>
-              <a:defRPr sz="850">
+              <a:defRPr sz="950">
                 <a:solidFill>
                   <a:srgbClr val="64748B"/>
                 </a:solidFill>
@@ -13594,8 +13331,8 @@
         </p:nvSpPr>
         <p:spPr>
           <a:xfrm>
-            <a:off x="9875520" y="6473952"/>
-            <a:ext cx="1584655" cy="274320"/>
+            <a:off x="9875520" y="6419088"/>
+            <a:ext cx="1584655" cy="320040"/>
           </a:xfrm>
           <a:prstGeom prst="rect">
             <a:avLst/>
@@ -13609,7 +13346,7 @@
           <a:lstStyle/>
           <a:p>
             <a:pPr algn="r">
-              <a:defRPr sz="850" b="1">
+              <a:defRPr sz="1000" b="1">
                 <a:solidFill>
                   <a:srgbClr val="0F172A"/>
                 </a:solidFill>
@@ -13629,8 +13366,8 @@
         </p:nvSpPr>
         <p:spPr>
           <a:xfrm>
-            <a:off x="731520" y="1417320"/>
-            <a:ext cx="2542032" cy="3931920"/>
+            <a:off x="731520" y="1444752"/>
+            <a:ext cx="2542032" cy="3886200"/>
           </a:xfrm>
           <a:prstGeom prst="roundRect">
             <a:avLst/>
@@ -13674,7 +13411,7 @@
         </p:nvSpPr>
         <p:spPr>
           <a:xfrm>
-            <a:off x="841248" y="1508760"/>
+            <a:off x="841248" y="1536192"/>
             <a:ext cx="2322576" cy="868680"/>
           </a:xfrm>
           <a:prstGeom prst="rect">
@@ -13689,7 +13426,7 @@
           <a:lstStyle/>
           <a:p>
             <a:pPr>
-              <a:defRPr sz="1000" b="1">
+              <a:defRPr sz="1100" b="1">
                 <a:solidFill>
                   <a:srgbClr val="0F172A"/>
                 </a:solidFill>
@@ -13701,7 +13438,7 @@
           </a:p>
           <a:p>
             <a:pPr>
-              <a:defRPr sz="750">
+              <a:defRPr sz="850">
                 <a:solidFill>
                   <a:srgbClr val="64748B"/>
                 </a:solidFill>
@@ -13713,7 +13450,7 @@
           </a:p>
           <a:p>
             <a:pPr>
-              <a:defRPr sz="950" b="1">
+              <a:defRPr sz="1100" b="1">
                 <a:solidFill>
                   <a:srgbClr val="0F172A"/>
                 </a:solidFill>
@@ -13741,7 +13478,7 @@
         </p:blipFill>
         <p:spPr>
           <a:xfrm>
-            <a:off x="841248" y="2468880"/>
+            <a:off x="841248" y="2514600"/>
             <a:ext cx="2322576" cy="1312760"/>
           </a:xfrm>
           <a:prstGeom prst="rect">
@@ -13757,8 +13494,8 @@
         </p:nvSpPr>
         <p:spPr>
           <a:xfrm>
-            <a:off x="3456432" y="1417320"/>
-            <a:ext cx="2542032" cy="3931920"/>
+            <a:off x="3456432" y="1444752"/>
+            <a:ext cx="2542032" cy="3886200"/>
           </a:xfrm>
           <a:prstGeom prst="roundRect">
             <a:avLst/>
@@ -13802,7 +13539,7 @@
         </p:nvSpPr>
         <p:spPr>
           <a:xfrm>
-            <a:off x="3566160" y="1508760"/>
+            <a:off x="3566160" y="1536192"/>
             <a:ext cx="2322576" cy="868680"/>
           </a:xfrm>
           <a:prstGeom prst="rect">
@@ -13817,7 +13554,7 @@
           <a:lstStyle/>
           <a:p>
             <a:pPr>
-              <a:defRPr sz="1000" b="1">
+              <a:defRPr sz="1100" b="1">
                 <a:solidFill>
                   <a:srgbClr val="0F172A"/>
                 </a:solidFill>
@@ -13829,7 +13566,7 @@
           </a:p>
           <a:p>
             <a:pPr>
-              <a:defRPr sz="750">
+              <a:defRPr sz="850">
                 <a:solidFill>
                   <a:srgbClr val="64748B"/>
                 </a:solidFill>
@@ -13841,7 +13578,7 @@
           </a:p>
           <a:p>
             <a:pPr>
-              <a:defRPr sz="950" b="1">
+              <a:defRPr sz="1100" b="1">
                 <a:solidFill>
                   <a:srgbClr val="0F172A"/>
                 </a:solidFill>
@@ -13869,7 +13606,7 @@
         </p:blipFill>
         <p:spPr>
           <a:xfrm>
-            <a:off x="3566160" y="2468880"/>
+            <a:off x="3566160" y="2514600"/>
             <a:ext cx="2322576" cy="1312760"/>
           </a:xfrm>
           <a:prstGeom prst="rect">
@@ -13885,8 +13622,8 @@
         </p:nvSpPr>
         <p:spPr>
           <a:xfrm>
-            <a:off x="6181344" y="1417320"/>
-            <a:ext cx="2542032" cy="3931920"/>
+            <a:off x="6181344" y="1444752"/>
+            <a:ext cx="2542032" cy="3886200"/>
           </a:xfrm>
           <a:prstGeom prst="roundRect">
             <a:avLst/>
@@ -13930,7 +13667,7 @@
         </p:nvSpPr>
         <p:spPr>
           <a:xfrm>
-            <a:off x="6291072" y="1508760"/>
+            <a:off x="6291072" y="1536192"/>
             <a:ext cx="2322576" cy="868680"/>
           </a:xfrm>
           <a:prstGeom prst="rect">
@@ -13945,7 +13682,7 @@
           <a:lstStyle/>
           <a:p>
             <a:pPr>
-              <a:defRPr sz="1000" b="1">
+              <a:defRPr sz="1100" b="1">
                 <a:solidFill>
                   <a:srgbClr val="0F172A"/>
                 </a:solidFill>
@@ -13957,7 +13694,7 @@
           </a:p>
           <a:p>
             <a:pPr>
-              <a:defRPr sz="750">
+              <a:defRPr sz="850">
                 <a:solidFill>
                   <a:srgbClr val="64748B"/>
                 </a:solidFill>
@@ -13969,7 +13706,7 @@
           </a:p>
           <a:p>
             <a:pPr>
-              <a:defRPr sz="950" b="1">
+              <a:defRPr sz="1100" b="1">
                 <a:solidFill>
                   <a:srgbClr val="0F172A"/>
                 </a:solidFill>
@@ -13997,7 +13734,7 @@
         </p:blipFill>
         <p:spPr>
           <a:xfrm>
-            <a:off x="6291072" y="2468880"/>
+            <a:off x="6291072" y="2514600"/>
             <a:ext cx="2322576" cy="1312760"/>
           </a:xfrm>
           <a:prstGeom prst="rect">
@@ -14013,8 +13750,8 @@
         </p:nvSpPr>
         <p:spPr>
           <a:xfrm>
-            <a:off x="8906256" y="1417320"/>
-            <a:ext cx="2542032" cy="3931920"/>
+            <a:off x="8906256" y="1444752"/>
+            <a:ext cx="2542032" cy="3886200"/>
           </a:xfrm>
           <a:prstGeom prst="roundRect">
             <a:avLst/>
@@ -14058,7 +13795,7 @@
         </p:nvSpPr>
         <p:spPr>
           <a:xfrm>
-            <a:off x="9015984" y="1508760"/>
+            <a:off x="9015984" y="1536192"/>
             <a:ext cx="2322576" cy="868680"/>
           </a:xfrm>
           <a:prstGeom prst="rect">
@@ -14073,7 +13810,7 @@
           <a:lstStyle/>
           <a:p>
             <a:pPr>
-              <a:defRPr sz="1000" b="1">
+              <a:defRPr sz="1100" b="1">
                 <a:solidFill>
                   <a:srgbClr val="0F172A"/>
                 </a:solidFill>
@@ -14085,7 +13822,7 @@
           </a:p>
           <a:p>
             <a:pPr>
-              <a:defRPr sz="750">
+              <a:defRPr sz="850">
                 <a:solidFill>
                   <a:srgbClr val="64748B"/>
                 </a:solidFill>
@@ -14097,7 +13834,7 @@
           </a:p>
           <a:p>
             <a:pPr>
-              <a:defRPr sz="950" b="1">
+              <a:defRPr sz="1100" b="1">
                 <a:solidFill>
                   <a:srgbClr val="0F172A"/>
                 </a:solidFill>
@@ -14125,7 +13862,7 @@
         </p:blipFill>
         <p:spPr>
           <a:xfrm>
-            <a:off x="9015984" y="2468880"/>
+            <a:off x="9015984" y="2514600"/>
             <a:ext cx="2322576" cy="1312760"/>
           </a:xfrm>
           <a:prstGeom prst="rect">
@@ -14141,8 +13878,8 @@
         </p:nvSpPr>
         <p:spPr>
           <a:xfrm>
-            <a:off x="731520" y="5486400"/>
-            <a:ext cx="10728655" cy="822960"/>
+            <a:off x="731520" y="5468112"/>
+            <a:ext cx="10728655" cy="804672"/>
           </a:xfrm>
           <a:prstGeom prst="roundRect">
             <a:avLst/>
@@ -14150,7 +13887,7 @@
           <a:solidFill>
             <a:srgbClr val="F8FAFC"/>
           </a:solidFill>
-          <a:ln w="15240">
+          <a:ln w="19050">
             <a:solidFill>
               <a:srgbClr val="0F172A"/>
             </a:solidFill>
@@ -14186,8 +13923,8 @@
         </p:nvSpPr>
         <p:spPr>
           <a:xfrm>
-            <a:off x="914400" y="5559552"/>
-            <a:ext cx="10362895" cy="685800"/>
+            <a:off x="960120" y="5541264"/>
+            <a:ext cx="10241280" cy="658368"/>
           </a:xfrm>
           <a:prstGeom prst="rect">
             <a:avLst/>
@@ -14201,7 +13938,7 @@
           <a:lstStyle/>
           <a:p>
             <a:r>
-              <a:rPr b="1" sz="1000">
+              <a:rPr b="1" sz="1150">
                 <a:solidFill>
                   <a:srgbClr val="0F172A"/>
                 </a:solidFill>
@@ -14209,9 +13946,9 @@
               <a:t>CRITICAL CLINICAL TAKEAWAY: </a:t>
             </a:r>
             <a:r>
-              <a:rPr sz="900">
-                <a:solidFill>
-                  <a:srgbClr val="64748B"/>
+              <a:rPr sz="1100">
+                <a:solidFill>
+                  <a:srgbClr val="1E293B"/>
                 </a:solidFill>
               </a:rPr>
               <a:t>While total sleep duration declines by ~2 hours (-30.2%), subjective sleep quality plummets by -60.3% and cognitive performance collapses by -73.7%. This proves that disordered sleep causes profound systemic neurobehavioral damage far exceeding simple sleep loss.</a:t>
@@ -14289,7 +14026,7 @@
         <p:spPr>
           <a:xfrm>
             <a:off x="731520" y="365760"/>
-            <a:ext cx="7772400" cy="256032"/>
+            <a:ext cx="7772400" cy="274320"/>
           </a:xfrm>
           <a:prstGeom prst="rect">
             <a:avLst/>
@@ -14303,7 +14040,7 @@
           <a:lstStyle/>
           <a:p>
             <a:pPr>
-              <a:defRPr sz="850" b="1">
+              <a:defRPr sz="1000" b="1">
                 <a:solidFill>
                   <a:srgbClr val="64748B"/>
                 </a:solidFill>
@@ -14323,7 +14060,7 @@
         </p:nvSpPr>
         <p:spPr>
           <a:xfrm>
-            <a:off x="731520" y="621792"/>
+            <a:off x="731520" y="658368"/>
             <a:ext cx="8412480" cy="594360"/>
           </a:xfrm>
           <a:prstGeom prst="rect">
@@ -14338,14 +14075,14 @@
           <a:lstStyle/>
           <a:p>
             <a:pPr>
-              <a:defRPr sz="2000" b="1">
+              <a:defRPr sz="2400" b="1">
                 <a:solidFill>
                   <a:srgbClr val="0F172A"/>
                 </a:solidFill>
               </a:defRPr>
             </a:pPr>
             <a:r>
-              <a:t>Prospective Triage Integrity &amp; PySpark MLlib Pipeline</a:t>
+              <a:t>Clinical Triage Integrity &amp; Target Leakage Prevention</a:t>
             </a:r>
           </a:p>
         </p:txBody>
@@ -14366,7 +14103,7 @@
         </p:blipFill>
         <p:spPr>
           <a:xfrm>
-            <a:off x="9784080" y="365760"/>
+            <a:off x="9784080" y="347472"/>
             <a:ext cx="1691640" cy="590698"/>
           </a:xfrm>
           <a:prstGeom prst="rect">
@@ -14382,7 +14119,7 @@
         </p:nvSpPr>
         <p:spPr>
           <a:xfrm>
-            <a:off x="731520" y="1261872"/>
+            <a:off x="731520" y="1298448"/>
             <a:ext cx="10728655" cy="10972"/>
           </a:xfrm>
           <a:prstGeom prst="rect">
@@ -14425,7 +14162,7 @@
         </p:nvSpPr>
         <p:spPr>
           <a:xfrm>
-            <a:off x="731520" y="6446520"/>
+            <a:off x="731520" y="6382512"/>
             <a:ext cx="10728655" cy="10972"/>
           </a:xfrm>
           <a:prstGeom prst="rect">
@@ -14468,8 +14205,8 @@
         </p:nvSpPr>
         <p:spPr>
           <a:xfrm>
-            <a:off x="731520" y="6473952"/>
-            <a:ext cx="8412480" cy="274320"/>
+            <a:off x="731520" y="6419088"/>
+            <a:ext cx="8412480" cy="320040"/>
           </a:xfrm>
           <a:prstGeom prst="rect">
             <a:avLst/>
@@ -14483,7 +14220,7 @@
           <a:lstStyle/>
           <a:p>
             <a:pPr>
-              <a:defRPr sz="850">
+              <a:defRPr sz="950">
                 <a:solidFill>
                   <a:srgbClr val="64748B"/>
                 </a:solidFill>
@@ -14503,8 +14240,8 @@
         </p:nvSpPr>
         <p:spPr>
           <a:xfrm>
-            <a:off x="9875520" y="6473952"/>
-            <a:ext cx="1584655" cy="274320"/>
+            <a:off x="9875520" y="6419088"/>
+            <a:ext cx="1584655" cy="320040"/>
           </a:xfrm>
           <a:prstGeom prst="rect">
             <a:avLst/>
@@ -14518,7 +14255,7 @@
           <a:lstStyle/>
           <a:p>
             <a:pPr algn="r">
-              <a:defRPr sz="850" b="1">
+              <a:defRPr sz="1000" b="1">
                 <a:solidFill>
                   <a:srgbClr val="0F172A"/>
                 </a:solidFill>
@@ -14538,8 +14275,8 @@
         </p:nvSpPr>
         <p:spPr>
           <a:xfrm>
-            <a:off x="731520" y="1417320"/>
-            <a:ext cx="5212080" cy="4846320"/>
+            <a:off x="731520" y="1463040"/>
+            <a:ext cx="5212080" cy="4754880"/>
           </a:xfrm>
           <a:prstGeom prst="roundRect">
             <a:avLst/>
@@ -14583,8 +14320,8 @@
         </p:nvSpPr>
         <p:spPr>
           <a:xfrm>
-            <a:off x="914400" y="1554480"/>
-            <a:ext cx="4846320" cy="4572000"/>
+            <a:off x="960120" y="1600200"/>
+            <a:ext cx="4754880" cy="4480560"/>
           </a:xfrm>
           <a:prstGeom prst="rect">
             <a:avLst/>
@@ -14599,9 +14336,9 @@
           <a:p>
             <a:pPr>
               <a:spcAft>
-                <a:spcPts val="1000"/>
+                <a:spcPts val="1200"/>
               </a:spcAft>
-              <a:defRPr sz="1100" b="1">
+              <a:defRPr sz="1400" b="1">
                 <a:solidFill>
                   <a:srgbClr val="0F172A"/>
                 </a:solidFill>
@@ -14614,11 +14351,11 @@
           <a:p>
             <a:pPr>
               <a:spcAft>
-                <a:spcPts val="500"/>
+                <a:spcPts val="700"/>
               </a:spcAft>
             </a:pPr>
             <a:r>
-              <a:rPr b="1" sz="950">
+              <a:rPr b="1" sz="1150">
                 <a:solidFill>
                   <a:srgbClr val="0F172A"/>
                 </a:solidFill>
@@ -14626,22 +14363,22 @@
               <a:t>•  The 'Target Leakage' Trap: </a:t>
             </a:r>
             <a:r>
-              <a:rPr sz="850">
+              <a:rPr sz="1100">
                 <a:solidFill>
                   <a:srgbClr val="64748B"/>
                 </a:solidFill>
               </a:rPr>
-              <a:t>In clinical machine learning, target leakage occurs when retrospective symptoms or outcome variables are accidentally provided as input features during model training.</a:t>
+              <a:t>In clinical ML, target leakage occurs when retrospective outcome variables are accidentally fed into the model as input features during training.</a:t>
             </a:r>
           </a:p>
           <a:p>
             <a:pPr>
               <a:spcAft>
-                <a:spcPts val="500"/>
+                <a:spcPts val="700"/>
               </a:spcAft>
             </a:pPr>
             <a:r>
-              <a:rPr b="1" sz="950">
+              <a:rPr b="1" sz="1150">
                 <a:solidFill>
                   <a:srgbClr val="0F172A"/>
                 </a:solidFill>
@@ -14649,22 +14386,22 @@
               <a:t>•  Excluded: felt_rested: </a:t>
             </a:r>
             <a:r>
-              <a:rPr sz="850">
+              <a:rPr sz="1100">
                 <a:solidFill>
                   <a:srgbClr val="64748B"/>
                 </a:solidFill>
               </a:rPr>
-              <a:t>Evaluated the morning *after* sleep. If someone reports feeling exhausted, they already manifest the disorder. Using this feature creates artificial ~99% accuracy that fails in actual triage.</a:t>
+              <a:t>Evaluated the morning *after* sleep. If a patient feels unrefreshed, they are already manifesting the disorder. Including this produces artificially high ~99% accuracy that fails in actual triage.</a:t>
             </a:r>
           </a:p>
           <a:p>
             <a:pPr>
               <a:spcAft>
-                <a:spcPts val="500"/>
+                <a:spcPts val="700"/>
               </a:spcAft>
             </a:pPr>
             <a:r>
-              <a:rPr b="1" sz="950">
+              <a:rPr b="1" sz="1150">
                 <a:solidFill>
                   <a:srgbClr val="0F172A"/>
                 </a:solidFill>
@@ -14672,22 +14409,22 @@
               <a:t>•  Excluded: cognitive_score: </a:t>
             </a:r>
             <a:r>
-              <a:rPr sz="850">
+              <a:rPr sz="1100">
                 <a:solidFill>
                   <a:srgbClr val="64748B"/>
                 </a:solidFill>
               </a:rPr>
-              <a:t>Evaluated during daytime tasks. It is a secondary consequence of the sleep disorder, not an overnight predictive biomarker.</a:t>
+              <a:t>Evaluated during daytime tasks. It is a secondary neurobehavioral consequence of the sleep disorder, not an overnight predictive biomarker.</a:t>
             </a:r>
           </a:p>
           <a:p>
             <a:pPr>
               <a:spcAft>
-                <a:spcPts val="500"/>
+                <a:spcPts val="700"/>
               </a:spcAft>
             </a:pPr>
             <a:r>
-              <a:rPr b="1" sz="950">
+              <a:rPr b="1" sz="1150">
                 <a:solidFill>
                   <a:srgbClr val="0F172A"/>
                 </a:solidFill>
@@ -14695,35 +14432,35 @@
               <a:t>•  Excluded: person_id: </a:t>
             </a:r>
             <a:r>
-              <a:rPr sz="850">
+              <a:rPr sz="1100">
                 <a:solidFill>
                   <a:srgbClr val="64748B"/>
                 </a:solidFill>
               </a:rPr>
-              <a:t>Arbitrary database primary key with zero physiological predictive capacity.</a:t>
+              <a:t>Arbitrary database primary key with zero physiological predictive signal.</a:t>
             </a:r>
           </a:p>
           <a:p>
             <a:pPr>
               <a:spcAft>
-                <a:spcPts val="500"/>
+                <a:spcPts val="700"/>
               </a:spcAft>
             </a:pPr>
             <a:r>
-              <a:rPr b="1" sz="950">
+              <a:rPr b="1" sz="1150">
                 <a:solidFill>
                   <a:srgbClr val="0F172A"/>
                 </a:solidFill>
               </a:rPr>
-              <a:t>•  Clinical Screening Validity: </a:t>
-            </a:r>
-            <a:r>
-              <a:rPr sz="850">
+              <a:t>•  Prospective Triage Integrity: </a:t>
+            </a:r>
+            <a:r>
+              <a:rPr sz="1100">
                 <a:solidFill>
                   <a:srgbClr val="64748B"/>
                 </a:solidFill>
               </a:rPr>
-              <a:t>A genuine diagnostic tool must assess prospective risk using only baseline demographics, habits, and overnight vitals *before* next-day neurocognitive symptoms manifest.</a:t>
+              <a:t>A valid clinical screening tool must evaluate risk using only baseline demographics, habits, and overnight vitals *before* next-day neurocognitive symptoms manifest.</a:t>
             </a:r>
           </a:p>
         </p:txBody>
@@ -14736,18 +14473,18 @@
         </p:nvSpPr>
         <p:spPr>
           <a:xfrm>
-            <a:off x="6217920" y="1417320"/>
-            <a:ext cx="5242255" cy="4846320"/>
+            <a:off x="6217920" y="1463040"/>
+            <a:ext cx="5242255" cy="4754880"/>
           </a:xfrm>
           <a:prstGeom prst="roundRect">
             <a:avLst/>
           </a:prstGeom>
           <a:solidFill>
-            <a:srgbClr val="F8FAFC"/>
+            <a:srgbClr val="FFFFFF"/>
           </a:solidFill>
-          <a:ln w="12700">
+          <a:ln w="19050">
             <a:solidFill>
-              <a:srgbClr val="CBD5E1"/>
+              <a:srgbClr val="0F172A"/>
             </a:solidFill>
           </a:ln>
         </p:spPr>
@@ -14781,8 +14518,8 @@
         </p:nvSpPr>
         <p:spPr>
           <a:xfrm>
-            <a:off x="6400800" y="1554480"/>
-            <a:ext cx="4876495" cy="1463040"/>
+            <a:off x="6446520" y="1600200"/>
+            <a:ext cx="4754880" cy="4480560"/>
           </a:xfrm>
           <a:prstGeom prst="rect">
             <a:avLst/>
@@ -14797,9 +14534,9 @@
           <a:p>
             <a:pPr>
               <a:spcAft>
-                <a:spcPts val="600"/>
+                <a:spcPts val="1400"/>
               </a:spcAft>
-              <a:defRPr sz="1100" b="1">
+              <a:defRPr sz="1400" b="1">
                 <a:solidFill>
                   <a:srgbClr val="0F172A"/>
                 </a:solidFill>
@@ -14811,54 +14548,121 @@
           </a:p>
           <a:p>
             <a:pPr>
-              <a:defRPr sz="850">
-                <a:solidFill>
-                  <a:srgbClr val="1E293B"/>
-                </a:solidFill>
-              </a:defRPr>
-            </a:pPr>
-            <a:r>
-              <a:t>1. StringIndexer: Encodes gender, occupation, country to indices</a:t>
-            </a:r>
-            <a:br/>
-            <a:r>
-              <a:t>2. OneHotEncoder: Vectorizes indices into sparse dummy vectors</a:t>
-            </a:r>
-            <a:br/>
-            <a:r>
-              <a:t>3. VectorAssembler: Consolidates 28 features into dense vector 'features'</a:t>
-            </a:r>
-            <a:br/>
-            <a:r>
-              <a:t>4. LabelIndexer: Maps target strings to numeric indices (0.0 to 3.0)</a:t>
-            </a:r>
-          </a:p>
-        </p:txBody>
-      </p:sp>
-      <p:pic>
-        <p:nvPicPr>
-          <p:cNvPr id="14" name="Picture 13" descr="Screenshot 2026-10-24 180209.png"/>
-          <p:cNvPicPr>
-            <a:picLocks noChangeAspect="1"/>
-          </p:cNvPicPr>
-          <p:nvPr/>
-        </p:nvPicPr>
-        <p:blipFill>
-          <a:blip r:embed="rId3"/>
-          <a:stretch>
-            <a:fillRect/>
-          </a:stretch>
-        </p:blipFill>
-        <p:spPr>
-          <a:xfrm>
-            <a:off x="6583680" y="3154680"/>
-            <a:ext cx="4480560" cy="2998880"/>
-          </a:xfrm>
-          <a:prstGeom prst="rect">
-            <a:avLst/>
-          </a:prstGeom>
-        </p:spPr>
-      </p:pic>
+              <a:spcAft>
+                <a:spcPts val="800"/>
+              </a:spcAft>
+            </a:pPr>
+            <a:r>
+              <a:rPr b="1" sz="1200">
+                <a:solidFill>
+                  <a:srgbClr val="0F172A"/>
+                </a:solidFill>
+              </a:rPr>
+              <a:t>1. StringIndexer: </a:t>
+            </a:r>
+            <a:r>
+              <a:rPr sz="1100">
+                <a:solidFill>
+                  <a:srgbClr val="64748B"/>
+                </a:solidFill>
+              </a:rPr>
+              <a:t>Maps categorical strings (gender, occupation, country) to numerical indices [0, C-1] based on frequency.</a:t>
+            </a:r>
+          </a:p>
+          <a:p>
+            <a:pPr>
+              <a:spcAft>
+                <a:spcPts val="800"/>
+              </a:spcAft>
+            </a:pPr>
+            <a:r>
+              <a:rPr b="1" sz="1200">
+                <a:solidFill>
+                  <a:srgbClr val="0F172A"/>
+                </a:solidFill>
+              </a:rPr>
+              <a:t>2. OneHotEncoder: </a:t>
+            </a:r>
+            <a:r>
+              <a:rPr sz="1100">
+                <a:solidFill>
+                  <a:srgbClr val="64748B"/>
+                </a:solidFill>
+              </a:rPr>
+              <a:t>Converts numerical category indices into sparse binary dummy vectors, preventing artificial ordinal ranking.</a:t>
+            </a:r>
+          </a:p>
+          <a:p>
+            <a:pPr>
+              <a:spcAft>
+                <a:spcPts val="800"/>
+              </a:spcAft>
+            </a:pPr>
+            <a:r>
+              <a:rPr b="1" sz="1200">
+                <a:solidFill>
+                  <a:srgbClr val="0F172A"/>
+                </a:solidFill>
+              </a:rPr>
+              <a:t>3. VectorAssembler: </a:t>
+            </a:r>
+            <a:r>
+              <a:rPr sz="1100">
+                <a:solidFill>
+                  <a:srgbClr val="64748B"/>
+                </a:solidFill>
+              </a:rPr>
+              <a:t>Consolidates all 28 numerical features and one-hot vectors into a single unified dense vector named 'features'.</a:t>
+            </a:r>
+          </a:p>
+          <a:p>
+            <a:pPr>
+              <a:spcAft>
+                <a:spcPts val="800"/>
+              </a:spcAft>
+            </a:pPr>
+            <a:r>
+              <a:rPr b="1" sz="1200">
+                <a:solidFill>
+                  <a:srgbClr val="0F172A"/>
+                </a:solidFill>
+              </a:rPr>
+              <a:t>4. Target StringIndexer: </a:t>
+            </a:r>
+            <a:r>
+              <a:rPr sz="1100">
+                <a:solidFill>
+                  <a:srgbClr val="64748B"/>
+                </a:solidFill>
+              </a:rPr>
+              <a:t>Encodes the multiclass target label (sleep_disorder_risk) into double indices [0.0 to 3.0] as 'label'.</a:t>
+            </a:r>
+          </a:p>
+          <a:p>
+            <a:pPr>
+              <a:spcAft>
+                <a:spcPts val="800"/>
+              </a:spcAft>
+            </a:pPr>
+            <a:r>
+              <a:rPr b="1" sz="1200">
+                <a:solidFill>
+                  <a:srgbClr val="0F172A"/>
+                </a:solidFill>
+              </a:rPr>
+              <a:t>5. Atomic Pipeline Composition: </a:t>
+            </a:r>
+            <a:r>
+              <a:rPr sz="1100">
+                <a:solidFill>
+                  <a:srgbClr val="64748B"/>
+                </a:solidFill>
+              </a:rPr>
+              <a:t>All transformers and estimators are bundled into a single pyspark.ml.Pipeline, preventing test data leakage during cross-validation.</a:t>
+            </a:r>
+          </a:p>
+        </p:txBody>
+      </p:sp>
     </p:spTree>
   </p:cSld>
   <p:clrMapOvr>
@@ -14929,7 +14733,7 @@
         <p:spPr>
           <a:xfrm>
             <a:off x="731520" y="365760"/>
-            <a:ext cx="7772400" cy="256032"/>
+            <a:ext cx="7772400" cy="274320"/>
           </a:xfrm>
           <a:prstGeom prst="rect">
             <a:avLst/>
@@ -14943,7 +14747,7 @@
           <a:lstStyle/>
           <a:p>
             <a:pPr>
-              <a:defRPr sz="850" b="1">
+              <a:defRPr sz="1000" b="1">
                 <a:solidFill>
                   <a:srgbClr val="64748B"/>
                 </a:solidFill>
@@ -14963,7 +14767,7 @@
         </p:nvSpPr>
         <p:spPr>
           <a:xfrm>
-            <a:off x="731520" y="621792"/>
+            <a:off x="731520" y="658368"/>
             <a:ext cx="8412480" cy="594360"/>
           </a:xfrm>
           <a:prstGeom prst="rect">
@@ -14978,7 +14782,7 @@
           <a:lstStyle/>
           <a:p>
             <a:pPr>
-              <a:defRPr sz="2000" b="1">
+              <a:defRPr sz="2400" b="1">
                 <a:solidFill>
                   <a:srgbClr val="0F172A"/>
                 </a:solidFill>
@@ -15006,7 +14810,7 @@
         </p:blipFill>
         <p:spPr>
           <a:xfrm>
-            <a:off x="9784080" y="365760"/>
+            <a:off x="9784080" y="347472"/>
             <a:ext cx="1691640" cy="590698"/>
           </a:xfrm>
           <a:prstGeom prst="rect">
@@ -15022,7 +14826,7 @@
         </p:nvSpPr>
         <p:spPr>
           <a:xfrm>
-            <a:off x="731520" y="1261872"/>
+            <a:off x="731520" y="1298448"/>
             <a:ext cx="10728655" cy="10972"/>
           </a:xfrm>
           <a:prstGeom prst="rect">
@@ -15065,7 +14869,7 @@
         </p:nvSpPr>
         <p:spPr>
           <a:xfrm>
-            <a:off x="731520" y="6446520"/>
+            <a:off x="731520" y="6382512"/>
             <a:ext cx="10728655" cy="10972"/>
           </a:xfrm>
           <a:prstGeom prst="rect">
@@ -15108,8 +14912,8 @@
         </p:nvSpPr>
         <p:spPr>
           <a:xfrm>
-            <a:off x="731520" y="6473952"/>
-            <a:ext cx="8412480" cy="274320"/>
+            <a:off x="731520" y="6419088"/>
+            <a:ext cx="8412480" cy="320040"/>
           </a:xfrm>
           <a:prstGeom prst="rect">
             <a:avLst/>
@@ -15123,7 +14927,7 @@
           <a:lstStyle/>
           <a:p>
             <a:pPr>
-              <a:defRPr sz="850">
+              <a:defRPr sz="950">
                 <a:solidFill>
                   <a:srgbClr val="64748B"/>
                 </a:solidFill>
@@ -15143,8 +14947,8 @@
         </p:nvSpPr>
         <p:spPr>
           <a:xfrm>
-            <a:off x="9875520" y="6473952"/>
-            <a:ext cx="1584655" cy="274320"/>
+            <a:off x="9875520" y="6419088"/>
+            <a:ext cx="1584655" cy="320040"/>
           </a:xfrm>
           <a:prstGeom prst="rect">
             <a:avLst/>
@@ -15158,7 +14962,7 @@
           <a:lstStyle/>
           <a:p>
             <a:pPr algn="r">
-              <a:defRPr sz="850" b="1">
+              <a:defRPr sz="1000" b="1">
                 <a:solidFill>
                   <a:srgbClr val="0F172A"/>
                 </a:solidFill>
@@ -15178,8 +14982,8 @@
         </p:nvSpPr>
         <p:spPr>
           <a:xfrm>
-            <a:off x="731520" y="1417320"/>
-            <a:ext cx="5212080" cy="4846320"/>
+            <a:off x="731520" y="1463040"/>
+            <a:ext cx="5212080" cy="4754880"/>
           </a:xfrm>
           <a:prstGeom prst="roundRect">
             <a:avLst/>
@@ -15223,8 +15027,8 @@
         </p:nvSpPr>
         <p:spPr>
           <a:xfrm>
-            <a:off x="914400" y="1554480"/>
-            <a:ext cx="4846320" cy="4572000"/>
+            <a:off x="960120" y="1600200"/>
+            <a:ext cx="4754880" cy="4480560"/>
           </a:xfrm>
           <a:prstGeom prst="rect">
             <a:avLst/>
@@ -15239,9 +15043,9 @@
           <a:p>
             <a:pPr>
               <a:spcAft>
-                <a:spcPts val="1000"/>
+                <a:spcPts val="1400"/>
               </a:spcAft>
-              <a:defRPr sz="1100" b="1">
+              <a:defRPr sz="1400" b="1">
                 <a:solidFill>
                   <a:srgbClr val="0F172A"/>
                 </a:solidFill>
@@ -15254,57 +15058,57 @@
           <a:p>
             <a:pPr>
               <a:spcAft>
-                <a:spcPts val="500"/>
+                <a:spcPts val="800"/>
               </a:spcAft>
             </a:pPr>
             <a:r>
-              <a:rPr b="1" sz="950">
+              <a:rPr b="1" sz="1150">
                 <a:solidFill>
                   <a:srgbClr val="0F172A"/>
                 </a:solidFill>
               </a:rPr>
-              <a:t>•  Non-Linear Boundaries: </a:t>
-            </a:r>
-            <a:r>
-              <a:rPr sz="850">
+              <a:t>•  Non-Linear Clinical Boundaries: </a:t>
+            </a:r>
+            <a:r>
+              <a:rPr sz="1100">
                 <a:solidFill>
                   <a:srgbClr val="64748B"/>
                 </a:solidFill>
               </a:rPr>
-              <a:t>Physiological biomarker interactions (e.g. high stress + short sleep + evening screen time) are highly non-linear and cannot be captured by linear classifiers.</a:t>
+              <a:t>Physiological biomarker interactions (e.g. high stress + short sleep + screen time) are highly non-linear and cannot be separated by linear planes.</a:t>
             </a:r>
           </a:p>
           <a:p>
             <a:pPr>
               <a:spcAft>
-                <a:spcPts val="500"/>
+                <a:spcPts val="800"/>
               </a:spcAft>
             </a:pPr>
             <a:r>
-              <a:rPr b="1" sz="950">
+              <a:rPr b="1" sz="1150">
                 <a:solidFill>
                   <a:srgbClr val="0F172A"/>
                 </a:solidFill>
               </a:rPr>
-              <a:t>•  Invariance to Scaling: </a:t>
-            </a:r>
-            <a:r>
-              <a:rPr sz="850">
+              <a:t>•  Scale Invariance: </a:t>
+            </a:r>
+            <a:r>
+              <a:rPr sz="1100">
                 <a:solidFill>
                   <a:srgbClr val="64748B"/>
                 </a:solidFill>
               </a:rPr>
-              <a:t>Decision trees split on individual feature values, eliminating the requirement for standard normalization or min-max scaling.</a:t>
+              <a:t>Decision tree partitioning is invariant to feature scale, eliminating the requirement for sensitive min-max scaling.</a:t>
             </a:r>
           </a:p>
           <a:p>
             <a:pPr>
               <a:spcAft>
-                <a:spcPts val="500"/>
+                <a:spcPts val="800"/>
               </a:spcAft>
             </a:pPr>
             <a:r>
-              <a:rPr b="1" sz="950">
+              <a:rPr b="1" sz="1150">
                 <a:solidFill>
                   <a:srgbClr val="0F172A"/>
                 </a:solidFill>
@@ -15312,58 +15116,35 @@
               <a:t>•  Embarrassingly Parallel: </a:t>
             </a:r>
             <a:r>
-              <a:rPr sz="850">
+              <a:rPr sz="1100">
                 <a:solidFill>
                   <a:srgbClr val="64748B"/>
                 </a:solidFill>
               </a:rPr>
-              <a:t>Each decision tree in an ensemble is grown independently. Spark MLlib task schedulers distribute tree-construction tasks across worker cores simultaneously.</a:t>
+              <a:t>Each decision tree in an ensemble is grown independently. Spark's task scheduler distributes tree-building tasks across all CPU worker threads concurrently.</a:t>
             </a:r>
           </a:p>
           <a:p>
             <a:pPr>
               <a:spcAft>
-                <a:spcPts val="500"/>
+                <a:spcPts val="800"/>
               </a:spcAft>
             </a:pPr>
             <a:r>
-              <a:rPr b="1" sz="950">
+              <a:rPr b="1" sz="1150">
                 <a:solidFill>
                   <a:srgbClr val="0F172A"/>
                 </a:solidFill>
               </a:rPr>
-              <a:t>•  Model Hyperparameters: </a:t>
-            </a:r>
-            <a:r>
-              <a:rPr sz="850">
+              <a:t>•  Overfitting Resilience: </a:t>
+            </a:r>
+            <a:r>
+              <a:rPr sz="1100">
                 <a:solidFill>
                   <a:srgbClr val="64748B"/>
                 </a:solidFill>
               </a:rPr>
-              <a:t>Configured with numTrees=50, maxDepth=8, and seed=42 to balance high expressive capacity while preventing tree overfitting.</a:t>
-            </a:r>
-          </a:p>
-          <a:p>
-            <a:pPr>
-              <a:spcAft>
-                <a:spcPts val="500"/>
-              </a:spcAft>
-            </a:pPr>
-            <a:r>
-              <a:rPr b="1" sz="950">
-                <a:solidFill>
-                  <a:srgbClr val="0F172A"/>
-                </a:solidFill>
-              </a:rPr>
-              <a:t>•  Train/Test Partitioning: </a:t>
-            </a:r>
-            <a:r>
-              <a:rPr sz="850">
-                <a:solidFill>
-                  <a:srgbClr val="64748B"/>
-                </a:solidFill>
-              </a:rPr>
-              <a:t>Split cleanly into 80% training (80,000 records) and 20% hold-out testing (20,000 records) using randomSplit([0.8, 0.2]).</a:t>
+              <a:t>Averaging predictions across 50 independently randomized decision trees significantly reduces variance on noisy wearable telemetry.</a:t>
             </a:r>
           </a:p>
         </p:txBody>
@@ -15376,18 +15157,18 @@
         </p:nvSpPr>
         <p:spPr>
           <a:xfrm>
-            <a:off x="6217920" y="1417320"/>
-            <a:ext cx="5242255" cy="4846320"/>
+            <a:off x="6217920" y="1463040"/>
+            <a:ext cx="5242255" cy="4754880"/>
           </a:xfrm>
           <a:prstGeom prst="roundRect">
             <a:avLst/>
           </a:prstGeom>
           <a:solidFill>
-            <a:srgbClr val="F8FAFC"/>
+            <a:srgbClr val="FFFFFF"/>
           </a:solidFill>
-          <a:ln w="12700">
+          <a:ln w="19050">
             <a:solidFill>
-              <a:srgbClr val="CBD5E1"/>
+              <a:srgbClr val="0F172A"/>
             </a:solidFill>
           </a:ln>
         </p:spPr>
@@ -15421,8 +15202,8 @@
         </p:nvSpPr>
         <p:spPr>
           <a:xfrm>
-            <a:off x="6400800" y="1554480"/>
-            <a:ext cx="4876495" cy="1280160"/>
+            <a:off x="6446520" y="1600200"/>
+            <a:ext cx="4754880" cy="4480560"/>
           </a:xfrm>
           <a:prstGeom prst="rect">
             <a:avLst/>
@@ -15437,56 +15218,158 @@
           <a:p>
             <a:pPr>
               <a:spcAft>
-                <a:spcPts val="600"/>
+                <a:spcPts val="1400"/>
               </a:spcAft>
-              <a:defRPr sz="1100" b="1">
+              <a:defRPr sz="1400" b="1">
                 <a:solidFill>
                   <a:srgbClr val="0F172A"/>
                 </a:solidFill>
               </a:defRPr>
             </a:pPr>
             <a:r>
-              <a:t>MODEL TRAINING &amp; PREDICTIONS PREVIEW</a:t>
-            </a:r>
-          </a:p>
-          <a:p>
-            <a:pPr>
-              <a:defRPr sz="850">
+              <a:t>MODEL CONFIGURATION &amp; TRAINING SPECS</a:t>
+            </a:r>
+          </a:p>
+          <a:p>
+            <a:pPr>
+              <a:spcAft>
+                <a:spcPts val="700"/>
+              </a:spcAft>
+            </a:pPr>
+            <a:r>
+              <a:rPr b="1" sz="1150">
+                <a:solidFill>
+                  <a:srgbClr val="0F172A"/>
+                </a:solidFill>
+              </a:rPr>
+              <a:t>Number of Trees (`numTrees`): </a:t>
+            </a:r>
+            <a:r>
+              <a:rPr sz="1100">
                 <a:solidFill>
                   <a:srgbClr val="64748B"/>
                 </a:solidFill>
-              </a:defRPr>
-            </a:pPr>
-            <a:r>
-              <a:t>Trained pipeline on 80,000 records and generated predictions on 20,000 unseen test records. Preview confirms alignment between actual sleep_disorder_risk labels and model predictions.</a:t>
-            </a:r>
-          </a:p>
-        </p:txBody>
-      </p:sp>
-      <p:pic>
-        <p:nvPicPr>
-          <p:cNvPr id="14" name="Picture 13" descr="Screenshot 2026-10-24 180227.png"/>
-          <p:cNvPicPr>
-            <a:picLocks noChangeAspect="1"/>
-          </p:cNvPicPr>
-          <p:nvPr/>
-        </p:nvPicPr>
-        <p:blipFill>
-          <a:blip r:embed="rId3"/>
-          <a:stretch>
-            <a:fillRect/>
-          </a:stretch>
-        </p:blipFill>
-        <p:spPr>
-          <a:xfrm>
-            <a:off x="6583680" y="2926080"/>
-            <a:ext cx="4480560" cy="3400141"/>
-          </a:xfrm>
-          <a:prstGeom prst="rect">
-            <a:avLst/>
-          </a:prstGeom>
-        </p:spPr>
-      </p:pic>
+              </a:rPr>
+              <a:t>50 ensemble decision trees built in parallel across worker cores.</a:t>
+            </a:r>
+          </a:p>
+          <a:p>
+            <a:pPr>
+              <a:spcAft>
+                <a:spcPts val="700"/>
+              </a:spcAft>
+            </a:pPr>
+            <a:r>
+              <a:rPr b="1" sz="1150">
+                <a:solidFill>
+                  <a:srgbClr val="0F172A"/>
+                </a:solidFill>
+              </a:rPr>
+              <a:t>Tree Depth (`maxDepth`): </a:t>
+            </a:r>
+            <a:r>
+              <a:rPr sz="1100">
+                <a:solidFill>
+                  <a:srgbClr val="64748B"/>
+                </a:solidFill>
+              </a:rPr>
+              <a:t>Maximum depth of 8 splits, preventing individual tree overfitting.</a:t>
+            </a:r>
+          </a:p>
+          <a:p>
+            <a:pPr>
+              <a:spcAft>
+                <a:spcPts val="700"/>
+              </a:spcAft>
+            </a:pPr>
+            <a:r>
+              <a:rPr b="1" sz="1150">
+                <a:solidFill>
+                  <a:srgbClr val="0F172A"/>
+                </a:solidFill>
+              </a:rPr>
+              <a:t>Training Cohort Split: </a:t>
+            </a:r>
+            <a:r>
+              <a:rPr sz="1100">
+                <a:solidFill>
+                  <a:srgbClr val="64748B"/>
+                </a:solidFill>
+              </a:rPr>
+              <a:t>80% partition (80,000 patient records) allocated for distributed model fitting.</a:t>
+            </a:r>
+          </a:p>
+          <a:p>
+            <a:pPr>
+              <a:spcAft>
+                <a:spcPts val="700"/>
+              </a:spcAft>
+            </a:pPr>
+            <a:r>
+              <a:rPr b="1" sz="1150">
+                <a:solidFill>
+                  <a:srgbClr val="0F172A"/>
+                </a:solidFill>
+              </a:rPr>
+              <a:t>Unseen Hold-Out Partition: </a:t>
+            </a:r>
+            <a:r>
+              <a:rPr sz="1100">
+                <a:solidFill>
+                  <a:srgbClr val="64748B"/>
+                </a:solidFill>
+              </a:rPr>
+              <a:t>20% partition (20,000 patient records) strictly reserved for hold-out evaluation.</a:t>
+            </a:r>
+          </a:p>
+          <a:p>
+            <a:pPr>
+              <a:spcAft>
+                <a:spcPts val="700"/>
+              </a:spcAft>
+            </a:pPr>
+            <a:r>
+              <a:rPr b="1" sz="1150">
+                <a:solidFill>
+                  <a:srgbClr val="0F172A"/>
+                </a:solidFill>
+              </a:rPr>
+              <a:t>Randomization Seed: </a:t>
+            </a:r>
+            <a:r>
+              <a:rPr sz="1100">
+                <a:solidFill>
+                  <a:srgbClr val="64748B"/>
+                </a:solidFill>
+              </a:rPr>
+              <a:t>seed=42 applied across data splitting and tree subsampling for strict reproducibility.</a:t>
+            </a:r>
+          </a:p>
+          <a:p>
+            <a:pPr>
+              <a:spcAft>
+                <a:spcPts val="700"/>
+              </a:spcAft>
+            </a:pPr>
+            <a:r>
+              <a:rPr b="1" sz="1150">
+                <a:solidFill>
+                  <a:srgbClr val="0F172A"/>
+                </a:solidFill>
+              </a:rPr>
+              <a:t>Off-Heap In-Memory Caching: </a:t>
+            </a:r>
+            <a:r>
+              <a:rPr sz="1100">
+                <a:solidFill>
+                  <a:srgbClr val="64748B"/>
+                </a:solidFill>
+              </a:rPr>
+              <a:t>Inference DataFrame cached in executor memory (.cache()) for zero-latency multi-metric evaluation.</a:t>
+            </a:r>
+          </a:p>
+        </p:txBody>
+      </p:sp>
     </p:spTree>
   </p:cSld>
   <p:clrMapOvr>
